--- a/templates/Template_Pitch_Keynote_Bold.pptx
+++ b/templates/Template_Pitch_Keynote_Bold.pptx
@@ -7,9 +7,13 @@
   <p:sldIdLst>
     <p:sldId id="256" r:id="rId2"/>
     <p:sldId id="257" r:id="rId3"/>
+    <p:sldId id="258" r:id="rId4"/>
+    <p:sldId id="259" r:id="rId5"/>
+    <p:sldId id="260" r:id="rId6"/>
+    <p:sldId id="261" r:id="rId7"/>
   </p:sldIdLst>
   <p:notesMasterIdLst>
-    <p:notesMasterId r:id="rId4"/>
+    <p:notesMasterId r:id="rId8"/>
   </p:notesMasterIdLst>
   <p:sldSz cx="12192000" cy="6858000"/>
   <p:notesSz cx="6858000" cy="12192000"/>
@@ -592,8 +596,8 @@
           <a:p>
             <a:r>
               <a:rPr lang="en-US" dirty="0"/>
-              <a:t>2. Pitch Traction &amp; Market Size
-note: [트랙션 발표] 현재 350개 이상의 B2B 고객사와 월 45만 달러 MRR을 달성하며 거대한 시장을 선점하고 있습니다.</a:t>
+              <a:t>2. Pitch Deck Outline
+note: [아젠다 피치] 문제 정의부터 제품 솔루션, 폭발적 성장 트랙션, 투자 제안까지 설명하겠습니다.</a:t>
             </a:r>
             <a:endParaRPr lang="en-US" dirty="0"/>
           </a:p>
@@ -617,6 +621,362 @@
             <a:fld id="{F7021451-1387-4CA6-816F-3879F97B5CBC}" type="slidenum">
               <a:rPr lang="en-US"/>
               <a:t>2</a:t>
+            </a:fld>
+            <a:endParaRPr lang="en-US"/>
+          </a:p>
+        </p:txBody>
+      </p:sp>
+    </p:spTree>
+    <p:extLst>
+      <p:ext uri="{BB962C8B-B14F-4D97-AF65-F5344CB8AC3E}">
+        <p14:creationId xmlns:p14="http://schemas.microsoft.com/office/powerpoint/2010/main" val="1024086991"/>
+      </p:ext>
+    </p:extLst>
+  </p:cSld>
+  <p:clrMapOvr>
+    <a:masterClrMapping/>
+  </p:clrMapOvr>
+</p:notes>
+</file>
+
+<file path=ppt/notesSlides/notesSlide3.xml><?xml version="1.0" encoding="utf-8"?>
+<p:notes xmlns:a="http://schemas.openxmlformats.org/drawingml/2006/main" xmlns:r="http://schemas.openxmlformats.org/officeDocument/2006/relationships" xmlns:p="http://schemas.openxmlformats.org/presentationml/2006/main">
+  <p:cSld>
+    <p:spTree>
+      <p:nvGrpSpPr>
+        <p:cNvPr id="1" name=""/>
+        <p:cNvGrpSpPr/>
+        <p:nvPr/>
+      </p:nvGrpSpPr>
+      <p:grpSpPr>
+        <a:xfrm>
+          <a:off x="0" y="0"/>
+          <a:ext cx="0" cy="0"/>
+          <a:chOff x="0" y="0"/>
+          <a:chExt cx="0" cy="0"/>
+        </a:xfrm>
+      </p:grpSpPr>
+      <p:sp>
+        <p:nvSpPr>
+          <p:cNvPr id="2" name="Slide Image Placeholder 1"/>
+          <p:cNvSpPr>
+            <a:spLocks noGrp="1" noRot="1" noChangeAspect="1"/>
+          </p:cNvSpPr>
+          <p:nvPr>
+            <p:ph type="sldImg"/>
+          </p:nvPr>
+        </p:nvSpPr>
+        <p:spPr/>
+      </p:sp>
+      <p:sp>
+        <p:nvSpPr>
+          <p:cNvPr id="3" name="Notes Placeholder 2"/>
+          <p:cNvSpPr>
+            <a:spLocks noGrp="1"/>
+          </p:cNvSpPr>
+          <p:nvPr>
+            <p:ph type="body" idx="1"/>
+          </p:nvPr>
+        </p:nvSpPr>
+        <p:spPr/>
+        <p:txBody>
+          <a:bodyPr/>
+          <a:lstStyle/>
+          <a:p>
+            <a:r>
+              <a:rPr lang="en-US" dirty="0"/>
+              <a:t>3. Pitch Traction &amp; Market Size
+note: [트랙션 피치] 현재 350개 이상의 B2B 고객사와 월 45만 달러 MRR을 달성하며 폭발적으로 성장하고 있습니다.</a:t>
+            </a:r>
+            <a:endParaRPr lang="en-US" dirty="0"/>
+          </a:p>
+        </p:txBody>
+      </p:sp>
+      <p:sp>
+        <p:nvSpPr>
+          <p:cNvPr id="4" name="Slide Number Placeholder 3"/>
+          <p:cNvSpPr>
+            <a:spLocks noGrp="1"/>
+          </p:cNvSpPr>
+          <p:nvPr>
+            <p:ph type="sldNum" sz="quarter" idx="10"/>
+          </p:nvPr>
+        </p:nvSpPr>
+        <p:spPr/>
+        <p:txBody>
+          <a:bodyPr/>
+          <a:lstStyle/>
+          <a:p>
+            <a:fld id="{F7021451-1387-4CA6-816F-3879F97B5CBC}" type="slidenum">
+              <a:rPr lang="en-US"/>
+              <a:t>3</a:t>
+            </a:fld>
+            <a:endParaRPr lang="en-US"/>
+          </a:p>
+        </p:txBody>
+      </p:sp>
+    </p:spTree>
+    <p:extLst>
+      <p:ext uri="{BB962C8B-B14F-4D97-AF65-F5344CB8AC3E}">
+        <p14:creationId xmlns:p14="http://schemas.microsoft.com/office/powerpoint/2010/main" val="1024086991"/>
+      </p:ext>
+    </p:extLst>
+  </p:cSld>
+  <p:clrMapOvr>
+    <a:masterClrMapping/>
+  </p:clrMapOvr>
+</p:notes>
+</file>
+
+<file path=ppt/notesSlides/notesSlide4.xml><?xml version="1.0" encoding="utf-8"?>
+<p:notes xmlns:a="http://schemas.openxmlformats.org/drawingml/2006/main" xmlns:r="http://schemas.openxmlformats.org/officeDocument/2006/relationships" xmlns:p="http://schemas.openxmlformats.org/presentationml/2006/main">
+  <p:cSld>
+    <p:spTree>
+      <p:nvGrpSpPr>
+        <p:cNvPr id="1" name=""/>
+        <p:cNvGrpSpPr/>
+        <p:nvPr/>
+      </p:nvGrpSpPr>
+      <p:grpSpPr>
+        <a:xfrm>
+          <a:off x="0" y="0"/>
+          <a:ext cx="0" cy="0"/>
+          <a:chOff x="0" y="0"/>
+          <a:chExt cx="0" cy="0"/>
+        </a:xfrm>
+      </p:grpSpPr>
+      <p:sp>
+        <p:nvSpPr>
+          <p:cNvPr id="2" name="Slide Image Placeholder 1"/>
+          <p:cNvSpPr>
+            <a:spLocks noGrp="1" noRot="1" noChangeAspect="1"/>
+          </p:cNvSpPr>
+          <p:nvPr>
+            <p:ph type="sldImg"/>
+          </p:nvPr>
+        </p:nvSpPr>
+        <p:spPr/>
+      </p:sp>
+      <p:sp>
+        <p:nvSpPr>
+          <p:cNvPr id="3" name="Notes Placeholder 2"/>
+          <p:cNvSpPr>
+            <a:spLocks noGrp="1"/>
+          </p:cNvSpPr>
+          <p:nvPr>
+            <p:ph type="body" idx="1"/>
+          </p:nvPr>
+        </p:nvSpPr>
+        <p:spPr/>
+        <p:txBody>
+          <a:bodyPr/>
+          <a:lstStyle/>
+          <a:p>
+            <a:r>
+              <a:rPr lang="en-US" dirty="0"/>
+              <a:t>4. Product Paradigm Shift
+note: [제품 비전] 단순 자동 완성을 넘어 기획부터 배포까지 스스로 수행하는 자율형 엔지니어링 군단입니다.</a:t>
+            </a:r>
+            <a:endParaRPr lang="en-US" dirty="0"/>
+          </a:p>
+        </p:txBody>
+      </p:sp>
+      <p:sp>
+        <p:nvSpPr>
+          <p:cNvPr id="4" name="Slide Number Placeholder 3"/>
+          <p:cNvSpPr>
+            <a:spLocks noGrp="1"/>
+          </p:cNvSpPr>
+          <p:nvPr>
+            <p:ph type="sldNum" sz="quarter" idx="10"/>
+          </p:nvPr>
+        </p:nvSpPr>
+        <p:spPr/>
+        <p:txBody>
+          <a:bodyPr/>
+          <a:lstStyle/>
+          <a:p>
+            <a:fld id="{F7021451-1387-4CA6-816F-3879F97B5CBC}" type="slidenum">
+              <a:rPr lang="en-US"/>
+              <a:t>4</a:t>
+            </a:fld>
+            <a:endParaRPr lang="en-US"/>
+          </a:p>
+        </p:txBody>
+      </p:sp>
+    </p:spTree>
+    <p:extLst>
+      <p:ext uri="{BB962C8B-B14F-4D97-AF65-F5344CB8AC3E}">
+        <p14:creationId xmlns:p14="http://schemas.microsoft.com/office/powerpoint/2010/main" val="1024086991"/>
+      </p:ext>
+    </p:extLst>
+  </p:cSld>
+  <p:clrMapOvr>
+    <a:masterClrMapping/>
+  </p:clrMapOvr>
+</p:notes>
+</file>
+
+<file path=ppt/notesSlides/notesSlide5.xml><?xml version="1.0" encoding="utf-8"?>
+<p:notes xmlns:a="http://schemas.openxmlformats.org/drawingml/2006/main" xmlns:r="http://schemas.openxmlformats.org/officeDocument/2006/relationships" xmlns:p="http://schemas.openxmlformats.org/presentationml/2006/main">
+  <p:cSld>
+    <p:spTree>
+      <p:nvGrpSpPr>
+        <p:cNvPr id="1" name=""/>
+        <p:cNvGrpSpPr/>
+        <p:nvPr/>
+      </p:nvGrpSpPr>
+      <p:grpSpPr>
+        <a:xfrm>
+          <a:off x="0" y="0"/>
+          <a:ext cx="0" cy="0"/>
+          <a:chOff x="0" y="0"/>
+          <a:chExt cx="0" cy="0"/>
+        </a:xfrm>
+      </p:grpSpPr>
+      <p:sp>
+        <p:nvSpPr>
+          <p:cNvPr id="2" name="Slide Image Placeholder 1"/>
+          <p:cNvSpPr>
+            <a:spLocks noGrp="1" noRot="1" noChangeAspect="1"/>
+          </p:cNvSpPr>
+          <p:nvPr>
+            <p:ph type="sldImg"/>
+          </p:nvPr>
+        </p:nvSpPr>
+        <p:spPr/>
+      </p:sp>
+      <p:sp>
+        <p:nvSpPr>
+          <p:cNvPr id="3" name="Notes Placeholder 2"/>
+          <p:cNvSpPr>
+            <a:spLocks noGrp="1"/>
+          </p:cNvSpPr>
+          <p:nvPr>
+            <p:ph type="body" idx="1"/>
+          </p:nvPr>
+        </p:nvSpPr>
+        <p:spPr/>
+        <p:txBody>
+          <a:bodyPr/>
+          <a:lstStyle/>
+          <a:p>
+            <a:r>
+              <a:rPr lang="en-US" dirty="0"/>
+              <a:t>5. Business Model &amp; Growth Flywheel
+note: [비즈니스 모델] 시트당 구독과 토큰 종량제의 결합으로 155% NRR을 기록하고 있습니다.</a:t>
+            </a:r>
+            <a:endParaRPr lang="en-US" dirty="0"/>
+          </a:p>
+        </p:txBody>
+      </p:sp>
+      <p:sp>
+        <p:nvSpPr>
+          <p:cNvPr id="4" name="Slide Number Placeholder 3"/>
+          <p:cNvSpPr>
+            <a:spLocks noGrp="1"/>
+          </p:cNvSpPr>
+          <p:nvPr>
+            <p:ph type="sldNum" sz="quarter" idx="10"/>
+          </p:nvPr>
+        </p:nvSpPr>
+        <p:spPr/>
+        <p:txBody>
+          <a:bodyPr/>
+          <a:lstStyle/>
+          <a:p>
+            <a:fld id="{F7021451-1387-4CA6-816F-3879F97B5CBC}" type="slidenum">
+              <a:rPr lang="en-US"/>
+              <a:t>5</a:t>
+            </a:fld>
+            <a:endParaRPr lang="en-US"/>
+          </a:p>
+        </p:txBody>
+      </p:sp>
+    </p:spTree>
+    <p:extLst>
+      <p:ext uri="{BB962C8B-B14F-4D97-AF65-F5344CB8AC3E}">
+        <p14:creationId xmlns:p14="http://schemas.microsoft.com/office/powerpoint/2010/main" val="1024086991"/>
+      </p:ext>
+    </p:extLst>
+  </p:cSld>
+  <p:clrMapOvr>
+    <a:masterClrMapping/>
+  </p:clrMapOvr>
+</p:notes>
+</file>
+
+<file path=ppt/notesSlides/notesSlide6.xml><?xml version="1.0" encoding="utf-8"?>
+<p:notes xmlns:a="http://schemas.openxmlformats.org/drawingml/2006/main" xmlns:r="http://schemas.openxmlformats.org/officeDocument/2006/relationships" xmlns:p="http://schemas.openxmlformats.org/presentationml/2006/main">
+  <p:cSld>
+    <p:spTree>
+      <p:nvGrpSpPr>
+        <p:cNvPr id="1" name=""/>
+        <p:cNvGrpSpPr/>
+        <p:nvPr/>
+      </p:nvGrpSpPr>
+      <p:grpSpPr>
+        <a:xfrm>
+          <a:off x="0" y="0"/>
+          <a:ext cx="0" cy="0"/>
+          <a:chOff x="0" y="0"/>
+          <a:chExt cx="0" cy="0"/>
+        </a:xfrm>
+      </p:grpSpPr>
+      <p:sp>
+        <p:nvSpPr>
+          <p:cNvPr id="2" name="Slide Image Placeholder 1"/>
+          <p:cNvSpPr>
+            <a:spLocks noGrp="1" noRot="1" noChangeAspect="1"/>
+          </p:cNvSpPr>
+          <p:nvPr>
+            <p:ph type="sldImg"/>
+          </p:nvPr>
+        </p:nvSpPr>
+        <p:spPr/>
+      </p:sp>
+      <p:sp>
+        <p:nvSpPr>
+          <p:cNvPr id="3" name="Notes Placeholder 2"/>
+          <p:cNvSpPr>
+            <a:spLocks noGrp="1"/>
+          </p:cNvSpPr>
+          <p:nvPr>
+            <p:ph type="body" idx="1"/>
+          </p:nvPr>
+        </p:nvSpPr>
+        <p:spPr/>
+        <p:txBody>
+          <a:bodyPr/>
+          <a:lstStyle/>
+          <a:p>
+            <a:r>
+              <a:rPr lang="en-US" dirty="0"/>
+              <a:t>6. Pitch Closing &amp; Investment Ask Hub
+note: [피치 마무리] 500만 달러 Series A 투자를 통해 글로벌 1위 플랫폼으로 도약하겠습니다. 투자자 여러분의 질문을 환영합니다. 감사합니다.</a:t>
+            </a:r>
+            <a:endParaRPr lang="en-US" dirty="0"/>
+          </a:p>
+        </p:txBody>
+      </p:sp>
+      <p:sp>
+        <p:nvSpPr>
+          <p:cNvPr id="4" name="Slide Number Placeholder 3"/>
+          <p:cNvSpPr>
+            <a:spLocks noGrp="1"/>
+          </p:cNvSpPr>
+          <p:nvPr>
+            <p:ph type="sldNum" sz="quarter" idx="10"/>
+          </p:nvPr>
+        </p:nvSpPr>
+        <p:spPr/>
+        <p:txBody>
+          <a:bodyPr/>
+          <a:lstStyle/>
+          <a:p>
+            <a:fld id="{F7021451-1387-4CA6-816F-3879F97B5CBC}" type="slidenum">
+              <a:rPr lang="en-US"/>
+              <a:t>6</a:t>
             </a:fld>
             <a:endParaRPr lang="en-US"/>
           </a:p>
@@ -984,6 +1344,162 @@
 <file path=ppt/slides/slide2.xml><?xml version="1.0" encoding="utf-8"?>
 <p:sld xmlns:a="http://schemas.openxmlformats.org/drawingml/2006/main" xmlns:r="http://schemas.openxmlformats.org/officeDocument/2006/relationships" xmlns:p="http://schemas.openxmlformats.org/presentationml/2006/main">
   <p:cSld name="Slide 2">
+    <p:bg>
+      <p:bgPr>
+        <a:blipFill dpi="0" rotWithShape="1">
+          <a:blip r:embed="rId1">
+            <a:lum/>
+          </a:blip>
+          <a:srcRect/>
+          <a:stretch>
+            <a:fillRect/>
+          </a:stretch>
+        </a:blipFill>
+        <a:effectLst/>
+      </p:bgPr>
+    </p:bg>
+    <p:spTree>
+      <p:nvGrpSpPr>
+        <p:cNvPr id="1" name=""/>
+        <p:cNvGrpSpPr/>
+        <p:nvPr/>
+      </p:nvGrpSpPr>
+      <p:grpSpPr>
+        <a:xfrm>
+          <a:off x="0" y="0"/>
+          <a:ext cx="0" cy="0"/>
+          <a:chOff x="0" y="0"/>
+          <a:chExt cx="0" cy="0"/>
+        </a:xfrm>
+      </p:grpSpPr>
+    </p:spTree>
+  </p:cSld>
+  <p:clrMapOvr>
+    <a:masterClrMapping/>
+  </p:clrMapOvr>
+</p:sld>
+</file>
+
+<file path=ppt/slides/slide3.xml><?xml version="1.0" encoding="utf-8"?>
+<p:sld xmlns:a="http://schemas.openxmlformats.org/drawingml/2006/main" xmlns:r="http://schemas.openxmlformats.org/officeDocument/2006/relationships" xmlns:p="http://schemas.openxmlformats.org/presentationml/2006/main">
+  <p:cSld name="Slide 3">
+    <p:bg>
+      <p:bgPr>
+        <a:blipFill dpi="0" rotWithShape="1">
+          <a:blip r:embed="rId1">
+            <a:lum/>
+          </a:blip>
+          <a:srcRect/>
+          <a:stretch>
+            <a:fillRect/>
+          </a:stretch>
+        </a:blipFill>
+        <a:effectLst/>
+      </p:bgPr>
+    </p:bg>
+    <p:spTree>
+      <p:nvGrpSpPr>
+        <p:cNvPr id="1" name=""/>
+        <p:cNvGrpSpPr/>
+        <p:nvPr/>
+      </p:nvGrpSpPr>
+      <p:grpSpPr>
+        <a:xfrm>
+          <a:off x="0" y="0"/>
+          <a:ext cx="0" cy="0"/>
+          <a:chOff x="0" y="0"/>
+          <a:chExt cx="0" cy="0"/>
+        </a:xfrm>
+      </p:grpSpPr>
+    </p:spTree>
+  </p:cSld>
+  <p:clrMapOvr>
+    <a:masterClrMapping/>
+  </p:clrMapOvr>
+</p:sld>
+</file>
+
+<file path=ppt/slides/slide4.xml><?xml version="1.0" encoding="utf-8"?>
+<p:sld xmlns:a="http://schemas.openxmlformats.org/drawingml/2006/main" xmlns:r="http://schemas.openxmlformats.org/officeDocument/2006/relationships" xmlns:p="http://schemas.openxmlformats.org/presentationml/2006/main">
+  <p:cSld name="Slide 4">
+    <p:bg>
+      <p:bgPr>
+        <a:blipFill dpi="0" rotWithShape="1">
+          <a:blip r:embed="rId1">
+            <a:lum/>
+          </a:blip>
+          <a:srcRect/>
+          <a:stretch>
+            <a:fillRect/>
+          </a:stretch>
+        </a:blipFill>
+        <a:effectLst/>
+      </p:bgPr>
+    </p:bg>
+    <p:spTree>
+      <p:nvGrpSpPr>
+        <p:cNvPr id="1" name=""/>
+        <p:cNvGrpSpPr/>
+        <p:nvPr/>
+      </p:nvGrpSpPr>
+      <p:grpSpPr>
+        <a:xfrm>
+          <a:off x="0" y="0"/>
+          <a:ext cx="0" cy="0"/>
+          <a:chOff x="0" y="0"/>
+          <a:chExt cx="0" cy="0"/>
+        </a:xfrm>
+      </p:grpSpPr>
+    </p:spTree>
+  </p:cSld>
+  <p:clrMapOvr>
+    <a:masterClrMapping/>
+  </p:clrMapOvr>
+</p:sld>
+</file>
+
+<file path=ppt/slides/slide5.xml><?xml version="1.0" encoding="utf-8"?>
+<p:sld xmlns:a="http://schemas.openxmlformats.org/drawingml/2006/main" xmlns:r="http://schemas.openxmlformats.org/officeDocument/2006/relationships" xmlns:p="http://schemas.openxmlformats.org/presentationml/2006/main">
+  <p:cSld name="Slide 5">
+    <p:bg>
+      <p:bgPr>
+        <a:blipFill dpi="0" rotWithShape="1">
+          <a:blip r:embed="rId1">
+            <a:lum/>
+          </a:blip>
+          <a:srcRect/>
+          <a:stretch>
+            <a:fillRect/>
+          </a:stretch>
+        </a:blipFill>
+        <a:effectLst/>
+      </p:bgPr>
+    </p:bg>
+    <p:spTree>
+      <p:nvGrpSpPr>
+        <p:cNvPr id="1" name=""/>
+        <p:cNvGrpSpPr/>
+        <p:nvPr/>
+      </p:nvGrpSpPr>
+      <p:grpSpPr>
+        <a:xfrm>
+          <a:off x="0" y="0"/>
+          <a:ext cx="0" cy="0"/>
+          <a:chOff x="0" y="0"/>
+          <a:chExt cx="0" cy="0"/>
+        </a:xfrm>
+      </p:grpSpPr>
+    </p:spTree>
+  </p:cSld>
+  <p:clrMapOvr>
+    <a:masterClrMapping/>
+  </p:clrMapOvr>
+</p:sld>
+</file>
+
+<file path=ppt/slides/slide6.xml><?xml version="1.0" encoding="utf-8"?>
+<p:sld xmlns:a="http://schemas.openxmlformats.org/drawingml/2006/main" xmlns:r="http://schemas.openxmlformats.org/officeDocument/2006/relationships" xmlns:p="http://schemas.openxmlformats.org/presentationml/2006/main">
+  <p:cSld name="Slide 6">
     <p:bg>
       <p:bgPr>
         <a:blipFill dpi="0" rotWithShape="1">

--- a/templates/Template_Pitch_Keynote_Bold.pptx
+++ b/templates/Template_Pitch_Keynote_Bold.pptx
@@ -507,8 +507,7 @@
           <a:p>
             <a:r>
               <a:rPr lang="en-US" dirty="0"/>
-              <a:t>1. Pitch Cover Slide
-note: [피치 오프닝] 개발자의 업무 생산성을 10배 이상 끌어올리는 차세대 AI 에이전트 플랫폼을 소개합니다.</a:t>
+              <a:t>[피치 오프닝] 개발자의 업무 생산성을 10배 이상 끌어올리는 차세대 AI 에이전트 플랫폼을 소개합니다.</a:t>
             </a:r>
             <a:endParaRPr lang="en-US" dirty="0"/>
           </a:p>
@@ -596,8 +595,7 @@
           <a:p>
             <a:r>
               <a:rPr lang="en-US" dirty="0"/>
-              <a:t>2. Pitch Deck Outline
-note: [아젠다 피치] 문제 정의부터 제품 솔루션, 폭발적 성장 트랙션, 투자 제안까지 설명하겠습니다.</a:t>
+              <a:t>[아젠다 피치] 문제 정의부터 제품 솔루션, 폭발적 성장 트랙션, 투자 제안까지 설명하겠습니다.</a:t>
             </a:r>
             <a:endParaRPr lang="en-US" dirty="0"/>
           </a:p>
@@ -685,8 +683,7 @@
           <a:p>
             <a:r>
               <a:rPr lang="en-US" dirty="0"/>
-              <a:t>3. Pitch Traction &amp; Market Size
-note: [트랙션 피치] 현재 350개 이상의 B2B 고객사와 월 45만 달러 MRR을 달성하며 폭발적으로 성장하고 있습니다.</a:t>
+              <a:t>[트랙션 피치] 현재 350개 이상의 B2B 고객사와 월 45만 달러 MRR을 달성하며 폭발적으로 성장하고 있습니다.</a:t>
             </a:r>
             <a:endParaRPr lang="en-US" dirty="0"/>
           </a:p>
@@ -774,8 +771,7 @@
           <a:p>
             <a:r>
               <a:rPr lang="en-US" dirty="0"/>
-              <a:t>4. Product Paradigm Shift
-note: [제품 비전] 단순 자동 완성을 넘어 기획부터 배포까지 스스로 수행하는 자율형 엔지니어링 군단입니다.</a:t>
+              <a:t>[제품 비전] 단순 자동 완성을 넘어 기획부터 배포까지 스스로 수행하는 자율형 엔지니어링 군단입니다.</a:t>
             </a:r>
             <a:endParaRPr lang="en-US" dirty="0"/>
           </a:p>
@@ -863,8 +859,7 @@
           <a:p>
             <a:r>
               <a:rPr lang="en-US" dirty="0"/>
-              <a:t>5. Business Model &amp; Growth Flywheel
-note: [비즈니스 모델] 시트당 구독과 토큰 종량제의 결합으로 155% NRR을 기록하고 있습니다.</a:t>
+              <a:t>[비즈니스 모델] 시트당 구독과 토큰 종량제의 결합으로 155% NRR을 기록하고 있습니다.</a:t>
             </a:r>
             <a:endParaRPr lang="en-US" dirty="0"/>
           </a:p>
@@ -952,8 +947,7 @@
           <a:p>
             <a:r>
               <a:rPr lang="en-US" dirty="0"/>
-              <a:t>6. Pitch Closing &amp; Investment Ask Hub
-note: [피치 마무리] 500만 달러 Series A 투자를 통해 글로벌 1위 플랫폼으로 도약하겠습니다. 투자자 여러분의 질문을 환영합니다. 감사합니다.</a:t>
+              <a:t>[피치 마무리] 500만 달러 Series A 투자를 통해 글로벌 1위 플랫폼으로 도약하겠습니다. 투자자 여러분의 질문을 환영합니다. 감사합니다.</a:t>
             </a:r>
             <a:endParaRPr lang="en-US" dirty="0"/>
           </a:p>
@@ -1307,16 +1301,9 @@
   <p:cSld name="Slide 1">
     <p:bg>
       <p:bgPr>
-        <a:blipFill dpi="0" rotWithShape="1">
-          <a:blip r:embed="rId1">
-            <a:lum/>
-          </a:blip>
-          <a:srcRect/>
-          <a:stretch>
-            <a:fillRect/>
-          </a:stretch>
-        </a:blipFill>
-        <a:effectLst/>
+        <a:solidFill>
+          <a:srgbClr val="FBBF24"/>
+        </a:solidFill>
       </p:bgPr>
     </p:bg>
     <p:spTree>
@@ -1333,6 +1320,548 @@
           <a:chExt cx="0" cy="0"/>
         </a:xfrm>
       </p:grpSpPr>
+      <p:sp>
+        <p:nvSpPr>
+          <p:cNvPr id="2" name="Shape 0"/>
+          <p:cNvSpPr/>
+          <p:nvPr/>
+        </p:nvSpPr>
+        <p:spPr>
+          <a:xfrm>
+            <a:off x="552480" y="428671"/>
+            <a:ext cx="3690153" cy="445770"/>
+          </a:xfrm>
+          <a:prstGeom prst="roundRect">
+            <a:avLst>
+              <a:gd name="adj" fmla="val 50010"/>
+            </a:avLst>
+          </a:prstGeom>
+          <a:solidFill>
+            <a:srgbClr val="FBBF24">
+              <a:alpha val="18000"/>
+            </a:srgbClr>
+          </a:solidFill>
+          <a:ln w="9525">
+            <a:solidFill>
+              <a:srgbClr val="FBBF24">
+                <a:alpha val="40000"/>
+              </a:srgbClr>
+            </a:solidFill>
+            <a:prstDash val="solid"/>
+          </a:ln>
+        </p:spPr>
+      </p:sp>
+      <p:sp>
+        <p:nvSpPr>
+          <p:cNvPr id="3" name="Text 1"/>
+          <p:cNvSpPr txBox="1"/>
+          <p:nvPr/>
+        </p:nvSpPr>
+        <p:spPr>
+          <a:xfrm>
+            <a:off x="695310" y="481980"/>
+            <a:ext cx="3654674" cy="331470"/>
+          </a:xfrm>
+          <a:prstGeom prst="rect">
+            <a:avLst/>
+          </a:prstGeom>
+          <a:noFill/>
+          <a:ln/>
+        </p:spPr>
+        <p:txBody>
+          <a:bodyPr wrap="none" lIns="0" tIns="0" rIns="0" bIns="0" rtlCol="0" anchor="t"/>
+          <a:lstStyle/>
+          <a:p>
+            <a:pPr algn="l" indent="0" marL="0">
+              <a:lnSpc>
+                <a:spcPts val="2610"/>
+              </a:lnSpc>
+              <a:buNone/>
+            </a:pPr>
+            <a:r>
+              <a:rPr lang="en-US" sz="1740" b="1" spc="70" kern="0" dirty="0">
+                <a:solidFill>
+                  <a:srgbClr val="FBBF24"/>
+                </a:solidFill>
+                <a:latin typeface="Malgun Gothic" pitchFamily="34" charset="0"/>
+                <a:ea typeface="Malgun Gothic" pitchFamily="34" charset="-122"/>
+                <a:cs typeface="Malgun Gothic" pitchFamily="34" charset="-120"/>
+              </a:rPr>
+              <a:t>SERIES A INVESTMENT PITCH</a:t>
+            </a:r>
+            <a:endParaRPr lang="en-US" sz="1740" dirty="0"/>
+          </a:p>
+        </p:txBody>
+      </p:sp>
+      <p:sp>
+        <p:nvSpPr>
+          <p:cNvPr id="4" name="Text 2"/>
+          <p:cNvSpPr txBox="1"/>
+          <p:nvPr/>
+        </p:nvSpPr>
+        <p:spPr>
+          <a:xfrm>
+            <a:off x="533370" y="1056132"/>
+            <a:ext cx="11125230" cy="1691914"/>
+          </a:xfrm>
+          <a:prstGeom prst="rect">
+            <a:avLst/>
+          </a:prstGeom>
+          <a:noFill/>
+          <a:ln/>
+        </p:spPr>
+        <p:txBody>
+          <a:bodyPr wrap="square" lIns="0" tIns="0" rIns="0" bIns="0" rtlCol="0" anchor="t"/>
+          <a:lstStyle/>
+          <a:p>
+            <a:pPr algn="l" indent="0" marL="0">
+              <a:lnSpc>
+                <a:spcPts val="6661"/>
+              </a:lnSpc>
+              <a:buNone/>
+            </a:pPr>
+            <a:r>
+              <a:rPr lang="en-US" sz="5329" b="1" spc="-187" kern="0" dirty="0">
+                <a:solidFill>
+                  <a:srgbClr val="FFFFFF"/>
+                </a:solidFill>
+                <a:latin typeface="Malgun Gothic" pitchFamily="34" charset="0"/>
+                <a:ea typeface="Malgun Gothic" pitchFamily="34" charset="-122"/>
+                <a:cs typeface="Malgun Gothic" pitchFamily="34" charset="-120"/>
+              </a:rPr>
+              <a:t>AI 에이전트 워크플로우를 자동화하는</a:t>
+            </a:r>
+            <a:pPr algn="l" indent="0" marL="0">
+              <a:lnSpc>
+                <a:spcPts val="6661"/>
+              </a:lnSpc>
+              <a:buNone/>
+            </a:pPr>
+            <a:endParaRPr lang="en-US" sz="5329" dirty="0"/>
+          </a:p>
+          <a:p>
+            <a:pPr algn="l" indent="0" marL="0">
+              <a:lnSpc>
+                <a:spcPts val="6661"/>
+              </a:lnSpc>
+              <a:buNone/>
+            </a:pPr>
+            <a:r>
+              <a:rPr lang="en-US" sz="5329" b="1" spc="-187" kern="0" dirty="0">
+                <a:solidFill>
+                  <a:srgbClr val="FFFFFF"/>
+                </a:solidFill>
+                <a:latin typeface="Malgun Gothic" pitchFamily="34" charset="0"/>
+                <a:ea typeface="Malgun Gothic" pitchFamily="34" charset="-122"/>
+                <a:cs typeface="Malgun Gothic" pitchFamily="34" charset="-120"/>
+              </a:rPr>
+              <a:t> </a:t>
+            </a:r>
+            <a:endParaRPr lang="en-US" sz="5329" dirty="0"/>
+          </a:p>
+          <a:p>
+            <a:pPr algn="l" indent="0" marL="0">
+              <a:lnSpc>
+                <a:spcPts val="6661"/>
+              </a:lnSpc>
+              <a:buNone/>
+            </a:pPr>
+            <a:r>
+              <a:rPr lang="en-US" sz="5329" b="1" spc="-187" kern="0" dirty="0">
+                <a:solidFill>
+                  <a:srgbClr val="FBBF24"/>
+                </a:solidFill>
+                <a:latin typeface="Malgun Gothic" pitchFamily="34" charset="0"/>
+                <a:ea typeface="Malgun Gothic" pitchFamily="34" charset="-122"/>
+                <a:cs typeface="Malgun Gothic" pitchFamily="34" charset="-120"/>
+              </a:rPr>
+              <a:t>엔터프라이즈 오토노머스 플랫폼</a:t>
+            </a:r>
+            <a:endParaRPr lang="en-US" sz="5329" dirty="0"/>
+          </a:p>
+        </p:txBody>
+      </p:sp>
+      <p:sp>
+        <p:nvSpPr>
+          <p:cNvPr id="5" name="Text 3"/>
+          <p:cNvSpPr txBox="1"/>
+          <p:nvPr/>
+        </p:nvSpPr>
+        <p:spPr>
+          <a:xfrm>
+            <a:off x="533370" y="3064794"/>
+            <a:ext cx="11993088" cy="256032"/>
+          </a:xfrm>
+          <a:prstGeom prst="rect">
+            <a:avLst/>
+          </a:prstGeom>
+          <a:noFill/>
+          <a:ln/>
+        </p:spPr>
+        <p:txBody>
+          <a:bodyPr wrap="none" lIns="0" tIns="0" rIns="0" bIns="0" rtlCol="0" anchor="t"/>
+          <a:lstStyle/>
+          <a:p>
+            <a:pPr algn="l" indent="0" marL="0">
+              <a:lnSpc>
+                <a:spcPts val="2016"/>
+              </a:lnSpc>
+              <a:buNone/>
+            </a:pPr>
+            <a:r>
+              <a:rPr lang="en-US" sz="1344" spc="-54" kern="0" dirty="0">
+                <a:solidFill>
+                  <a:srgbClr val="94A3B8"/>
+                </a:solidFill>
+                <a:latin typeface="Malgun Gothic" pitchFamily="34" charset="0"/>
+                <a:ea typeface="Malgun Gothic" pitchFamily="34" charset="-122"/>
+                <a:cs typeface="Malgun Gothic" pitchFamily="34" charset="-120"/>
+              </a:rPr>
+              <a:t>반복적인 코딩 및 디자인 작업을 10배 빠르게 혁신하는 개발 생산성 솔루션</a:t>
+            </a:r>
+            <a:endParaRPr lang="en-US" sz="1344" dirty="0"/>
+          </a:p>
+        </p:txBody>
+      </p:sp>
+      <p:sp>
+        <p:nvSpPr>
+          <p:cNvPr id="6" name="Shape 4"/>
+          <p:cNvSpPr/>
+          <p:nvPr/>
+        </p:nvSpPr>
+        <p:spPr>
+          <a:xfrm>
+            <a:off x="552480" y="5517855"/>
+            <a:ext cx="3818992" cy="921075"/>
+          </a:xfrm>
+          <a:prstGeom prst="roundRect">
+            <a:avLst>
+              <a:gd name="adj" fmla="val 12409"/>
+            </a:avLst>
+          </a:prstGeom>
+          <a:solidFill>
+            <a:srgbClr val="151826"/>
+          </a:solidFill>
+          <a:ln w="9525">
+            <a:solidFill>
+              <a:srgbClr val="FFFFFF">
+                <a:alpha val="10000"/>
+              </a:srgbClr>
+            </a:solidFill>
+            <a:prstDash val="solid"/>
+          </a:ln>
+        </p:spPr>
+      </p:sp>
+      <p:sp>
+        <p:nvSpPr>
+          <p:cNvPr id="7" name="Text 5"/>
+          <p:cNvSpPr txBox="1"/>
+          <p:nvPr/>
+        </p:nvSpPr>
+        <p:spPr>
+          <a:xfrm>
+            <a:off x="714421" y="5639471"/>
+            <a:ext cx="3752606" cy="290048"/>
+          </a:xfrm>
+          <a:prstGeom prst="rect">
+            <a:avLst/>
+          </a:prstGeom>
+          <a:noFill/>
+          <a:ln/>
+        </p:spPr>
+        <p:txBody>
+          <a:bodyPr wrap="none" lIns="0" tIns="0" rIns="0" bIns="0" rtlCol="0" anchor="t"/>
+          <a:lstStyle/>
+          <a:p>
+            <a:pPr algn="l" indent="0" marL="0">
+              <a:lnSpc>
+                <a:spcPts val="2284"/>
+              </a:lnSpc>
+              <a:buNone/>
+            </a:pPr>
+            <a:r>
+              <a:rPr lang="en-US" sz="1523" b="1" spc="76" kern="0" dirty="0">
+                <a:solidFill>
+                  <a:srgbClr val="FBBF24"/>
+                </a:solidFill>
+                <a:latin typeface="Malgun Gothic" pitchFamily="34" charset="0"/>
+                <a:ea typeface="Malgun Gothic" pitchFamily="34" charset="-122"/>
+                <a:cs typeface="Malgun Gothic" pitchFamily="34" charset="-120"/>
+              </a:rPr>
+              <a:t>FOUNDER &amp; CEO</a:t>
+            </a:r>
+            <a:endParaRPr lang="en-US" sz="1523" dirty="0"/>
+          </a:p>
+        </p:txBody>
+      </p:sp>
+      <p:sp>
+        <p:nvSpPr>
+          <p:cNvPr id="8" name="Text 6"/>
+          <p:cNvSpPr txBox="1"/>
+          <p:nvPr/>
+        </p:nvSpPr>
+        <p:spPr>
+          <a:xfrm>
+            <a:off x="714421" y="5949178"/>
+            <a:ext cx="3752606" cy="364663"/>
+          </a:xfrm>
+          <a:prstGeom prst="rect">
+            <a:avLst/>
+          </a:prstGeom>
+          <a:noFill/>
+          <a:ln/>
+        </p:spPr>
+        <p:txBody>
+          <a:bodyPr wrap="none" lIns="0" tIns="0" rIns="0" bIns="0" rtlCol="0" anchor="t"/>
+          <a:lstStyle/>
+          <a:p>
+            <a:pPr algn="l" indent="0" marL="0">
+              <a:lnSpc>
+                <a:spcPts val="2871"/>
+              </a:lnSpc>
+              <a:buNone/>
+            </a:pPr>
+            <a:r>
+              <a:rPr lang="en-US" sz="1914" b="1" spc="-54" kern="0" dirty="0">
+                <a:solidFill>
+                  <a:srgbClr val="FFFFFF"/>
+                </a:solidFill>
+                <a:latin typeface="Malgun Gothic" pitchFamily="34" charset="0"/>
+                <a:ea typeface="Malgun Gothic" pitchFamily="34" charset="-122"/>
+                <a:cs typeface="Malgun Gothic" pitchFamily="34" charset="-120"/>
+              </a:rPr>
+              <a:t>홍길동 • Founder &amp; CEO</a:t>
+            </a:r>
+            <a:endParaRPr lang="en-US" sz="1914" dirty="0"/>
+          </a:p>
+        </p:txBody>
+      </p:sp>
+      <p:sp>
+        <p:nvSpPr>
+          <p:cNvPr id="9" name="Shape 7"/>
+          <p:cNvSpPr/>
+          <p:nvPr/>
+        </p:nvSpPr>
+        <p:spPr>
+          <a:xfrm>
+            <a:off x="4504792" y="5517855"/>
+            <a:ext cx="3182386" cy="921075"/>
+          </a:xfrm>
+          <a:prstGeom prst="roundRect">
+            <a:avLst>
+              <a:gd name="adj" fmla="val 12409"/>
+            </a:avLst>
+          </a:prstGeom>
+          <a:solidFill>
+            <a:srgbClr val="151826"/>
+          </a:solidFill>
+          <a:ln w="9525">
+            <a:solidFill>
+              <a:srgbClr val="FFFFFF">
+                <a:alpha val="10000"/>
+              </a:srgbClr>
+            </a:solidFill>
+            <a:prstDash val="solid"/>
+          </a:ln>
+        </p:spPr>
+      </p:sp>
+      <p:sp>
+        <p:nvSpPr>
+          <p:cNvPr id="10" name="Text 8"/>
+          <p:cNvSpPr txBox="1"/>
+          <p:nvPr/>
+        </p:nvSpPr>
+        <p:spPr>
+          <a:xfrm>
+            <a:off x="4666640" y="5639471"/>
+            <a:ext cx="3065160" cy="290048"/>
+          </a:xfrm>
+          <a:prstGeom prst="rect">
+            <a:avLst/>
+          </a:prstGeom>
+          <a:noFill/>
+          <a:ln/>
+        </p:spPr>
+        <p:txBody>
+          <a:bodyPr wrap="none" lIns="0" tIns="0" rIns="0" bIns="0" rtlCol="0" anchor="t"/>
+          <a:lstStyle/>
+          <a:p>
+            <a:pPr algn="l" indent="0" marL="0">
+              <a:lnSpc>
+                <a:spcPts val="2284"/>
+              </a:lnSpc>
+              <a:buNone/>
+            </a:pPr>
+            <a:r>
+              <a:rPr lang="en-US" sz="1523" b="1" spc="76" kern="0" dirty="0">
+                <a:solidFill>
+                  <a:srgbClr val="FBBF24"/>
+                </a:solidFill>
+                <a:latin typeface="Malgun Gothic" pitchFamily="34" charset="0"/>
+                <a:ea typeface="Malgun Gothic" pitchFamily="34" charset="-122"/>
+                <a:cs typeface="Malgun Gothic" pitchFamily="34" charset="-120"/>
+              </a:rPr>
+              <a:t>INVESTMENT ROUND</a:t>
+            </a:r>
+            <a:endParaRPr lang="en-US" sz="1523" dirty="0"/>
+          </a:p>
+        </p:txBody>
+      </p:sp>
+      <p:sp>
+        <p:nvSpPr>
+          <p:cNvPr id="11" name="Text 9"/>
+          <p:cNvSpPr txBox="1"/>
+          <p:nvPr/>
+        </p:nvSpPr>
+        <p:spPr>
+          <a:xfrm>
+            <a:off x="4666640" y="5949178"/>
+            <a:ext cx="3065160" cy="364663"/>
+          </a:xfrm>
+          <a:prstGeom prst="rect">
+            <a:avLst/>
+          </a:prstGeom>
+          <a:noFill/>
+          <a:ln/>
+        </p:spPr>
+        <p:txBody>
+          <a:bodyPr wrap="none" lIns="0" tIns="0" rIns="0" bIns="0" rtlCol="0" anchor="t"/>
+          <a:lstStyle/>
+          <a:p>
+            <a:pPr algn="l" indent="0" marL="0">
+              <a:lnSpc>
+                <a:spcPts val="2871"/>
+              </a:lnSpc>
+              <a:buNone/>
+            </a:pPr>
+            <a:r>
+              <a:rPr lang="en-US" sz="1914" b="1" spc="-54" kern="0" dirty="0">
+                <a:solidFill>
+                  <a:srgbClr val="FFFFFF"/>
+                </a:solidFill>
+                <a:latin typeface="Malgun Gothic" pitchFamily="34" charset="0"/>
+                <a:ea typeface="Malgun Gothic" pitchFamily="34" charset="-122"/>
+                <a:cs typeface="Malgun Gothic" pitchFamily="34" charset="-120"/>
+              </a:rPr>
+              <a:t>Series A ($5M Target)</a:t>
+            </a:r>
+            <a:endParaRPr lang="en-US" sz="1914" dirty="0"/>
+          </a:p>
+        </p:txBody>
+      </p:sp>
+      <p:sp>
+        <p:nvSpPr>
+          <p:cNvPr id="12" name="Shape 10"/>
+          <p:cNvSpPr/>
+          <p:nvPr/>
+        </p:nvSpPr>
+        <p:spPr>
+          <a:xfrm>
+            <a:off x="7820497" y="5517855"/>
+            <a:ext cx="3819083" cy="921075"/>
+          </a:xfrm>
+          <a:prstGeom prst="roundRect">
+            <a:avLst>
+              <a:gd name="adj" fmla="val 12409"/>
+            </a:avLst>
+          </a:prstGeom>
+          <a:solidFill>
+            <a:srgbClr val="151826"/>
+          </a:solidFill>
+          <a:ln w="9525">
+            <a:solidFill>
+              <a:srgbClr val="FBBF24">
+                <a:alpha val="35000"/>
+              </a:srgbClr>
+            </a:solidFill>
+            <a:prstDash val="solid"/>
+          </a:ln>
+        </p:spPr>
+      </p:sp>
+      <p:sp>
+        <p:nvSpPr>
+          <p:cNvPr id="13" name="Text 11"/>
+          <p:cNvSpPr txBox="1"/>
+          <p:nvPr/>
+        </p:nvSpPr>
+        <p:spPr>
+          <a:xfrm>
+            <a:off x="7982438" y="5639471"/>
+            <a:ext cx="3752698" cy="290048"/>
+          </a:xfrm>
+          <a:prstGeom prst="rect">
+            <a:avLst/>
+          </a:prstGeom>
+          <a:noFill/>
+          <a:ln/>
+        </p:spPr>
+        <p:txBody>
+          <a:bodyPr wrap="none" lIns="0" tIns="0" rIns="0" bIns="0" rtlCol="0" anchor="t"/>
+          <a:lstStyle/>
+          <a:p>
+            <a:pPr algn="l" indent="0" marL="0">
+              <a:lnSpc>
+                <a:spcPts val="2284"/>
+              </a:lnSpc>
+              <a:buNone/>
+            </a:pPr>
+            <a:r>
+              <a:rPr lang="en-US" sz="1523" b="1" spc="76" kern="0" dirty="0">
+                <a:solidFill>
+                  <a:srgbClr val="FBBF24"/>
+                </a:solidFill>
+                <a:latin typeface="Malgun Gothic" pitchFamily="34" charset="0"/>
+                <a:ea typeface="Malgun Gothic" pitchFamily="34" charset="-122"/>
+                <a:cs typeface="Malgun Gothic" pitchFamily="34" charset="-120"/>
+              </a:rPr>
+              <a:t>IR DECK VERSION</a:t>
+            </a:r>
+            <a:endParaRPr lang="en-US" sz="1523" dirty="0"/>
+          </a:p>
+        </p:txBody>
+      </p:sp>
+      <p:sp>
+        <p:nvSpPr>
+          <p:cNvPr id="14" name="Text 12"/>
+          <p:cNvSpPr txBox="1"/>
+          <p:nvPr/>
+        </p:nvSpPr>
+        <p:spPr>
+          <a:xfrm>
+            <a:off x="7982438" y="5949178"/>
+            <a:ext cx="3752698" cy="364663"/>
+          </a:xfrm>
+          <a:prstGeom prst="rect">
+            <a:avLst/>
+          </a:prstGeom>
+          <a:noFill/>
+          <a:ln/>
+        </p:spPr>
+        <p:txBody>
+          <a:bodyPr wrap="none" lIns="0" tIns="0" rIns="0" bIns="0" rtlCol="0" anchor="t"/>
+          <a:lstStyle/>
+          <a:p>
+            <a:pPr algn="l" indent="0" marL="0">
+              <a:lnSpc>
+                <a:spcPts val="2871"/>
+              </a:lnSpc>
+              <a:buNone/>
+            </a:pPr>
+            <a:r>
+              <a:rPr lang="en-US" sz="1914" b="1" spc="-54" kern="0" dirty="0">
+                <a:solidFill>
+                  <a:srgbClr val="FBBF24"/>
+                </a:solidFill>
+                <a:latin typeface="Malgun Gothic" pitchFamily="34" charset="0"/>
+                <a:ea typeface="Malgun Gothic" pitchFamily="34" charset="-122"/>
+                <a:cs typeface="Malgun Gothic" pitchFamily="34" charset="-120"/>
+              </a:rPr>
+              <a:t>Confidential IR Deck v2.4</a:t>
+            </a:r>
+            <a:endParaRPr lang="en-US" sz="1914" dirty="0"/>
+          </a:p>
+        </p:txBody>
+      </p:sp>
     </p:spTree>
   </p:cSld>
   <p:clrMapOvr>
@@ -1346,16 +1875,9 @@
   <p:cSld name="Slide 2">
     <p:bg>
       <p:bgPr>
-        <a:blipFill dpi="0" rotWithShape="1">
-          <a:blip r:embed="rId1">
-            <a:lum/>
-          </a:blip>
-          <a:srcRect/>
-          <a:stretch>
-            <a:fillRect/>
-          </a:stretch>
-        </a:blipFill>
-        <a:effectLst/>
+        <a:solidFill>
+          <a:srgbClr val="FBBF24"/>
+        </a:solidFill>
       </p:bgPr>
     </p:bg>
     <p:spTree>
@@ -1372,6 +1894,1219 @@
           <a:chExt cx="0" cy="0"/>
         </a:xfrm>
       </p:grpSpPr>
+      <p:sp>
+        <p:nvSpPr>
+          <p:cNvPr id="2" name="Shape 0"/>
+          <p:cNvSpPr/>
+          <p:nvPr/>
+        </p:nvSpPr>
+        <p:spPr>
+          <a:xfrm>
+            <a:off x="552480" y="1628821"/>
+            <a:ext cx="2085198" cy="445770"/>
+          </a:xfrm>
+          <a:prstGeom prst="roundRect">
+            <a:avLst>
+              <a:gd name="adj" fmla="val 50010"/>
+            </a:avLst>
+          </a:prstGeom>
+          <a:solidFill>
+            <a:srgbClr val="FBBF24">
+              <a:alpha val="18000"/>
+            </a:srgbClr>
+          </a:solidFill>
+          <a:ln w="9525">
+            <a:solidFill>
+              <a:srgbClr val="FBBF24">
+                <a:alpha val="40000"/>
+              </a:srgbClr>
+            </a:solidFill>
+            <a:prstDash val="solid"/>
+          </a:ln>
+        </p:spPr>
+      </p:sp>
+      <p:sp>
+        <p:nvSpPr>
+          <p:cNvPr id="3" name="Text 1"/>
+          <p:cNvSpPr txBox="1"/>
+          <p:nvPr/>
+        </p:nvSpPr>
+        <p:spPr>
+          <a:xfrm>
+            <a:off x="695310" y="1682130"/>
+            <a:ext cx="1921337" cy="331470"/>
+          </a:xfrm>
+          <a:prstGeom prst="rect">
+            <a:avLst/>
+          </a:prstGeom>
+          <a:noFill/>
+          <a:ln/>
+        </p:spPr>
+        <p:txBody>
+          <a:bodyPr wrap="none" lIns="0" tIns="0" rIns="0" bIns="0" rtlCol="0" anchor="t"/>
+          <a:lstStyle/>
+          <a:p>
+            <a:pPr algn="l" indent="0" marL="0">
+              <a:lnSpc>
+                <a:spcPts val="2610"/>
+              </a:lnSpc>
+              <a:buNone/>
+            </a:pPr>
+            <a:r>
+              <a:rPr lang="en-US" sz="1740" b="1" spc="70" kern="0" dirty="0">
+                <a:solidFill>
+                  <a:srgbClr val="FBBF24"/>
+                </a:solidFill>
+                <a:latin typeface="Malgun Gothic" pitchFamily="34" charset="0"/>
+                <a:ea typeface="Malgun Gothic" pitchFamily="34" charset="-122"/>
+                <a:cs typeface="Malgun Gothic" pitchFamily="34" charset="-120"/>
+              </a:rPr>
+              <a:t>PITCH OUTLINE</a:t>
+            </a:r>
+            <a:endParaRPr lang="en-US" sz="1740" dirty="0"/>
+          </a:p>
+        </p:txBody>
+      </p:sp>
+      <p:sp>
+        <p:nvSpPr>
+          <p:cNvPr id="4" name="Text 2"/>
+          <p:cNvSpPr txBox="1"/>
+          <p:nvPr/>
+        </p:nvSpPr>
+        <p:spPr>
+          <a:xfrm>
+            <a:off x="533370" y="2206630"/>
+            <a:ext cx="2693640" cy="621518"/>
+          </a:xfrm>
+          <a:prstGeom prst="rect">
+            <a:avLst/>
+          </a:prstGeom>
+          <a:noFill/>
+          <a:ln/>
+        </p:spPr>
+        <p:txBody>
+          <a:bodyPr wrap="none" lIns="0" tIns="0" rIns="0" bIns="0" rtlCol="0" anchor="t"/>
+          <a:lstStyle/>
+          <a:p>
+            <a:pPr algn="l" indent="0" marL="0">
+              <a:lnSpc>
+                <a:spcPts val="4894"/>
+              </a:lnSpc>
+              <a:buNone/>
+            </a:pPr>
+            <a:r>
+              <a:rPr lang="en-US" sz="3263" b="1" spc="261" kern="0" dirty="0">
+                <a:solidFill>
+                  <a:srgbClr val="FFFFFF"/>
+                </a:solidFill>
+                <a:latin typeface="Malgun Gothic" pitchFamily="34" charset="0"/>
+                <a:ea typeface="Malgun Gothic" pitchFamily="34" charset="-122"/>
+                <a:cs typeface="Malgun Gothic" pitchFamily="34" charset="-120"/>
+              </a:rPr>
+              <a:t>STORYLINE</a:t>
+            </a:r>
+            <a:endParaRPr lang="en-US" sz="3263" dirty="0"/>
+          </a:p>
+        </p:txBody>
+      </p:sp>
+      <p:sp>
+        <p:nvSpPr>
+          <p:cNvPr id="5" name="Text 3"/>
+          <p:cNvSpPr txBox="1"/>
+          <p:nvPr/>
+        </p:nvSpPr>
+        <p:spPr>
+          <a:xfrm>
+            <a:off x="533370" y="2900202"/>
+            <a:ext cx="2514600" cy="402336"/>
+          </a:xfrm>
+          <a:prstGeom prst="rect">
+            <a:avLst/>
+          </a:prstGeom>
+          <a:noFill/>
+          <a:ln/>
+        </p:spPr>
+        <p:txBody>
+          <a:bodyPr wrap="square" lIns="0" tIns="0" rIns="0" bIns="0" rtlCol="0" anchor="t"/>
+          <a:lstStyle/>
+          <a:p>
+            <a:pPr algn="l" indent="0" marL="0">
+              <a:lnSpc>
+                <a:spcPts val="1584"/>
+              </a:lnSpc>
+              <a:buNone/>
+            </a:pPr>
+            <a:r>
+              <a:rPr lang="en-US" sz="1056" spc="-54" kern="0" dirty="0">
+                <a:solidFill>
+                  <a:srgbClr val="94A3B8"/>
+                </a:solidFill>
+                <a:latin typeface="Malgun Gothic" pitchFamily="34" charset="0"/>
+                <a:ea typeface="Malgun Gothic" pitchFamily="34" charset="-122"/>
+                <a:cs typeface="Malgun Gothic" pitchFamily="34" charset="-120"/>
+              </a:rPr>
+              <a:t>시장 문제부터</a:t>
+            </a:r>
+            <a:endParaRPr lang="en-US" sz="1056" dirty="0"/>
+          </a:p>
+          <a:p>
+            <a:pPr algn="l" indent="0" marL="0">
+              <a:lnSpc>
+                <a:spcPts val="1584"/>
+              </a:lnSpc>
+              <a:buNone/>
+            </a:pPr>
+            <a:r>
+              <a:rPr lang="en-US" sz="1056" spc="-54" kern="0" dirty="0">
+                <a:solidFill>
+                  <a:srgbClr val="94A3B8"/>
+                </a:solidFill>
+                <a:latin typeface="Malgun Gothic" pitchFamily="34" charset="0"/>
+                <a:ea typeface="Malgun Gothic" pitchFamily="34" charset="-122"/>
+                <a:cs typeface="Malgun Gothic" pitchFamily="34" charset="-120"/>
+              </a:rPr>
+              <a:t>투자 제안까지 4챕터</a:t>
+            </a:r>
+            <a:endParaRPr lang="en-US" sz="1056" dirty="0"/>
+          </a:p>
+        </p:txBody>
+      </p:sp>
+      <p:sp>
+        <p:nvSpPr>
+          <p:cNvPr id="6" name="Shape 4"/>
+          <p:cNvSpPr/>
+          <p:nvPr/>
+        </p:nvSpPr>
+        <p:spPr>
+          <a:xfrm>
+            <a:off x="552480" y="4686300"/>
+            <a:ext cx="95280" cy="95280"/>
+          </a:xfrm>
+          <a:prstGeom prst="roundRect">
+            <a:avLst>
+              <a:gd name="adj" fmla="val 50000"/>
+            </a:avLst>
+          </a:prstGeom>
+          <a:solidFill>
+            <a:srgbClr val="FBBF24"/>
+          </a:solidFill>
+          <a:ln/>
+        </p:spPr>
+      </p:sp>
+      <p:sp>
+        <p:nvSpPr>
+          <p:cNvPr id="7" name="Shape 5"/>
+          <p:cNvSpPr/>
+          <p:nvPr/>
+        </p:nvSpPr>
+        <p:spPr>
+          <a:xfrm>
+            <a:off x="761970" y="4724430"/>
+            <a:ext cx="571500" cy="19020"/>
+          </a:xfrm>
+          <a:prstGeom prst="rect">
+            <a:avLst/>
+          </a:prstGeom>
+          <a:solidFill>
+            <a:srgbClr val="FBBF24">
+              <a:alpha val="50000"/>
+            </a:srgbClr>
+          </a:solidFill>
+          <a:ln/>
+        </p:spPr>
+      </p:sp>
+      <p:sp>
+        <p:nvSpPr>
+          <p:cNvPr id="8" name="Shape 6"/>
+          <p:cNvSpPr/>
+          <p:nvPr/>
+        </p:nvSpPr>
+        <p:spPr>
+          <a:xfrm>
+            <a:off x="552480" y="4914900"/>
+            <a:ext cx="95280" cy="95280"/>
+          </a:xfrm>
+          <a:prstGeom prst="roundRect">
+            <a:avLst>
+              <a:gd name="adj" fmla="val 50000"/>
+            </a:avLst>
+          </a:prstGeom>
+          <a:solidFill>
+            <a:srgbClr val="38BDF8"/>
+          </a:solidFill>
+          <a:ln/>
+        </p:spPr>
+      </p:sp>
+      <p:sp>
+        <p:nvSpPr>
+          <p:cNvPr id="9" name="Shape 7"/>
+          <p:cNvSpPr/>
+          <p:nvPr/>
+        </p:nvSpPr>
+        <p:spPr>
+          <a:xfrm>
+            <a:off x="761970" y="4953030"/>
+            <a:ext cx="952530" cy="19020"/>
+          </a:xfrm>
+          <a:prstGeom prst="rect">
+            <a:avLst/>
+          </a:prstGeom>
+          <a:solidFill>
+            <a:srgbClr val="38BDF8">
+              <a:alpha val="60000"/>
+            </a:srgbClr>
+          </a:solidFill>
+          <a:ln/>
+        </p:spPr>
+      </p:sp>
+      <p:sp>
+        <p:nvSpPr>
+          <p:cNvPr id="10" name="Shape 8"/>
+          <p:cNvSpPr/>
+          <p:nvPr/>
+        </p:nvSpPr>
+        <p:spPr>
+          <a:xfrm>
+            <a:off x="552480" y="5143500"/>
+            <a:ext cx="95280" cy="95280"/>
+          </a:xfrm>
+          <a:prstGeom prst="roundRect">
+            <a:avLst>
+              <a:gd name="adj" fmla="val 50000"/>
+            </a:avLst>
+          </a:prstGeom>
+          <a:solidFill>
+            <a:srgbClr val="FBBF24"/>
+          </a:solidFill>
+          <a:ln/>
+        </p:spPr>
+      </p:sp>
+      <p:sp>
+        <p:nvSpPr>
+          <p:cNvPr id="11" name="Shape 9"/>
+          <p:cNvSpPr/>
+          <p:nvPr/>
+        </p:nvSpPr>
+        <p:spPr>
+          <a:xfrm>
+            <a:off x="761970" y="5181630"/>
+            <a:ext cx="428671" cy="19020"/>
+          </a:xfrm>
+          <a:prstGeom prst="rect">
+            <a:avLst/>
+          </a:prstGeom>
+          <a:solidFill>
+            <a:srgbClr val="FBBF24">
+              <a:alpha val="50000"/>
+            </a:srgbClr>
+          </a:solidFill>
+          <a:ln/>
+        </p:spPr>
+      </p:sp>
+      <p:sp>
+        <p:nvSpPr>
+          <p:cNvPr id="12" name="Shape 10"/>
+          <p:cNvSpPr/>
+          <p:nvPr/>
+        </p:nvSpPr>
+        <p:spPr>
+          <a:xfrm>
+            <a:off x="3486150" y="142921"/>
+            <a:ext cx="4000500" cy="2795595"/>
+          </a:xfrm>
+          <a:prstGeom prst="roundRect">
+            <a:avLst>
+              <a:gd name="adj" fmla="val 5453"/>
+            </a:avLst>
+          </a:prstGeom>
+          <a:solidFill>
+            <a:srgbClr val="151826"/>
+          </a:solidFill>
+          <a:ln w="9525">
+            <a:solidFill>
+              <a:srgbClr val="FFFFFF">
+                <a:alpha val="10000"/>
+              </a:srgbClr>
+            </a:solidFill>
+            <a:prstDash val="solid"/>
+          </a:ln>
+        </p:spPr>
+      </p:sp>
+      <p:sp>
+        <p:nvSpPr>
+          <p:cNvPr id="13" name="Shape 11"/>
+          <p:cNvSpPr/>
+          <p:nvPr/>
+        </p:nvSpPr>
+        <p:spPr>
+          <a:xfrm>
+            <a:off x="3705240" y="342900"/>
+            <a:ext cx="247620" cy="247620"/>
+          </a:xfrm>
+          <a:prstGeom prst="roundRect">
+            <a:avLst>
+              <a:gd name="adj" fmla="val 50000"/>
+            </a:avLst>
+          </a:prstGeom>
+          <a:solidFill>
+            <a:srgbClr val="FBBF24">
+              <a:alpha val="18000"/>
+            </a:srgbClr>
+          </a:solidFill>
+          <a:ln w="9525">
+            <a:solidFill>
+              <a:srgbClr val="FBBF24">
+                <a:alpha val="40000"/>
+              </a:srgbClr>
+            </a:solidFill>
+            <a:prstDash val="solid"/>
+          </a:ln>
+        </p:spPr>
+      </p:sp>
+      <p:sp>
+        <p:nvSpPr>
+          <p:cNvPr id="14" name="Text 12"/>
+          <p:cNvSpPr txBox="1"/>
+          <p:nvPr/>
+        </p:nvSpPr>
+        <p:spPr>
+          <a:xfrm>
+            <a:off x="3695730" y="308427"/>
+            <a:ext cx="304770" cy="310805"/>
+          </a:xfrm>
+          <a:prstGeom prst="rect">
+            <a:avLst/>
+          </a:prstGeom>
+          <a:noFill/>
+          <a:ln/>
+        </p:spPr>
+        <p:txBody>
+          <a:bodyPr wrap="none" lIns="0" tIns="0" rIns="0" bIns="0" rtlCol="0" anchor="t"/>
+          <a:lstStyle/>
+          <a:p>
+            <a:pPr algn="l" indent="0" marL="0">
+              <a:lnSpc>
+                <a:spcPts val="2447"/>
+              </a:lnSpc>
+              <a:buNone/>
+            </a:pPr>
+            <a:r>
+              <a:rPr lang="en-US" sz="1631" b="1" spc="-54" kern="0" dirty="0">
+                <a:solidFill>
+                  <a:srgbClr val="FBBF24"/>
+                </a:solidFill>
+                <a:latin typeface="Malgun Gothic" pitchFamily="34" charset="0"/>
+                <a:ea typeface="Malgun Gothic" pitchFamily="34" charset="-122"/>
+                <a:cs typeface="Malgun Gothic" pitchFamily="34" charset="-120"/>
+              </a:rPr>
+              <a:t>01</a:t>
+            </a:r>
+            <a:endParaRPr lang="en-US" sz="1631" dirty="0"/>
+          </a:p>
+        </p:txBody>
+      </p:sp>
+      <p:sp>
+        <p:nvSpPr>
+          <p:cNvPr id="15" name="Text 13"/>
+          <p:cNvSpPr txBox="1"/>
+          <p:nvPr/>
+        </p:nvSpPr>
+        <p:spPr>
+          <a:xfrm>
+            <a:off x="3686221" y="664403"/>
+            <a:ext cx="3866358" cy="414315"/>
+          </a:xfrm>
+          <a:prstGeom prst="rect">
+            <a:avLst/>
+          </a:prstGeom>
+          <a:noFill/>
+          <a:ln/>
+        </p:spPr>
+        <p:txBody>
+          <a:bodyPr wrap="none" lIns="0" tIns="0" rIns="0" bIns="0" rtlCol="0" anchor="t"/>
+          <a:lstStyle/>
+          <a:p>
+            <a:pPr algn="l" indent="0" marL="0">
+              <a:lnSpc>
+                <a:spcPts val="3263"/>
+              </a:lnSpc>
+              <a:buNone/>
+            </a:pPr>
+            <a:r>
+              <a:rPr lang="en-US" sz="2175" spc="-54" kern="0" dirty="0">
+                <a:solidFill>
+                  <a:srgbClr val="FFFFFF"/>
+                </a:solidFill>
+                <a:latin typeface="Malgun Gothic" pitchFamily="34" charset="0"/>
+                <a:ea typeface="Malgun Gothic" pitchFamily="34" charset="-122"/>
+                <a:cs typeface="Malgun Gothic" pitchFamily="34" charset="-120"/>
+              </a:rPr>
+              <a:t>시장의 거대한 문제 (Problem)</a:t>
+            </a:r>
+            <a:endParaRPr lang="en-US" sz="2175" dirty="0"/>
+          </a:p>
+        </p:txBody>
+      </p:sp>
+      <p:sp>
+        <p:nvSpPr>
+          <p:cNvPr id="16" name="Text 14"/>
+          <p:cNvSpPr txBox="1"/>
+          <p:nvPr/>
+        </p:nvSpPr>
+        <p:spPr>
+          <a:xfrm>
+            <a:off x="3686221" y="1078718"/>
+            <a:ext cx="3600450" cy="1657350"/>
+          </a:xfrm>
+          <a:prstGeom prst="rect">
+            <a:avLst/>
+          </a:prstGeom>
+          <a:noFill/>
+          <a:ln/>
+        </p:spPr>
+        <p:txBody>
+          <a:bodyPr wrap="square" lIns="0" tIns="0" rIns="0" bIns="0" rtlCol="0" anchor="t"/>
+          <a:lstStyle/>
+          <a:p>
+            <a:pPr algn="l" indent="0" marL="0">
+              <a:lnSpc>
+                <a:spcPts val="3263"/>
+              </a:lnSpc>
+              <a:buNone/>
+            </a:pPr>
+            <a:r>
+              <a:rPr lang="en-US" sz="2175" spc="-54" kern="0" dirty="0">
+                <a:solidFill>
+                  <a:srgbClr val="FFFFFF"/>
+                </a:solidFill>
+                <a:latin typeface="Malgun Gothic" pitchFamily="34" charset="0"/>
+                <a:ea typeface="Malgun Gothic" pitchFamily="34" charset="-122"/>
+                <a:cs typeface="Malgun Gothic" pitchFamily="34" charset="-120"/>
+              </a:rPr>
+              <a:t>• 엔지니어 인건비 상승 및 생산성 한계</a:t>
+            </a:r>
+            <a:endParaRPr lang="en-US" sz="2175" dirty="0"/>
+          </a:p>
+          <a:p>
+            <a:pPr algn="l" indent="0" marL="0">
+              <a:lnSpc>
+                <a:spcPts val="3263"/>
+              </a:lnSpc>
+              <a:buNone/>
+            </a:pPr>
+            <a:r>
+              <a:rPr lang="en-US" sz="2175" spc="-54" kern="0" dirty="0">
+                <a:solidFill>
+                  <a:srgbClr val="FFFFFF"/>
+                </a:solidFill>
+                <a:latin typeface="Malgun Gothic" pitchFamily="34" charset="0"/>
+                <a:ea typeface="Malgun Gothic" pitchFamily="34" charset="-122"/>
+                <a:cs typeface="Malgun Gothic" pitchFamily="34" charset="-120"/>
+              </a:rPr>
+              <a:t>• 레거시 코드 유지보수 비용 폭증</a:t>
+            </a:r>
+            <a:endParaRPr lang="en-US" sz="2175" dirty="0"/>
+          </a:p>
+          <a:p>
+            <a:pPr algn="l" indent="0" marL="0">
+              <a:lnSpc>
+                <a:spcPts val="3263"/>
+              </a:lnSpc>
+              <a:buNone/>
+            </a:pPr>
+            <a:r>
+              <a:rPr lang="en-US" sz="2175" spc="-54" kern="0" dirty="0">
+                <a:solidFill>
+                  <a:srgbClr val="FFFFFF"/>
+                </a:solidFill>
+                <a:latin typeface="Malgun Gothic" pitchFamily="34" charset="0"/>
+                <a:ea typeface="Malgun Gothic" pitchFamily="34" charset="-122"/>
+                <a:cs typeface="Malgun Gothic" pitchFamily="34" charset="-120"/>
+              </a:rPr>
+              <a:t>• 개발 파이프라인의 수동 병목</a:t>
+            </a:r>
+            <a:endParaRPr lang="en-US" sz="2175" dirty="0"/>
+          </a:p>
+        </p:txBody>
+      </p:sp>
+      <p:sp>
+        <p:nvSpPr>
+          <p:cNvPr id="17" name="Shape 15"/>
+          <p:cNvSpPr/>
+          <p:nvPr/>
+        </p:nvSpPr>
+        <p:spPr>
+          <a:xfrm>
+            <a:off x="7639080" y="142921"/>
+            <a:ext cx="4000500" cy="2795595"/>
+          </a:xfrm>
+          <a:prstGeom prst="roundRect">
+            <a:avLst>
+              <a:gd name="adj" fmla="val 5453"/>
+            </a:avLst>
+          </a:prstGeom>
+          <a:solidFill>
+            <a:srgbClr val="151826"/>
+          </a:solidFill>
+          <a:ln w="9525">
+            <a:solidFill>
+              <a:srgbClr val="FFFFFF">
+                <a:alpha val="10000"/>
+              </a:srgbClr>
+            </a:solidFill>
+            <a:prstDash val="solid"/>
+          </a:ln>
+        </p:spPr>
+      </p:sp>
+      <p:sp>
+        <p:nvSpPr>
+          <p:cNvPr id="18" name="Shape 16"/>
+          <p:cNvSpPr/>
+          <p:nvPr/>
+        </p:nvSpPr>
+        <p:spPr>
+          <a:xfrm>
+            <a:off x="7858171" y="342900"/>
+            <a:ext cx="247620" cy="247620"/>
+          </a:xfrm>
+          <a:prstGeom prst="roundRect">
+            <a:avLst>
+              <a:gd name="adj" fmla="val 50000"/>
+            </a:avLst>
+          </a:prstGeom>
+          <a:solidFill>
+            <a:srgbClr val="38BDF8">
+              <a:alpha val="15000"/>
+            </a:srgbClr>
+          </a:solidFill>
+          <a:ln w="9525">
+            <a:solidFill>
+              <a:srgbClr val="38BDF8">
+                <a:alpha val="40000"/>
+              </a:srgbClr>
+            </a:solidFill>
+            <a:prstDash val="solid"/>
+          </a:ln>
+        </p:spPr>
+      </p:sp>
+      <p:sp>
+        <p:nvSpPr>
+          <p:cNvPr id="19" name="Text 17"/>
+          <p:cNvSpPr txBox="1"/>
+          <p:nvPr/>
+        </p:nvSpPr>
+        <p:spPr>
+          <a:xfrm>
+            <a:off x="7848570" y="308427"/>
+            <a:ext cx="304770" cy="310805"/>
+          </a:xfrm>
+          <a:prstGeom prst="rect">
+            <a:avLst/>
+          </a:prstGeom>
+          <a:noFill/>
+          <a:ln/>
+        </p:spPr>
+        <p:txBody>
+          <a:bodyPr wrap="none" lIns="0" tIns="0" rIns="0" bIns="0" rtlCol="0" anchor="t"/>
+          <a:lstStyle/>
+          <a:p>
+            <a:pPr algn="l" indent="0" marL="0">
+              <a:lnSpc>
+                <a:spcPts val="2447"/>
+              </a:lnSpc>
+              <a:buNone/>
+            </a:pPr>
+            <a:r>
+              <a:rPr lang="en-US" sz="1631" b="1" spc="-54" kern="0" dirty="0">
+                <a:solidFill>
+                  <a:srgbClr val="38BDF8"/>
+                </a:solidFill>
+                <a:latin typeface="Malgun Gothic" pitchFamily="34" charset="0"/>
+                <a:ea typeface="Malgun Gothic" pitchFamily="34" charset="-122"/>
+                <a:cs typeface="Malgun Gothic" pitchFamily="34" charset="-120"/>
+              </a:rPr>
+              <a:t>02</a:t>
+            </a:r>
+            <a:endParaRPr lang="en-US" sz="1631" dirty="0"/>
+          </a:p>
+        </p:txBody>
+      </p:sp>
+      <p:sp>
+        <p:nvSpPr>
+          <p:cNvPr id="20" name="Text 18"/>
+          <p:cNvSpPr txBox="1"/>
+          <p:nvPr/>
+        </p:nvSpPr>
+        <p:spPr>
+          <a:xfrm>
+            <a:off x="7839060" y="664403"/>
+            <a:ext cx="3866358" cy="414315"/>
+          </a:xfrm>
+          <a:prstGeom prst="rect">
+            <a:avLst/>
+          </a:prstGeom>
+          <a:noFill/>
+          <a:ln/>
+        </p:spPr>
+        <p:txBody>
+          <a:bodyPr wrap="none" lIns="0" tIns="0" rIns="0" bIns="0" rtlCol="0" anchor="t"/>
+          <a:lstStyle/>
+          <a:p>
+            <a:pPr algn="l" indent="0" marL="0">
+              <a:lnSpc>
+                <a:spcPts val="3263"/>
+              </a:lnSpc>
+              <a:buNone/>
+            </a:pPr>
+            <a:r>
+              <a:rPr lang="en-US" sz="2175" spc="-54" kern="0" dirty="0">
+                <a:solidFill>
+                  <a:srgbClr val="FFFFFF"/>
+                </a:solidFill>
+                <a:latin typeface="Malgun Gothic" pitchFamily="34" charset="0"/>
+                <a:ea typeface="Malgun Gothic" pitchFamily="34" charset="-122"/>
+                <a:cs typeface="Malgun Gothic" pitchFamily="34" charset="-120"/>
+              </a:rPr>
+              <a:t>독점적 솔루션 (Solution)</a:t>
+            </a:r>
+            <a:endParaRPr lang="en-US" sz="2175" dirty="0"/>
+          </a:p>
+        </p:txBody>
+      </p:sp>
+      <p:sp>
+        <p:nvSpPr>
+          <p:cNvPr id="21" name="Text 19"/>
+          <p:cNvSpPr txBox="1"/>
+          <p:nvPr/>
+        </p:nvSpPr>
+        <p:spPr>
+          <a:xfrm>
+            <a:off x="7839060" y="1078718"/>
+            <a:ext cx="3600450" cy="1657350"/>
+          </a:xfrm>
+          <a:prstGeom prst="rect">
+            <a:avLst/>
+          </a:prstGeom>
+          <a:noFill/>
+          <a:ln/>
+        </p:spPr>
+        <p:txBody>
+          <a:bodyPr wrap="square" lIns="0" tIns="0" rIns="0" bIns="0" rtlCol="0" anchor="t"/>
+          <a:lstStyle/>
+          <a:p>
+            <a:pPr algn="l" indent="0" marL="0">
+              <a:lnSpc>
+                <a:spcPts val="3263"/>
+              </a:lnSpc>
+              <a:buNone/>
+            </a:pPr>
+            <a:r>
+              <a:rPr lang="en-US" sz="2175" spc="-54" kern="0" dirty="0">
+                <a:solidFill>
+                  <a:srgbClr val="FFFFFF"/>
+                </a:solidFill>
+                <a:latin typeface="Malgun Gothic" pitchFamily="34" charset="0"/>
+                <a:ea typeface="Malgun Gothic" pitchFamily="34" charset="-122"/>
+                <a:cs typeface="Malgun Gothic" pitchFamily="34" charset="-120"/>
+              </a:rPr>
+              <a:t>• 자율형 AI 코딩 서브에이전트 군단</a:t>
+            </a:r>
+            <a:endParaRPr lang="en-US" sz="2175" dirty="0"/>
+          </a:p>
+          <a:p>
+            <a:pPr algn="l" indent="0" marL="0">
+              <a:lnSpc>
+                <a:spcPts val="3263"/>
+              </a:lnSpc>
+              <a:buNone/>
+            </a:pPr>
+            <a:r>
+              <a:rPr lang="en-US" sz="2175" spc="-54" kern="0" dirty="0">
+                <a:solidFill>
+                  <a:srgbClr val="FFFFFF"/>
+                </a:solidFill>
+                <a:latin typeface="Malgun Gothic" pitchFamily="34" charset="0"/>
+                <a:ea typeface="Malgun Gothic" pitchFamily="34" charset="-122"/>
+                <a:cs typeface="Malgun Gothic" pitchFamily="34" charset="-120"/>
+              </a:rPr>
+              <a:t>• 정적 분석 기반 무결점 코드 검증</a:t>
+            </a:r>
+            <a:endParaRPr lang="en-US" sz="2175" dirty="0"/>
+          </a:p>
+          <a:p>
+            <a:pPr algn="l" indent="0" marL="0">
+              <a:lnSpc>
+                <a:spcPts val="3263"/>
+              </a:lnSpc>
+              <a:buNone/>
+            </a:pPr>
+            <a:r>
+              <a:rPr lang="en-US" sz="2175" spc="-54" kern="0" dirty="0">
+                <a:solidFill>
+                  <a:srgbClr val="FFFFFF"/>
+                </a:solidFill>
+                <a:latin typeface="Malgun Gothic" pitchFamily="34" charset="0"/>
+                <a:ea typeface="Malgun Gothic" pitchFamily="34" charset="-122"/>
+                <a:cs typeface="Malgun Gothic" pitchFamily="34" charset="-120"/>
+              </a:rPr>
+              <a:t>• IDE 및 CLI 네이티브 완벽 통합</a:t>
+            </a:r>
+            <a:endParaRPr lang="en-US" sz="2175" dirty="0"/>
+          </a:p>
+        </p:txBody>
+      </p:sp>
+      <p:sp>
+        <p:nvSpPr>
+          <p:cNvPr id="22" name="Shape 20"/>
+          <p:cNvSpPr/>
+          <p:nvPr/>
+        </p:nvSpPr>
+        <p:spPr>
+          <a:xfrm>
+            <a:off x="3486150" y="3090855"/>
+            <a:ext cx="4000500" cy="3624224"/>
+          </a:xfrm>
+          <a:prstGeom prst="roundRect">
+            <a:avLst>
+              <a:gd name="adj" fmla="val 4206"/>
+            </a:avLst>
+          </a:prstGeom>
+          <a:solidFill>
+            <a:srgbClr val="151826"/>
+          </a:solidFill>
+          <a:ln w="9525">
+            <a:solidFill>
+              <a:srgbClr val="FFFFFF">
+                <a:alpha val="10000"/>
+              </a:srgbClr>
+            </a:solidFill>
+            <a:prstDash val="solid"/>
+          </a:ln>
+        </p:spPr>
+      </p:sp>
+      <p:sp>
+        <p:nvSpPr>
+          <p:cNvPr id="23" name="Shape 21"/>
+          <p:cNvSpPr/>
+          <p:nvPr/>
+        </p:nvSpPr>
+        <p:spPr>
+          <a:xfrm>
+            <a:off x="3705240" y="3290926"/>
+            <a:ext cx="247620" cy="247620"/>
+          </a:xfrm>
+          <a:prstGeom prst="roundRect">
+            <a:avLst>
+              <a:gd name="adj" fmla="val 50000"/>
+            </a:avLst>
+          </a:prstGeom>
+          <a:solidFill>
+            <a:srgbClr val="34D399">
+              <a:alpha val="15000"/>
+            </a:srgbClr>
+          </a:solidFill>
+          <a:ln w="9525">
+            <a:solidFill>
+              <a:srgbClr val="34D399">
+                <a:alpha val="40000"/>
+              </a:srgbClr>
+            </a:solidFill>
+            <a:prstDash val="solid"/>
+          </a:ln>
+        </p:spPr>
+      </p:sp>
+      <p:sp>
+        <p:nvSpPr>
+          <p:cNvPr id="24" name="Text 22"/>
+          <p:cNvSpPr txBox="1"/>
+          <p:nvPr/>
+        </p:nvSpPr>
+        <p:spPr>
+          <a:xfrm>
+            <a:off x="3695730" y="3256453"/>
+            <a:ext cx="304770" cy="310805"/>
+          </a:xfrm>
+          <a:prstGeom prst="rect">
+            <a:avLst/>
+          </a:prstGeom>
+          <a:noFill/>
+          <a:ln/>
+        </p:spPr>
+        <p:txBody>
+          <a:bodyPr wrap="none" lIns="0" tIns="0" rIns="0" bIns="0" rtlCol="0" anchor="t"/>
+          <a:lstStyle/>
+          <a:p>
+            <a:pPr algn="l" indent="0" marL="0">
+              <a:lnSpc>
+                <a:spcPts val="2447"/>
+              </a:lnSpc>
+              <a:buNone/>
+            </a:pPr>
+            <a:r>
+              <a:rPr lang="en-US" sz="1631" b="1" spc="-54" kern="0" dirty="0">
+                <a:solidFill>
+                  <a:srgbClr val="34D399"/>
+                </a:solidFill>
+                <a:latin typeface="Malgun Gothic" pitchFamily="34" charset="0"/>
+                <a:ea typeface="Malgun Gothic" pitchFamily="34" charset="-122"/>
+                <a:cs typeface="Malgun Gothic" pitchFamily="34" charset="-120"/>
+              </a:rPr>
+              <a:t>03</a:t>
+            </a:r>
+            <a:endParaRPr lang="en-US" sz="1631" dirty="0"/>
+          </a:p>
+        </p:txBody>
+      </p:sp>
+      <p:sp>
+        <p:nvSpPr>
+          <p:cNvPr id="25" name="Text 23"/>
+          <p:cNvSpPr txBox="1"/>
+          <p:nvPr/>
+        </p:nvSpPr>
+        <p:spPr>
+          <a:xfrm>
+            <a:off x="3686221" y="3612337"/>
+            <a:ext cx="3866358" cy="414315"/>
+          </a:xfrm>
+          <a:prstGeom prst="rect">
+            <a:avLst/>
+          </a:prstGeom>
+          <a:noFill/>
+          <a:ln/>
+        </p:spPr>
+        <p:txBody>
+          <a:bodyPr wrap="none" lIns="0" tIns="0" rIns="0" bIns="0" rtlCol="0" anchor="t"/>
+          <a:lstStyle/>
+          <a:p>
+            <a:pPr algn="l" indent="0" marL="0">
+              <a:lnSpc>
+                <a:spcPts val="3263"/>
+              </a:lnSpc>
+              <a:buNone/>
+            </a:pPr>
+            <a:r>
+              <a:rPr lang="en-US" sz="2175" spc="-54" kern="0" dirty="0">
+                <a:solidFill>
+                  <a:srgbClr val="FFFFFF"/>
+                </a:solidFill>
+                <a:latin typeface="Malgun Gothic" pitchFamily="34" charset="0"/>
+                <a:ea typeface="Malgun Gothic" pitchFamily="34" charset="-122"/>
+                <a:cs typeface="Malgun Gothic" pitchFamily="34" charset="-120"/>
+              </a:rPr>
+              <a:t>폭발적 트랙션 (Traction)</a:t>
+            </a:r>
+            <a:endParaRPr lang="en-US" sz="2175" dirty="0"/>
+          </a:p>
+        </p:txBody>
+      </p:sp>
+      <p:sp>
+        <p:nvSpPr>
+          <p:cNvPr id="26" name="Text 24"/>
+          <p:cNvSpPr txBox="1"/>
+          <p:nvPr/>
+        </p:nvSpPr>
+        <p:spPr>
+          <a:xfrm>
+            <a:off x="3686221" y="4026652"/>
+            <a:ext cx="3600450" cy="1657350"/>
+          </a:xfrm>
+          <a:prstGeom prst="rect">
+            <a:avLst/>
+          </a:prstGeom>
+          <a:noFill/>
+          <a:ln/>
+        </p:spPr>
+        <p:txBody>
+          <a:bodyPr wrap="square" lIns="0" tIns="0" rIns="0" bIns="0" rtlCol="0" anchor="t"/>
+          <a:lstStyle/>
+          <a:p>
+            <a:pPr algn="l" indent="0" marL="0">
+              <a:lnSpc>
+                <a:spcPts val="3263"/>
+              </a:lnSpc>
+              <a:buNone/>
+            </a:pPr>
+            <a:r>
+              <a:rPr lang="en-US" sz="2175" spc="-54" kern="0" dirty="0">
+                <a:solidFill>
+                  <a:srgbClr val="FFFFFF"/>
+                </a:solidFill>
+                <a:latin typeface="Malgun Gothic" pitchFamily="34" charset="0"/>
+                <a:ea typeface="Malgun Gothic" pitchFamily="34" charset="-122"/>
+                <a:cs typeface="Malgun Gothic" pitchFamily="34" charset="-120"/>
+              </a:rPr>
+              <a:t>• 글로벌 350+ B2B 유료 고객사</a:t>
+            </a:r>
+            <a:endParaRPr lang="en-US" sz="2175" dirty="0"/>
+          </a:p>
+          <a:p>
+            <a:pPr algn="l" indent="0" marL="0">
+              <a:lnSpc>
+                <a:spcPts val="3263"/>
+              </a:lnSpc>
+              <a:buNone/>
+            </a:pPr>
+            <a:r>
+              <a:rPr lang="en-US" sz="2175" spc="-54" kern="0" dirty="0">
+                <a:solidFill>
+                  <a:srgbClr val="FFFFFF"/>
+                </a:solidFill>
+                <a:latin typeface="Malgun Gothic" pitchFamily="34" charset="0"/>
+                <a:ea typeface="Malgun Gothic" pitchFamily="34" charset="-122"/>
+                <a:cs typeface="Malgun Gothic" pitchFamily="34" charset="-120"/>
+              </a:rPr>
+              <a:t>• 월간 반복 매출(MRR) $450K 달성</a:t>
+            </a:r>
+            <a:endParaRPr lang="en-US" sz="2175" dirty="0"/>
+          </a:p>
+          <a:p>
+            <a:pPr algn="l" indent="0" marL="0">
+              <a:lnSpc>
+                <a:spcPts val="3263"/>
+              </a:lnSpc>
+              <a:buNone/>
+            </a:pPr>
+            <a:r>
+              <a:rPr lang="en-US" sz="2175" spc="-54" kern="0" dirty="0">
+                <a:solidFill>
+                  <a:srgbClr val="FFFFFF"/>
+                </a:solidFill>
+                <a:latin typeface="Malgun Gothic" pitchFamily="34" charset="0"/>
+                <a:ea typeface="Malgun Gothic" pitchFamily="34" charset="-122"/>
+                <a:cs typeface="Malgun Gothic" pitchFamily="34" charset="-120"/>
+              </a:rPr>
+              <a:t>• 매월 24% MoM 고속 스케일업</a:t>
+            </a:r>
+            <a:endParaRPr lang="en-US" sz="2175" dirty="0"/>
+          </a:p>
+        </p:txBody>
+      </p:sp>
+      <p:sp>
+        <p:nvSpPr>
+          <p:cNvPr id="27" name="Shape 25"/>
+          <p:cNvSpPr/>
+          <p:nvPr/>
+        </p:nvSpPr>
+        <p:spPr>
+          <a:xfrm>
+            <a:off x="7639080" y="3090855"/>
+            <a:ext cx="4000500" cy="3624224"/>
+          </a:xfrm>
+          <a:prstGeom prst="roundRect">
+            <a:avLst>
+              <a:gd name="adj" fmla="val 4206"/>
+            </a:avLst>
+          </a:prstGeom>
+          <a:solidFill>
+            <a:srgbClr val="151826"/>
+          </a:solidFill>
+          <a:ln w="9525">
+            <a:solidFill>
+              <a:srgbClr val="FFFFFF">
+                <a:alpha val="10000"/>
+              </a:srgbClr>
+            </a:solidFill>
+            <a:prstDash val="solid"/>
+          </a:ln>
+        </p:spPr>
+      </p:sp>
+      <p:sp>
+        <p:nvSpPr>
+          <p:cNvPr id="28" name="Shape 26"/>
+          <p:cNvSpPr/>
+          <p:nvPr/>
+        </p:nvSpPr>
+        <p:spPr>
+          <a:xfrm>
+            <a:off x="7858171" y="3290926"/>
+            <a:ext cx="247620" cy="247620"/>
+          </a:xfrm>
+          <a:prstGeom prst="roundRect">
+            <a:avLst>
+              <a:gd name="adj" fmla="val 50000"/>
+            </a:avLst>
+          </a:prstGeom>
+          <a:solidFill>
+            <a:srgbClr val="FBBF24">
+              <a:alpha val="18000"/>
+            </a:srgbClr>
+          </a:solidFill>
+          <a:ln w="9525">
+            <a:solidFill>
+              <a:srgbClr val="FBBF24">
+                <a:alpha val="40000"/>
+              </a:srgbClr>
+            </a:solidFill>
+            <a:prstDash val="solid"/>
+          </a:ln>
+        </p:spPr>
+      </p:sp>
+      <p:sp>
+        <p:nvSpPr>
+          <p:cNvPr id="29" name="Text 27"/>
+          <p:cNvSpPr txBox="1"/>
+          <p:nvPr/>
+        </p:nvSpPr>
+        <p:spPr>
+          <a:xfrm>
+            <a:off x="7848570" y="3256453"/>
+            <a:ext cx="304770" cy="310805"/>
+          </a:xfrm>
+          <a:prstGeom prst="rect">
+            <a:avLst/>
+          </a:prstGeom>
+          <a:noFill/>
+          <a:ln/>
+        </p:spPr>
+        <p:txBody>
+          <a:bodyPr wrap="none" lIns="0" tIns="0" rIns="0" bIns="0" rtlCol="0" anchor="t"/>
+          <a:lstStyle/>
+          <a:p>
+            <a:pPr algn="l" indent="0" marL="0">
+              <a:lnSpc>
+                <a:spcPts val="2447"/>
+              </a:lnSpc>
+              <a:buNone/>
+            </a:pPr>
+            <a:r>
+              <a:rPr lang="en-US" sz="1631" b="1" spc="-54" kern="0" dirty="0">
+                <a:solidFill>
+                  <a:srgbClr val="FBBF24"/>
+                </a:solidFill>
+                <a:latin typeface="Malgun Gothic" pitchFamily="34" charset="0"/>
+                <a:ea typeface="Malgun Gothic" pitchFamily="34" charset="-122"/>
+                <a:cs typeface="Malgun Gothic" pitchFamily="34" charset="-120"/>
+              </a:rPr>
+              <a:t>04</a:t>
+            </a:r>
+            <a:endParaRPr lang="en-US" sz="1631" dirty="0"/>
+          </a:p>
+        </p:txBody>
+      </p:sp>
+      <p:sp>
+        <p:nvSpPr>
+          <p:cNvPr id="30" name="Text 28"/>
+          <p:cNvSpPr txBox="1"/>
+          <p:nvPr/>
+        </p:nvSpPr>
+        <p:spPr>
+          <a:xfrm>
+            <a:off x="7839060" y="3612337"/>
+            <a:ext cx="3866358" cy="414315"/>
+          </a:xfrm>
+          <a:prstGeom prst="rect">
+            <a:avLst/>
+          </a:prstGeom>
+          <a:noFill/>
+          <a:ln/>
+        </p:spPr>
+        <p:txBody>
+          <a:bodyPr wrap="none" lIns="0" tIns="0" rIns="0" bIns="0" rtlCol="0" anchor="t"/>
+          <a:lstStyle/>
+          <a:p>
+            <a:pPr algn="l" indent="0" marL="0">
+              <a:lnSpc>
+                <a:spcPts val="3263"/>
+              </a:lnSpc>
+              <a:buNone/>
+            </a:pPr>
+            <a:r>
+              <a:rPr lang="en-US" sz="2175" spc="-54" kern="0" dirty="0">
+                <a:solidFill>
+                  <a:srgbClr val="FFFFFF"/>
+                </a:solidFill>
+                <a:latin typeface="Malgun Gothic" pitchFamily="34" charset="0"/>
+                <a:ea typeface="Malgun Gothic" pitchFamily="34" charset="-122"/>
+                <a:cs typeface="Malgun Gothic" pitchFamily="34" charset="-120"/>
+              </a:rPr>
+              <a:t>비즈니스 모델 &amp; 투자 계획</a:t>
+            </a:r>
+            <a:endParaRPr lang="en-US" sz="2175" dirty="0"/>
+          </a:p>
+        </p:txBody>
+      </p:sp>
+      <p:sp>
+        <p:nvSpPr>
+          <p:cNvPr id="31" name="Text 29"/>
+          <p:cNvSpPr txBox="1"/>
+          <p:nvPr/>
+        </p:nvSpPr>
+        <p:spPr>
+          <a:xfrm>
+            <a:off x="7839060" y="4026652"/>
+            <a:ext cx="3600450" cy="2486071"/>
+          </a:xfrm>
+          <a:prstGeom prst="rect">
+            <a:avLst/>
+          </a:prstGeom>
+          <a:noFill/>
+          <a:ln/>
+        </p:spPr>
+        <p:txBody>
+          <a:bodyPr wrap="square" lIns="0" tIns="0" rIns="0" bIns="0" rtlCol="0" anchor="t"/>
+          <a:lstStyle/>
+          <a:p>
+            <a:pPr algn="l" indent="0" marL="0">
+              <a:lnSpc>
+                <a:spcPts val="3263"/>
+              </a:lnSpc>
+              <a:buNone/>
+            </a:pPr>
+            <a:r>
+              <a:rPr lang="en-US" sz="2175" spc="-54" kern="0" dirty="0">
+                <a:solidFill>
+                  <a:srgbClr val="FFFFFF"/>
+                </a:solidFill>
+                <a:latin typeface="Malgun Gothic" pitchFamily="34" charset="0"/>
+                <a:ea typeface="Malgun Gothic" pitchFamily="34" charset="-122"/>
+                <a:cs typeface="Malgun Gothic" pitchFamily="34" charset="-120"/>
+              </a:rPr>
+              <a:t>• 시트당 구독료 + 토큰 하이브리드 BM</a:t>
+            </a:r>
+            <a:endParaRPr lang="en-US" sz="2175" dirty="0"/>
+          </a:p>
+          <a:p>
+            <a:pPr algn="l" indent="0" marL="0">
+              <a:lnSpc>
+                <a:spcPts val="3263"/>
+              </a:lnSpc>
+              <a:buNone/>
+            </a:pPr>
+            <a:r>
+              <a:rPr lang="en-US" sz="2175" spc="-54" kern="0" dirty="0">
+                <a:solidFill>
+                  <a:srgbClr val="FFFFFF"/>
+                </a:solidFill>
+                <a:latin typeface="Malgun Gothic" pitchFamily="34" charset="0"/>
+                <a:ea typeface="Malgun Gothic" pitchFamily="34" charset="-122"/>
+                <a:cs typeface="Malgun Gothic" pitchFamily="34" charset="-120"/>
+              </a:rPr>
+              <a:t>• Series A $5M 펀딩 라운드 오픈</a:t>
+            </a:r>
+            <a:endParaRPr lang="en-US" sz="2175" dirty="0"/>
+          </a:p>
+          <a:p>
+            <a:pPr algn="l" indent="0" marL="0">
+              <a:lnSpc>
+                <a:spcPts val="3263"/>
+              </a:lnSpc>
+              <a:buNone/>
+            </a:pPr>
+            <a:r>
+              <a:rPr lang="en-US" sz="2175" spc="-54" kern="0" dirty="0">
+                <a:solidFill>
+                  <a:srgbClr val="FFFFFF"/>
+                </a:solidFill>
+                <a:latin typeface="Malgun Gothic" pitchFamily="34" charset="0"/>
+                <a:ea typeface="Malgun Gothic" pitchFamily="34" charset="-122"/>
+                <a:cs typeface="Malgun Gothic" pitchFamily="34" charset="-120"/>
+              </a:rPr>
+              <a:t>• 글로벌 마케팅 및 엔지니어링 확장</a:t>
+            </a:r>
+            <a:endParaRPr lang="en-US" sz="2175" dirty="0"/>
+          </a:p>
+        </p:txBody>
+      </p:sp>
     </p:spTree>
   </p:cSld>
   <p:clrMapOvr>
@@ -1385,16 +3120,9 @@
   <p:cSld name="Slide 3">
     <p:bg>
       <p:bgPr>
-        <a:blipFill dpi="0" rotWithShape="1">
-          <a:blip r:embed="rId1">
-            <a:lum/>
-          </a:blip>
-          <a:srcRect/>
-          <a:stretch>
-            <a:fillRect/>
-          </a:stretch>
-        </a:blipFill>
-        <a:effectLst/>
+        <a:solidFill>
+          <a:srgbClr val="FBBF24"/>
+        </a:solidFill>
       </p:bgPr>
     </p:bg>
     <p:spTree>
@@ -1411,6 +3139,1084 @@
           <a:chExt cx="0" cy="0"/>
         </a:xfrm>
       </p:grpSpPr>
+      <p:sp>
+        <p:nvSpPr>
+          <p:cNvPr id="2" name="Shape 0"/>
+          <p:cNvSpPr/>
+          <p:nvPr/>
+        </p:nvSpPr>
+        <p:spPr>
+          <a:xfrm>
+            <a:off x="4419570" y="1410919"/>
+            <a:ext cx="3352648" cy="445770"/>
+          </a:xfrm>
+          <a:prstGeom prst="roundRect">
+            <a:avLst>
+              <a:gd name="adj" fmla="val 50010"/>
+            </a:avLst>
+          </a:prstGeom>
+          <a:solidFill>
+            <a:srgbClr val="FBBF24">
+              <a:alpha val="18000"/>
+            </a:srgbClr>
+          </a:solidFill>
+          <a:ln w="9525">
+            <a:solidFill>
+              <a:srgbClr val="FBBF24">
+                <a:alpha val="40000"/>
+              </a:srgbClr>
+            </a:solidFill>
+            <a:prstDash val="solid"/>
+          </a:ln>
+        </p:spPr>
+      </p:sp>
+      <p:sp>
+        <p:nvSpPr>
+          <p:cNvPr id="3" name="Text 1"/>
+          <p:cNvSpPr txBox="1"/>
+          <p:nvPr/>
+        </p:nvSpPr>
+        <p:spPr>
+          <a:xfrm>
+            <a:off x="4339194" y="1464229"/>
+            <a:ext cx="3513399" cy="331470"/>
+          </a:xfrm>
+          <a:prstGeom prst="rect">
+            <a:avLst/>
+          </a:prstGeom>
+          <a:noFill/>
+          <a:ln/>
+        </p:spPr>
+        <p:txBody>
+          <a:bodyPr wrap="none" lIns="0" tIns="0" rIns="0" bIns="0" rtlCol="0" anchor="t"/>
+          <a:lstStyle/>
+          <a:p>
+            <a:pPr algn="ctr" indent="0" marL="0">
+              <a:lnSpc>
+                <a:spcPts val="2610"/>
+              </a:lnSpc>
+              <a:buNone/>
+            </a:pPr>
+            <a:r>
+              <a:rPr lang="en-US" sz="1740" b="1" spc="70" kern="0" dirty="0">
+                <a:solidFill>
+                  <a:srgbClr val="FBBF24"/>
+                </a:solidFill>
+                <a:latin typeface="Malgun Gothic" pitchFamily="34" charset="0"/>
+                <a:ea typeface="Malgun Gothic" pitchFamily="34" charset="-122"/>
+                <a:cs typeface="Malgun Gothic" pitchFamily="34" charset="-120"/>
+              </a:rPr>
+              <a:t>TRACTION &amp; MARKET SIZE</a:t>
+            </a:r>
+            <a:endParaRPr lang="en-US" sz="1740" dirty="0"/>
+          </a:p>
+        </p:txBody>
+      </p:sp>
+      <p:sp>
+        <p:nvSpPr>
+          <p:cNvPr id="4" name="Text 2"/>
+          <p:cNvSpPr txBox="1"/>
+          <p:nvPr/>
+        </p:nvSpPr>
+        <p:spPr>
+          <a:xfrm>
+            <a:off x="-334488" y="1926458"/>
+            <a:ext cx="12861036" cy="603321"/>
+          </a:xfrm>
+          <a:prstGeom prst="rect">
+            <a:avLst/>
+          </a:prstGeom>
+          <a:noFill/>
+          <a:ln/>
+        </p:spPr>
+        <p:txBody>
+          <a:bodyPr wrap="none" lIns="0" tIns="0" rIns="0" bIns="0" rtlCol="0" anchor="t"/>
+          <a:lstStyle/>
+          <a:p>
+            <a:pPr algn="ctr" indent="0" marL="0">
+              <a:lnSpc>
+                <a:spcPts val="4750"/>
+              </a:lnSpc>
+              <a:buNone/>
+            </a:pPr>
+            <a:r>
+              <a:rPr lang="en-US" sz="3654" b="1" spc="-91" kern="0" dirty="0">
+                <a:solidFill>
+                  <a:srgbClr val="FFFFFF"/>
+                </a:solidFill>
+                <a:latin typeface="Malgun Gothic" pitchFamily="34" charset="0"/>
+                <a:ea typeface="Malgun Gothic" pitchFamily="34" charset="-122"/>
+                <a:cs typeface="Malgun Gothic" pitchFamily="34" charset="-120"/>
+              </a:rPr>
+              <a:t>런칭 6개월 만에 입증된 폭발적인 시장 수요</a:t>
+            </a:r>
+            <a:endParaRPr lang="en-US" sz="3654" dirty="0"/>
+          </a:p>
+        </p:txBody>
+      </p:sp>
+      <p:sp>
+        <p:nvSpPr>
+          <p:cNvPr id="5" name="Text 3"/>
+          <p:cNvSpPr txBox="1"/>
+          <p:nvPr/>
+        </p:nvSpPr>
+        <p:spPr>
+          <a:xfrm>
+            <a:off x="-334488" y="2729301"/>
+            <a:ext cx="12861036" cy="406085"/>
+          </a:xfrm>
+          <a:prstGeom prst="rect">
+            <a:avLst/>
+          </a:prstGeom>
+          <a:noFill/>
+          <a:ln/>
+        </p:spPr>
+        <p:txBody>
+          <a:bodyPr wrap="none" lIns="0" tIns="0" rIns="0" bIns="0" rtlCol="0" anchor="t"/>
+          <a:lstStyle/>
+          <a:p>
+            <a:pPr algn="ctr" indent="0" marL="0">
+              <a:lnSpc>
+                <a:spcPts val="3197"/>
+              </a:lnSpc>
+              <a:buNone/>
+            </a:pPr>
+            <a:r>
+              <a:rPr lang="en-US" sz="2132" spc="-54" kern="0" dirty="0">
+                <a:solidFill>
+                  <a:srgbClr val="94A3B8"/>
+                </a:solidFill>
+                <a:latin typeface="Malgun Gothic" pitchFamily="34" charset="0"/>
+                <a:ea typeface="Malgun Gothic" pitchFamily="34" charset="-122"/>
+                <a:cs typeface="Malgun Gothic" pitchFamily="34" charset="-120"/>
+              </a:rPr>
+              <a:t>글로벌 350+ 개발팀 도입 및 월간 반복 매출(MRR) 24% 지속 성장</a:t>
+            </a:r>
+            <a:endParaRPr lang="en-US" sz="2132" dirty="0"/>
+          </a:p>
+        </p:txBody>
+      </p:sp>
+      <p:sp>
+        <p:nvSpPr>
+          <p:cNvPr id="6" name="Shape 4"/>
+          <p:cNvSpPr/>
+          <p:nvPr/>
+        </p:nvSpPr>
+        <p:spPr>
+          <a:xfrm>
+            <a:off x="552480" y="3366912"/>
+            <a:ext cx="3581430" cy="2089587"/>
+          </a:xfrm>
+          <a:prstGeom prst="roundRect">
+            <a:avLst>
+              <a:gd name="adj" fmla="val 7295"/>
+            </a:avLst>
+          </a:prstGeom>
+          <a:solidFill>
+            <a:srgbClr val="151826"/>
+          </a:solidFill>
+          <a:ln/>
+        </p:spPr>
+      </p:sp>
+      <p:sp>
+        <p:nvSpPr>
+          <p:cNvPr id="7" name="Shape 5"/>
+          <p:cNvSpPr/>
+          <p:nvPr/>
+        </p:nvSpPr>
+        <p:spPr>
+          <a:xfrm>
+            <a:off x="552480" y="3366912"/>
+            <a:ext cx="3581430" cy="28621"/>
+          </a:xfrm>
+          <a:prstGeom prst="rect">
+            <a:avLst/>
+          </a:prstGeom>
+          <a:solidFill>
+            <a:srgbClr val="FBBF24"/>
+          </a:solidFill>
+          <a:ln/>
+        </p:spPr>
+      </p:sp>
+      <p:sp>
+        <p:nvSpPr>
+          <p:cNvPr id="8" name="Shape 6"/>
+          <p:cNvSpPr/>
+          <p:nvPr/>
+        </p:nvSpPr>
+        <p:spPr>
+          <a:xfrm>
+            <a:off x="4124310" y="3366912"/>
+            <a:ext cx="9510" cy="2089587"/>
+          </a:xfrm>
+          <a:prstGeom prst="rect">
+            <a:avLst/>
+          </a:prstGeom>
+          <a:solidFill>
+            <a:srgbClr val="FFFFFF">
+              <a:alpha val="10000"/>
+            </a:srgbClr>
+          </a:solidFill>
+          <a:ln/>
+        </p:spPr>
+      </p:sp>
+      <p:sp>
+        <p:nvSpPr>
+          <p:cNvPr id="9" name="Shape 7"/>
+          <p:cNvSpPr/>
+          <p:nvPr/>
+        </p:nvSpPr>
+        <p:spPr>
+          <a:xfrm>
+            <a:off x="552480" y="5446989"/>
+            <a:ext cx="3581430" cy="9510"/>
+          </a:xfrm>
+          <a:prstGeom prst="rect">
+            <a:avLst/>
+          </a:prstGeom>
+          <a:solidFill>
+            <a:srgbClr val="FFFFFF">
+              <a:alpha val="10000"/>
+            </a:srgbClr>
+          </a:solidFill>
+          <a:ln/>
+        </p:spPr>
+      </p:sp>
+      <p:sp>
+        <p:nvSpPr>
+          <p:cNvPr id="10" name="Shape 8"/>
+          <p:cNvSpPr/>
+          <p:nvPr/>
+        </p:nvSpPr>
+        <p:spPr>
+          <a:xfrm>
+            <a:off x="552480" y="3366912"/>
+            <a:ext cx="9510" cy="2089587"/>
+          </a:xfrm>
+          <a:prstGeom prst="rect">
+            <a:avLst/>
+          </a:prstGeom>
+          <a:solidFill>
+            <a:srgbClr val="FFFFFF">
+              <a:alpha val="10000"/>
+            </a:srgbClr>
+          </a:solidFill>
+          <a:ln/>
+        </p:spPr>
+      </p:sp>
+      <p:sp>
+        <p:nvSpPr>
+          <p:cNvPr id="11" name="Shape 9"/>
+          <p:cNvSpPr/>
+          <p:nvPr/>
+        </p:nvSpPr>
+        <p:spPr>
+          <a:xfrm>
+            <a:off x="2219340" y="3586002"/>
+            <a:ext cx="247620" cy="247620"/>
+          </a:xfrm>
+          <a:prstGeom prst="roundRect">
+            <a:avLst>
+              <a:gd name="adj" fmla="val 50000"/>
+            </a:avLst>
+          </a:prstGeom>
+          <a:solidFill>
+            <a:srgbClr val="FBBF24">
+              <a:alpha val="18000"/>
+            </a:srgbClr>
+          </a:solidFill>
+          <a:ln w="9525">
+            <a:solidFill>
+              <a:srgbClr val="FBBF24">
+                <a:alpha val="40000"/>
+              </a:srgbClr>
+            </a:solidFill>
+            <a:prstDash val="solid"/>
+          </a:ln>
+        </p:spPr>
+      </p:sp>
+      <p:sp>
+        <p:nvSpPr>
+          <p:cNvPr id="12" name="Text 10"/>
+          <p:cNvSpPr txBox="1"/>
+          <p:nvPr/>
+        </p:nvSpPr>
+        <p:spPr>
+          <a:xfrm>
+            <a:off x="2171700" y="3551530"/>
+            <a:ext cx="342900" cy="310805"/>
+          </a:xfrm>
+          <a:prstGeom prst="rect">
+            <a:avLst/>
+          </a:prstGeom>
+          <a:noFill/>
+          <a:ln/>
+        </p:spPr>
+        <p:txBody>
+          <a:bodyPr wrap="none" lIns="0" tIns="0" rIns="0" bIns="0" rtlCol="0" anchor="t"/>
+          <a:lstStyle/>
+          <a:p>
+            <a:pPr algn="ctr" indent="0" marL="0">
+              <a:lnSpc>
+                <a:spcPts val="2447"/>
+              </a:lnSpc>
+              <a:buNone/>
+            </a:pPr>
+            <a:r>
+              <a:rPr lang="en-US" sz="1631" b="1" spc="-54" kern="0" dirty="0">
+                <a:solidFill>
+                  <a:srgbClr val="FBBF24"/>
+                </a:solidFill>
+                <a:latin typeface="Malgun Gothic" pitchFamily="34" charset="0"/>
+                <a:ea typeface="Malgun Gothic" pitchFamily="34" charset="-122"/>
+                <a:cs typeface="Malgun Gothic" pitchFamily="34" charset="-120"/>
+              </a:rPr>
+              <a:t>01</a:t>
+            </a:r>
+            <a:endParaRPr lang="en-US" sz="1631" dirty="0"/>
+          </a:p>
+        </p:txBody>
+      </p:sp>
+      <p:sp>
+        <p:nvSpPr>
+          <p:cNvPr id="13" name="Text 11"/>
+          <p:cNvSpPr txBox="1"/>
+          <p:nvPr/>
+        </p:nvSpPr>
+        <p:spPr>
+          <a:xfrm>
+            <a:off x="520111" y="3886017"/>
+            <a:ext cx="3646170" cy="828721"/>
+          </a:xfrm>
+          <a:prstGeom prst="rect">
+            <a:avLst/>
+          </a:prstGeom>
+          <a:noFill/>
+          <a:ln/>
+        </p:spPr>
+        <p:txBody>
+          <a:bodyPr wrap="none" lIns="0" tIns="0" rIns="0" bIns="0" rtlCol="0" anchor="t"/>
+          <a:lstStyle/>
+          <a:p>
+            <a:pPr algn="ctr" indent="0" marL="0">
+              <a:lnSpc>
+                <a:spcPts val="6525"/>
+              </a:lnSpc>
+              <a:buNone/>
+            </a:pPr>
+            <a:r>
+              <a:rPr lang="en-US" sz="6525" b="1" spc="-54" kern="0" dirty="0">
+                <a:solidFill>
+                  <a:srgbClr val="FBBF24"/>
+                </a:solidFill>
+                <a:latin typeface="Malgun Gothic" pitchFamily="34" charset="0"/>
+                <a:ea typeface="Malgun Gothic" pitchFamily="34" charset="-122"/>
+                <a:cs typeface="Malgun Gothic" pitchFamily="34" charset="-120"/>
+              </a:rPr>
+              <a:t>350+</a:t>
+            </a:r>
+            <a:endParaRPr lang="en-US" sz="6525" dirty="0"/>
+          </a:p>
+        </p:txBody>
+      </p:sp>
+      <p:sp>
+        <p:nvSpPr>
+          <p:cNvPr id="14" name="Text 12"/>
+          <p:cNvSpPr txBox="1"/>
+          <p:nvPr/>
+        </p:nvSpPr>
+        <p:spPr>
+          <a:xfrm>
+            <a:off x="520111" y="4770882"/>
+            <a:ext cx="3646170" cy="240030"/>
+          </a:xfrm>
+          <a:prstGeom prst="rect">
+            <a:avLst/>
+          </a:prstGeom>
+          <a:noFill/>
+          <a:ln/>
+        </p:spPr>
+        <p:txBody>
+          <a:bodyPr wrap="none" lIns="0" tIns="0" rIns="0" bIns="0" rtlCol="0" anchor="t"/>
+          <a:lstStyle/>
+          <a:p>
+            <a:pPr algn="ctr" indent="0" marL="0">
+              <a:lnSpc>
+                <a:spcPts val="1890"/>
+              </a:lnSpc>
+              <a:buNone/>
+            </a:pPr>
+            <a:r>
+              <a:rPr lang="en-US" sz="1260" b="1" spc="-54" kern="0" dirty="0">
+                <a:solidFill>
+                  <a:srgbClr val="FFFFFF"/>
+                </a:solidFill>
+                <a:latin typeface="Malgun Gothic" pitchFamily="34" charset="0"/>
+                <a:ea typeface="Malgun Gothic" pitchFamily="34" charset="-122"/>
+                <a:cs typeface="Malgun Gothic" pitchFamily="34" charset="-120"/>
+              </a:rPr>
+              <a:t>도입 고객사 (B2B)</a:t>
+            </a:r>
+            <a:endParaRPr lang="en-US" sz="1260" dirty="0"/>
+          </a:p>
+        </p:txBody>
+      </p:sp>
+      <p:sp>
+        <p:nvSpPr>
+          <p:cNvPr id="15" name="Text 13"/>
+          <p:cNvSpPr txBox="1"/>
+          <p:nvPr/>
+        </p:nvSpPr>
+        <p:spPr>
+          <a:xfrm>
+            <a:off x="520111" y="5072725"/>
+            <a:ext cx="3646170" cy="182880"/>
+          </a:xfrm>
+          <a:prstGeom prst="rect">
+            <a:avLst/>
+          </a:prstGeom>
+          <a:noFill/>
+          <a:ln/>
+        </p:spPr>
+        <p:txBody>
+          <a:bodyPr wrap="none" lIns="0" tIns="0" rIns="0" bIns="0" rtlCol="0" anchor="t"/>
+          <a:lstStyle/>
+          <a:p>
+            <a:pPr algn="ctr" indent="0" marL="0">
+              <a:lnSpc>
+                <a:spcPts val="1440"/>
+              </a:lnSpc>
+              <a:buNone/>
+            </a:pPr>
+            <a:r>
+              <a:rPr lang="en-US" sz="960" spc="-54" kern="0" dirty="0">
+                <a:solidFill>
+                  <a:srgbClr val="94A3B8"/>
+                </a:solidFill>
+                <a:latin typeface="Malgun Gothic" pitchFamily="34" charset="0"/>
+                <a:ea typeface="Malgun Gothic" pitchFamily="34" charset="-122"/>
+                <a:cs typeface="Malgun Gothic" pitchFamily="34" charset="-120"/>
+              </a:rPr>
+              <a:t>글로벌 테크 유니콘 및 스타트업 중심 유기적 유입</a:t>
+            </a:r>
+            <a:endParaRPr lang="en-US" sz="960" dirty="0"/>
+          </a:p>
+        </p:txBody>
+      </p:sp>
+      <p:sp>
+        <p:nvSpPr>
+          <p:cNvPr id="16" name="Shape 14"/>
+          <p:cNvSpPr/>
+          <p:nvPr/>
+        </p:nvSpPr>
+        <p:spPr>
+          <a:xfrm>
+            <a:off x="4305270" y="3366912"/>
+            <a:ext cx="3581430" cy="2089587"/>
+          </a:xfrm>
+          <a:prstGeom prst="roundRect">
+            <a:avLst>
+              <a:gd name="adj" fmla="val 7295"/>
+            </a:avLst>
+          </a:prstGeom>
+          <a:solidFill>
+            <a:srgbClr val="151826"/>
+          </a:solidFill>
+          <a:ln/>
+        </p:spPr>
+      </p:sp>
+      <p:sp>
+        <p:nvSpPr>
+          <p:cNvPr id="17" name="Shape 15"/>
+          <p:cNvSpPr/>
+          <p:nvPr/>
+        </p:nvSpPr>
+        <p:spPr>
+          <a:xfrm>
+            <a:off x="4305270" y="3366912"/>
+            <a:ext cx="3581430" cy="28621"/>
+          </a:xfrm>
+          <a:prstGeom prst="rect">
+            <a:avLst/>
+          </a:prstGeom>
+          <a:solidFill>
+            <a:srgbClr val="38BDF8"/>
+          </a:solidFill>
+          <a:ln/>
+        </p:spPr>
+      </p:sp>
+      <p:sp>
+        <p:nvSpPr>
+          <p:cNvPr id="18" name="Shape 16"/>
+          <p:cNvSpPr/>
+          <p:nvPr/>
+        </p:nvSpPr>
+        <p:spPr>
+          <a:xfrm>
+            <a:off x="7877190" y="3366912"/>
+            <a:ext cx="9510" cy="2089587"/>
+          </a:xfrm>
+          <a:prstGeom prst="rect">
+            <a:avLst/>
+          </a:prstGeom>
+          <a:solidFill>
+            <a:srgbClr val="FFFFFF">
+              <a:alpha val="10000"/>
+            </a:srgbClr>
+          </a:solidFill>
+          <a:ln/>
+        </p:spPr>
+      </p:sp>
+      <p:sp>
+        <p:nvSpPr>
+          <p:cNvPr id="19" name="Shape 17"/>
+          <p:cNvSpPr/>
+          <p:nvPr/>
+        </p:nvSpPr>
+        <p:spPr>
+          <a:xfrm>
+            <a:off x="4305270" y="5446989"/>
+            <a:ext cx="3581430" cy="9510"/>
+          </a:xfrm>
+          <a:prstGeom prst="rect">
+            <a:avLst/>
+          </a:prstGeom>
+          <a:solidFill>
+            <a:srgbClr val="FFFFFF">
+              <a:alpha val="10000"/>
+            </a:srgbClr>
+          </a:solidFill>
+          <a:ln/>
+        </p:spPr>
+      </p:sp>
+      <p:sp>
+        <p:nvSpPr>
+          <p:cNvPr id="20" name="Shape 18"/>
+          <p:cNvSpPr/>
+          <p:nvPr/>
+        </p:nvSpPr>
+        <p:spPr>
+          <a:xfrm>
+            <a:off x="4305270" y="3366912"/>
+            <a:ext cx="9510" cy="2089587"/>
+          </a:xfrm>
+          <a:prstGeom prst="rect">
+            <a:avLst/>
+          </a:prstGeom>
+          <a:solidFill>
+            <a:srgbClr val="FFFFFF">
+              <a:alpha val="10000"/>
+            </a:srgbClr>
+          </a:solidFill>
+          <a:ln/>
+        </p:spPr>
+      </p:sp>
+      <p:sp>
+        <p:nvSpPr>
+          <p:cNvPr id="21" name="Shape 19"/>
+          <p:cNvSpPr/>
+          <p:nvPr/>
+        </p:nvSpPr>
+        <p:spPr>
+          <a:xfrm>
+            <a:off x="5972221" y="3586002"/>
+            <a:ext cx="247620" cy="247620"/>
+          </a:xfrm>
+          <a:prstGeom prst="roundRect">
+            <a:avLst>
+              <a:gd name="adj" fmla="val 50000"/>
+            </a:avLst>
+          </a:prstGeom>
+          <a:solidFill>
+            <a:srgbClr val="38BDF8">
+              <a:alpha val="15000"/>
+            </a:srgbClr>
+          </a:solidFill>
+          <a:ln w="9525">
+            <a:solidFill>
+              <a:srgbClr val="38BDF8">
+                <a:alpha val="40000"/>
+              </a:srgbClr>
+            </a:solidFill>
+            <a:prstDash val="solid"/>
+          </a:ln>
+        </p:spPr>
+      </p:sp>
+      <p:sp>
+        <p:nvSpPr>
+          <p:cNvPr id="22" name="Text 20"/>
+          <p:cNvSpPr txBox="1"/>
+          <p:nvPr/>
+        </p:nvSpPr>
+        <p:spPr>
+          <a:xfrm>
+            <a:off x="5924580" y="3551530"/>
+            <a:ext cx="342900" cy="310805"/>
+          </a:xfrm>
+          <a:prstGeom prst="rect">
+            <a:avLst/>
+          </a:prstGeom>
+          <a:noFill/>
+          <a:ln/>
+        </p:spPr>
+        <p:txBody>
+          <a:bodyPr wrap="none" lIns="0" tIns="0" rIns="0" bIns="0" rtlCol="0" anchor="t"/>
+          <a:lstStyle/>
+          <a:p>
+            <a:pPr algn="ctr" indent="0" marL="0">
+              <a:lnSpc>
+                <a:spcPts val="2447"/>
+              </a:lnSpc>
+              <a:buNone/>
+            </a:pPr>
+            <a:r>
+              <a:rPr lang="en-US" sz="1631" b="1" spc="-54" kern="0" dirty="0">
+                <a:solidFill>
+                  <a:srgbClr val="38BDF8"/>
+                </a:solidFill>
+                <a:latin typeface="Malgun Gothic" pitchFamily="34" charset="0"/>
+                <a:ea typeface="Malgun Gothic" pitchFamily="34" charset="-122"/>
+                <a:cs typeface="Malgun Gothic" pitchFamily="34" charset="-120"/>
+              </a:rPr>
+              <a:t>02</a:t>
+            </a:r>
+            <a:endParaRPr lang="en-US" sz="1631" dirty="0"/>
+          </a:p>
+        </p:txBody>
+      </p:sp>
+      <p:sp>
+        <p:nvSpPr>
+          <p:cNvPr id="23" name="Text 21"/>
+          <p:cNvSpPr txBox="1"/>
+          <p:nvPr/>
+        </p:nvSpPr>
+        <p:spPr>
+          <a:xfrm>
+            <a:off x="4272900" y="3886017"/>
+            <a:ext cx="3646170" cy="828721"/>
+          </a:xfrm>
+          <a:prstGeom prst="rect">
+            <a:avLst/>
+          </a:prstGeom>
+          <a:noFill/>
+          <a:ln/>
+        </p:spPr>
+        <p:txBody>
+          <a:bodyPr wrap="none" lIns="0" tIns="0" rIns="0" bIns="0" rtlCol="0" anchor="t"/>
+          <a:lstStyle/>
+          <a:p>
+            <a:pPr algn="ctr" indent="0" marL="0">
+              <a:lnSpc>
+                <a:spcPts val="6525"/>
+              </a:lnSpc>
+              <a:buNone/>
+            </a:pPr>
+            <a:r>
+              <a:rPr lang="en-US" sz="6525" b="1" spc="-54" kern="0" dirty="0">
+                <a:solidFill>
+                  <a:srgbClr val="38BDF8"/>
+                </a:solidFill>
+                <a:latin typeface="Malgun Gothic" pitchFamily="34" charset="0"/>
+                <a:ea typeface="Malgun Gothic" pitchFamily="34" charset="-122"/>
+                <a:cs typeface="Malgun Gothic" pitchFamily="34" charset="-120"/>
+              </a:rPr>
+              <a:t>$450K</a:t>
+            </a:r>
+            <a:endParaRPr lang="en-US" sz="6525" dirty="0"/>
+          </a:p>
+        </p:txBody>
+      </p:sp>
+      <p:sp>
+        <p:nvSpPr>
+          <p:cNvPr id="24" name="Text 22"/>
+          <p:cNvSpPr txBox="1"/>
+          <p:nvPr/>
+        </p:nvSpPr>
+        <p:spPr>
+          <a:xfrm>
+            <a:off x="4272900" y="4770882"/>
+            <a:ext cx="3646170" cy="240030"/>
+          </a:xfrm>
+          <a:prstGeom prst="rect">
+            <a:avLst/>
+          </a:prstGeom>
+          <a:noFill/>
+          <a:ln/>
+        </p:spPr>
+        <p:txBody>
+          <a:bodyPr wrap="none" lIns="0" tIns="0" rIns="0" bIns="0" rtlCol="0" anchor="t"/>
+          <a:lstStyle/>
+          <a:p>
+            <a:pPr algn="ctr" indent="0" marL="0">
+              <a:lnSpc>
+                <a:spcPts val="1890"/>
+              </a:lnSpc>
+              <a:buNone/>
+            </a:pPr>
+            <a:r>
+              <a:rPr lang="en-US" sz="1260" b="1" spc="-54" kern="0" dirty="0">
+                <a:solidFill>
+                  <a:srgbClr val="FFFFFF"/>
+                </a:solidFill>
+                <a:latin typeface="Malgun Gothic" pitchFamily="34" charset="0"/>
+                <a:ea typeface="Malgun Gothic" pitchFamily="34" charset="-122"/>
+                <a:cs typeface="Malgun Gothic" pitchFamily="34" charset="-120"/>
+              </a:rPr>
+              <a:t>현재 월간 매출 (MRR)</a:t>
+            </a:r>
+            <a:endParaRPr lang="en-US" sz="1260" dirty="0"/>
+          </a:p>
+        </p:txBody>
+      </p:sp>
+      <p:sp>
+        <p:nvSpPr>
+          <p:cNvPr id="25" name="Text 23"/>
+          <p:cNvSpPr txBox="1"/>
+          <p:nvPr/>
+        </p:nvSpPr>
+        <p:spPr>
+          <a:xfrm>
+            <a:off x="4272900" y="5072725"/>
+            <a:ext cx="3646170" cy="182880"/>
+          </a:xfrm>
+          <a:prstGeom prst="rect">
+            <a:avLst/>
+          </a:prstGeom>
+          <a:noFill/>
+          <a:ln/>
+        </p:spPr>
+        <p:txBody>
+          <a:bodyPr wrap="none" lIns="0" tIns="0" rIns="0" bIns="0" rtlCol="0" anchor="t"/>
+          <a:lstStyle/>
+          <a:p>
+            <a:pPr algn="ctr" indent="0" marL="0">
+              <a:lnSpc>
+                <a:spcPts val="1440"/>
+              </a:lnSpc>
+              <a:buNone/>
+            </a:pPr>
+            <a:r>
+              <a:rPr lang="en-US" sz="960" spc="-54" kern="0" dirty="0">
+                <a:solidFill>
+                  <a:srgbClr val="94A3B8"/>
+                </a:solidFill>
+                <a:latin typeface="Malgun Gothic" pitchFamily="34" charset="0"/>
+                <a:ea typeface="Malgun Gothic" pitchFamily="34" charset="-122"/>
+                <a:cs typeface="Malgun Gothic" pitchFamily="34" charset="-120"/>
+              </a:rPr>
+              <a:t>매월 24%의 복합 성장률(MoM) 기반 고속 스케일업 달성</a:t>
+            </a:r>
+            <a:endParaRPr lang="en-US" sz="960" dirty="0"/>
+          </a:p>
+        </p:txBody>
+      </p:sp>
+      <p:sp>
+        <p:nvSpPr>
+          <p:cNvPr id="26" name="Shape 24"/>
+          <p:cNvSpPr/>
+          <p:nvPr/>
+        </p:nvSpPr>
+        <p:spPr>
+          <a:xfrm>
+            <a:off x="8058150" y="3366912"/>
+            <a:ext cx="3581430" cy="2089587"/>
+          </a:xfrm>
+          <a:prstGeom prst="roundRect">
+            <a:avLst>
+              <a:gd name="adj" fmla="val 7295"/>
+            </a:avLst>
+          </a:prstGeom>
+          <a:solidFill>
+            <a:srgbClr val="151826"/>
+          </a:solidFill>
+          <a:ln/>
+        </p:spPr>
+      </p:sp>
+      <p:sp>
+        <p:nvSpPr>
+          <p:cNvPr id="27" name="Shape 25"/>
+          <p:cNvSpPr/>
+          <p:nvPr/>
+        </p:nvSpPr>
+        <p:spPr>
+          <a:xfrm>
+            <a:off x="8058150" y="3366912"/>
+            <a:ext cx="3581430" cy="28621"/>
+          </a:xfrm>
+          <a:prstGeom prst="rect">
+            <a:avLst/>
+          </a:prstGeom>
+          <a:solidFill>
+            <a:srgbClr val="34D399"/>
+          </a:solidFill>
+          <a:ln/>
+        </p:spPr>
+      </p:sp>
+      <p:sp>
+        <p:nvSpPr>
+          <p:cNvPr id="28" name="Shape 26"/>
+          <p:cNvSpPr/>
+          <p:nvPr/>
+        </p:nvSpPr>
+        <p:spPr>
+          <a:xfrm>
+            <a:off x="11630071" y="3366912"/>
+            <a:ext cx="9510" cy="2089587"/>
+          </a:xfrm>
+          <a:prstGeom prst="rect">
+            <a:avLst/>
+          </a:prstGeom>
+          <a:solidFill>
+            <a:srgbClr val="FFFFFF">
+              <a:alpha val="10000"/>
+            </a:srgbClr>
+          </a:solidFill>
+          <a:ln/>
+        </p:spPr>
+      </p:sp>
+      <p:sp>
+        <p:nvSpPr>
+          <p:cNvPr id="29" name="Shape 27"/>
+          <p:cNvSpPr/>
+          <p:nvPr/>
+        </p:nvSpPr>
+        <p:spPr>
+          <a:xfrm>
+            <a:off x="8058150" y="5446989"/>
+            <a:ext cx="3581430" cy="9510"/>
+          </a:xfrm>
+          <a:prstGeom prst="rect">
+            <a:avLst/>
+          </a:prstGeom>
+          <a:solidFill>
+            <a:srgbClr val="FFFFFF">
+              <a:alpha val="10000"/>
+            </a:srgbClr>
+          </a:solidFill>
+          <a:ln/>
+        </p:spPr>
+      </p:sp>
+      <p:sp>
+        <p:nvSpPr>
+          <p:cNvPr id="30" name="Shape 28"/>
+          <p:cNvSpPr/>
+          <p:nvPr/>
+        </p:nvSpPr>
+        <p:spPr>
+          <a:xfrm>
+            <a:off x="8058150" y="3366912"/>
+            <a:ext cx="9510" cy="2089587"/>
+          </a:xfrm>
+          <a:prstGeom prst="rect">
+            <a:avLst/>
+          </a:prstGeom>
+          <a:solidFill>
+            <a:srgbClr val="FFFFFF">
+              <a:alpha val="10000"/>
+            </a:srgbClr>
+          </a:solidFill>
+          <a:ln/>
+        </p:spPr>
+      </p:sp>
+      <p:sp>
+        <p:nvSpPr>
+          <p:cNvPr id="31" name="Shape 29"/>
+          <p:cNvSpPr/>
+          <p:nvPr/>
+        </p:nvSpPr>
+        <p:spPr>
+          <a:xfrm>
+            <a:off x="9725010" y="3586002"/>
+            <a:ext cx="247620" cy="247620"/>
+          </a:xfrm>
+          <a:prstGeom prst="roundRect">
+            <a:avLst>
+              <a:gd name="adj" fmla="val 50000"/>
+            </a:avLst>
+          </a:prstGeom>
+          <a:solidFill>
+            <a:srgbClr val="34D399">
+              <a:alpha val="15000"/>
+            </a:srgbClr>
+          </a:solidFill>
+          <a:ln w="9525">
+            <a:solidFill>
+              <a:srgbClr val="34D399">
+                <a:alpha val="40000"/>
+              </a:srgbClr>
+            </a:solidFill>
+            <a:prstDash val="solid"/>
+          </a:ln>
+        </p:spPr>
+      </p:sp>
+      <p:sp>
+        <p:nvSpPr>
+          <p:cNvPr id="32" name="Text 30"/>
+          <p:cNvSpPr txBox="1"/>
+          <p:nvPr/>
+        </p:nvSpPr>
+        <p:spPr>
+          <a:xfrm>
+            <a:off x="9677370" y="3551530"/>
+            <a:ext cx="342900" cy="310805"/>
+          </a:xfrm>
+          <a:prstGeom prst="rect">
+            <a:avLst/>
+          </a:prstGeom>
+          <a:noFill/>
+          <a:ln/>
+        </p:spPr>
+        <p:txBody>
+          <a:bodyPr wrap="none" lIns="0" tIns="0" rIns="0" bIns="0" rtlCol="0" anchor="t"/>
+          <a:lstStyle/>
+          <a:p>
+            <a:pPr algn="ctr" indent="0" marL="0">
+              <a:lnSpc>
+                <a:spcPts val="2447"/>
+              </a:lnSpc>
+              <a:buNone/>
+            </a:pPr>
+            <a:r>
+              <a:rPr lang="en-US" sz="1631" b="1" spc="-54" kern="0" dirty="0">
+                <a:solidFill>
+                  <a:srgbClr val="34D399"/>
+                </a:solidFill>
+                <a:latin typeface="Malgun Gothic" pitchFamily="34" charset="0"/>
+                <a:ea typeface="Malgun Gothic" pitchFamily="34" charset="-122"/>
+                <a:cs typeface="Malgun Gothic" pitchFamily="34" charset="-120"/>
+              </a:rPr>
+              <a:t>03</a:t>
+            </a:r>
+            <a:endParaRPr lang="en-US" sz="1631" dirty="0"/>
+          </a:p>
+        </p:txBody>
+      </p:sp>
+      <p:sp>
+        <p:nvSpPr>
+          <p:cNvPr id="33" name="Text 31"/>
+          <p:cNvSpPr txBox="1"/>
+          <p:nvPr/>
+        </p:nvSpPr>
+        <p:spPr>
+          <a:xfrm>
+            <a:off x="8025780" y="3886017"/>
+            <a:ext cx="3646170" cy="828721"/>
+          </a:xfrm>
+          <a:prstGeom prst="rect">
+            <a:avLst/>
+          </a:prstGeom>
+          <a:noFill/>
+          <a:ln/>
+        </p:spPr>
+        <p:txBody>
+          <a:bodyPr wrap="none" lIns="0" tIns="0" rIns="0" bIns="0" rtlCol="0" anchor="t"/>
+          <a:lstStyle/>
+          <a:p>
+            <a:pPr algn="ctr" indent="0" marL="0">
+              <a:lnSpc>
+                <a:spcPts val="6525"/>
+              </a:lnSpc>
+              <a:buNone/>
+            </a:pPr>
+            <a:r>
+              <a:rPr lang="en-US" sz="6525" b="1" spc="-54" kern="0" dirty="0">
+                <a:solidFill>
+                  <a:srgbClr val="34D399"/>
+                </a:solidFill>
+                <a:latin typeface="Malgun Gothic" pitchFamily="34" charset="0"/>
+                <a:ea typeface="Malgun Gothic" pitchFamily="34" charset="-122"/>
+                <a:cs typeface="Malgun Gothic" pitchFamily="34" charset="-120"/>
+              </a:rPr>
+              <a:t>$42B</a:t>
+            </a:r>
+            <a:endParaRPr lang="en-US" sz="6525" dirty="0"/>
+          </a:p>
+        </p:txBody>
+      </p:sp>
+      <p:sp>
+        <p:nvSpPr>
+          <p:cNvPr id="34" name="Text 32"/>
+          <p:cNvSpPr txBox="1"/>
+          <p:nvPr/>
+        </p:nvSpPr>
+        <p:spPr>
+          <a:xfrm>
+            <a:off x="8025780" y="4770882"/>
+            <a:ext cx="3646170" cy="240030"/>
+          </a:xfrm>
+          <a:prstGeom prst="rect">
+            <a:avLst/>
+          </a:prstGeom>
+          <a:noFill/>
+          <a:ln/>
+        </p:spPr>
+        <p:txBody>
+          <a:bodyPr wrap="none" lIns="0" tIns="0" rIns="0" bIns="0" rtlCol="0" anchor="t"/>
+          <a:lstStyle/>
+          <a:p>
+            <a:pPr algn="ctr" indent="0" marL="0">
+              <a:lnSpc>
+                <a:spcPts val="1890"/>
+              </a:lnSpc>
+              <a:buNone/>
+            </a:pPr>
+            <a:r>
+              <a:rPr lang="en-US" sz="1260" b="1" spc="-54" kern="0" dirty="0">
+                <a:solidFill>
+                  <a:srgbClr val="FFFFFF"/>
+                </a:solidFill>
+                <a:latin typeface="Malgun Gothic" pitchFamily="34" charset="0"/>
+                <a:ea typeface="Malgun Gothic" pitchFamily="34" charset="-122"/>
+                <a:cs typeface="Malgun Gothic" pitchFamily="34" charset="-120"/>
+              </a:rPr>
+              <a:t>글로벌 개발 도구 (TAM)</a:t>
+            </a:r>
+            <a:endParaRPr lang="en-US" sz="1260" dirty="0"/>
+          </a:p>
+        </p:txBody>
+      </p:sp>
+      <p:sp>
+        <p:nvSpPr>
+          <p:cNvPr id="35" name="Text 33"/>
+          <p:cNvSpPr txBox="1"/>
+          <p:nvPr/>
+        </p:nvSpPr>
+        <p:spPr>
+          <a:xfrm>
+            <a:off x="8025780" y="5072725"/>
+            <a:ext cx="3646170" cy="182880"/>
+          </a:xfrm>
+          <a:prstGeom prst="rect">
+            <a:avLst/>
+          </a:prstGeom>
+          <a:noFill/>
+          <a:ln/>
+        </p:spPr>
+        <p:txBody>
+          <a:bodyPr wrap="none" lIns="0" tIns="0" rIns="0" bIns="0" rtlCol="0" anchor="t"/>
+          <a:lstStyle/>
+          <a:p>
+            <a:pPr algn="ctr" indent="0" marL="0">
+              <a:lnSpc>
+                <a:spcPts val="1440"/>
+              </a:lnSpc>
+              <a:buNone/>
+            </a:pPr>
+            <a:r>
+              <a:rPr lang="en-US" sz="960" spc="-54" kern="0" dirty="0">
+                <a:solidFill>
+                  <a:srgbClr val="94A3B8"/>
+                </a:solidFill>
+                <a:latin typeface="Malgun Gothic" pitchFamily="34" charset="0"/>
+                <a:ea typeface="Malgun Gothic" pitchFamily="34" charset="-122"/>
+                <a:cs typeface="Malgun Gothic" pitchFamily="34" charset="-120"/>
+              </a:rPr>
+              <a:t>2028년까지 연평균 26.5% 성장하는 초거대 시장 선점</a:t>
+            </a:r>
+            <a:endParaRPr lang="en-US" sz="960" dirty="0"/>
+          </a:p>
+        </p:txBody>
+      </p:sp>
     </p:spTree>
   </p:cSld>
   <p:clrMapOvr>
@@ -1424,16 +4230,9 @@
   <p:cSld name="Slide 4">
     <p:bg>
       <p:bgPr>
-        <a:blipFill dpi="0" rotWithShape="1">
-          <a:blip r:embed="rId1">
-            <a:lum/>
-          </a:blip>
-          <a:srcRect/>
-          <a:stretch>
-            <a:fillRect/>
-          </a:stretch>
-        </a:blipFill>
-        <a:effectLst/>
+        <a:solidFill>
+          <a:srgbClr val="FBBF24"/>
+        </a:solidFill>
       </p:bgPr>
     </p:bg>
     <p:spTree>
@@ -1450,6 +4249,479 @@
           <a:chExt cx="0" cy="0"/>
         </a:xfrm>
       </p:grpSpPr>
+      <p:sp>
+        <p:nvSpPr>
+          <p:cNvPr id="2" name="Shape 0"/>
+          <p:cNvSpPr/>
+          <p:nvPr/>
+        </p:nvSpPr>
+        <p:spPr>
+          <a:xfrm>
+            <a:off x="4948458" y="428671"/>
+            <a:ext cx="2295053" cy="445770"/>
+          </a:xfrm>
+          <a:prstGeom prst="roundRect">
+            <a:avLst>
+              <a:gd name="adj" fmla="val 50010"/>
+            </a:avLst>
+          </a:prstGeom>
+          <a:solidFill>
+            <a:srgbClr val="FBBF24">
+              <a:alpha val="18000"/>
+            </a:srgbClr>
+          </a:solidFill>
+          <a:ln w="9525">
+            <a:solidFill>
+              <a:srgbClr val="FBBF24">
+                <a:alpha val="40000"/>
+              </a:srgbClr>
+            </a:solidFill>
+            <a:prstDash val="solid"/>
+          </a:ln>
+        </p:spPr>
+      </p:sp>
+      <p:sp>
+        <p:nvSpPr>
+          <p:cNvPr id="3" name="Text 1"/>
+          <p:cNvSpPr txBox="1"/>
+          <p:nvPr/>
+        </p:nvSpPr>
+        <p:spPr>
+          <a:xfrm>
+            <a:off x="4952665" y="481980"/>
+            <a:ext cx="2286549" cy="331470"/>
+          </a:xfrm>
+          <a:prstGeom prst="rect">
+            <a:avLst/>
+          </a:prstGeom>
+          <a:noFill/>
+          <a:ln/>
+        </p:spPr>
+        <p:txBody>
+          <a:bodyPr wrap="none" lIns="0" tIns="0" rIns="0" bIns="0" rtlCol="0" anchor="t"/>
+          <a:lstStyle/>
+          <a:p>
+            <a:pPr algn="ctr" indent="0" marL="0">
+              <a:lnSpc>
+                <a:spcPts val="2610"/>
+              </a:lnSpc>
+              <a:buNone/>
+            </a:pPr>
+            <a:r>
+              <a:rPr lang="en-US" sz="1740" b="1" spc="70" kern="0" dirty="0">
+                <a:solidFill>
+                  <a:srgbClr val="FBBF24"/>
+                </a:solidFill>
+                <a:latin typeface="Malgun Gothic" pitchFamily="34" charset="0"/>
+                <a:ea typeface="Malgun Gothic" pitchFamily="34" charset="-122"/>
+                <a:cs typeface="Malgun Gothic" pitchFamily="34" charset="-120"/>
+              </a:rPr>
+              <a:t>PARADIGM SHIFT</a:t>
+            </a:r>
+            <a:endParaRPr lang="en-US" sz="1740" dirty="0"/>
+          </a:p>
+        </p:txBody>
+      </p:sp>
+      <p:sp>
+        <p:nvSpPr>
+          <p:cNvPr id="4" name="Text 2"/>
+          <p:cNvSpPr txBox="1"/>
+          <p:nvPr/>
+        </p:nvSpPr>
+        <p:spPr>
+          <a:xfrm>
+            <a:off x="-334488" y="944209"/>
+            <a:ext cx="12861036" cy="603321"/>
+          </a:xfrm>
+          <a:prstGeom prst="rect">
+            <a:avLst/>
+          </a:prstGeom>
+          <a:noFill/>
+          <a:ln/>
+        </p:spPr>
+        <p:txBody>
+          <a:bodyPr wrap="none" lIns="0" tIns="0" rIns="0" bIns="0" rtlCol="0" anchor="t"/>
+          <a:lstStyle/>
+          <a:p>
+            <a:pPr algn="ctr" indent="0" marL="0">
+              <a:lnSpc>
+                <a:spcPts val="4750"/>
+              </a:lnSpc>
+              <a:buNone/>
+            </a:pPr>
+            <a:r>
+              <a:rPr lang="en-US" sz="3654" b="1" spc="-91" kern="0" dirty="0">
+                <a:solidFill>
+                  <a:srgbClr val="FFFFFF"/>
+                </a:solidFill>
+                <a:latin typeface="Malgun Gothic" pitchFamily="34" charset="0"/>
+                <a:ea typeface="Malgun Gothic" pitchFamily="34" charset="-122"/>
+                <a:cs typeface="Malgun Gothic" pitchFamily="34" charset="-120"/>
+              </a:rPr>
+              <a:t>단순 AI 어시스턴트를 넘어선 완전 자율형 개발 파이프라인</a:t>
+            </a:r>
+            <a:endParaRPr lang="en-US" sz="3654" dirty="0"/>
+          </a:p>
+        </p:txBody>
+      </p:sp>
+      <p:sp>
+        <p:nvSpPr>
+          <p:cNvPr id="5" name="Shape 3"/>
+          <p:cNvSpPr/>
+          <p:nvPr/>
+        </p:nvSpPr>
+        <p:spPr>
+          <a:xfrm>
+            <a:off x="552480" y="2508748"/>
+            <a:ext cx="11087100" cy="2965491"/>
+          </a:xfrm>
+          <a:prstGeom prst="roundRect">
+            <a:avLst>
+              <a:gd name="adj" fmla="val 5140"/>
+            </a:avLst>
+          </a:prstGeom>
+          <a:solidFill>
+            <a:srgbClr val="182131">
+              <a:alpha val="70000"/>
+            </a:srgbClr>
+          </a:solidFill>
+          <a:ln w="9525">
+            <a:solidFill>
+              <a:srgbClr val="FBBF24">
+                <a:alpha val="35000"/>
+              </a:srgbClr>
+            </a:solidFill>
+            <a:prstDash val="solid"/>
+          </a:ln>
+        </p:spPr>
+      </p:sp>
+      <p:sp>
+        <p:nvSpPr>
+          <p:cNvPr id="6" name="Text 4"/>
+          <p:cNvSpPr txBox="1"/>
+          <p:nvPr/>
+        </p:nvSpPr>
+        <p:spPr>
+          <a:xfrm>
+            <a:off x="923910" y="2801996"/>
+            <a:ext cx="10344150" cy="2069562"/>
+          </a:xfrm>
+          <a:prstGeom prst="rect">
+            <a:avLst/>
+          </a:prstGeom>
+          <a:noFill/>
+          <a:ln/>
+        </p:spPr>
+        <p:txBody>
+          <a:bodyPr wrap="square" lIns="0" tIns="0" rIns="0" bIns="0" rtlCol="0" anchor="t"/>
+          <a:lstStyle/>
+          <a:p>
+            <a:pPr algn="ctr" indent="0" marL="0">
+              <a:lnSpc>
+                <a:spcPts val="5432"/>
+              </a:lnSpc>
+              <a:buNone/>
+            </a:pPr>
+            <a:r>
+              <a:rPr lang="en-US" sz="4024" b="1" spc="-54" kern="0" dirty="0">
+                <a:solidFill>
+                  <a:srgbClr val="FFFFFF"/>
+                </a:solidFill>
+                <a:latin typeface="Malgun Gothic" pitchFamily="34" charset="0"/>
+                <a:ea typeface="Malgun Gothic" pitchFamily="34" charset="-122"/>
+                <a:cs typeface="Malgun Gothic" pitchFamily="34" charset="-120"/>
+              </a:rPr>
+              <a:t>“ 단순 코드 추천이 아닌,</a:t>
+            </a:r>
+            <a:pPr algn="ctr" indent="0" marL="0">
+              <a:lnSpc>
+                <a:spcPts val="5432"/>
+              </a:lnSpc>
+              <a:buNone/>
+            </a:pPr>
+            <a:endParaRPr lang="en-US" sz="4024" dirty="0"/>
+          </a:p>
+          <a:p>
+            <a:pPr algn="ctr" indent="0" marL="0">
+              <a:lnSpc>
+                <a:spcPts val="5432"/>
+              </a:lnSpc>
+              <a:buNone/>
+            </a:pPr>
+            <a:r>
+              <a:rPr lang="en-US" sz="4024" b="1" spc="-54" kern="0" dirty="0">
+                <a:solidFill>
+                  <a:srgbClr val="FFFFFF"/>
+                </a:solidFill>
+                <a:latin typeface="Malgun Gothic" pitchFamily="34" charset="0"/>
+                <a:ea typeface="Malgun Gothic" pitchFamily="34" charset="-122"/>
+                <a:cs typeface="Malgun Gothic" pitchFamily="34" charset="-120"/>
+              </a:rPr>
+              <a:t> </a:t>
+            </a:r>
+            <a:endParaRPr lang="en-US" sz="4024" dirty="0"/>
+          </a:p>
+          <a:p>
+            <a:pPr algn="ctr" indent="0" marL="0">
+              <a:lnSpc>
+                <a:spcPts val="5432"/>
+              </a:lnSpc>
+              <a:buNone/>
+            </a:pPr>
+            <a:r>
+              <a:rPr lang="en-US" sz="4024" b="1" spc="-54" kern="0" dirty="0">
+                <a:solidFill>
+                  <a:srgbClr val="FBBF24"/>
+                </a:solidFill>
+                <a:latin typeface="Malgun Gothic" pitchFamily="34" charset="0"/>
+                <a:ea typeface="Malgun Gothic" pitchFamily="34" charset="-122"/>
+                <a:cs typeface="Malgun Gothic" pitchFamily="34" charset="-120"/>
+              </a:rPr>
+              <a:t>기획 분석부터 배포까지 스스로 수행하는</a:t>
+            </a:r>
+            <a:endParaRPr lang="en-US" sz="4024" dirty="0"/>
+          </a:p>
+          <a:p>
+            <a:pPr algn="ctr" indent="0" marL="0">
+              <a:lnSpc>
+                <a:spcPts val="5432"/>
+              </a:lnSpc>
+              <a:buNone/>
+            </a:pPr>
+            <a:r>
+              <a:rPr lang="en-US" sz="4024" b="1" spc="-54" kern="0" dirty="0">
+                <a:solidFill>
+                  <a:srgbClr val="FFFFFF"/>
+                </a:solidFill>
+                <a:latin typeface="Malgun Gothic" pitchFamily="34" charset="0"/>
+                <a:ea typeface="Malgun Gothic" pitchFamily="34" charset="-122"/>
+                <a:cs typeface="Malgun Gothic" pitchFamily="34" charset="-120"/>
+              </a:rPr>
+              <a:t>자율형 AI 소프트웨어 엔지니어 군단 ”</a:t>
+            </a:r>
+            <a:endParaRPr lang="en-US" sz="4024" dirty="0"/>
+          </a:p>
+        </p:txBody>
+      </p:sp>
+      <p:sp>
+        <p:nvSpPr>
+          <p:cNvPr id="7" name="Text 5"/>
+          <p:cNvSpPr txBox="1"/>
+          <p:nvPr/>
+        </p:nvSpPr>
+        <p:spPr>
+          <a:xfrm>
+            <a:off x="118506" y="4968392"/>
+            <a:ext cx="11955048" cy="210312"/>
+          </a:xfrm>
+          <a:prstGeom prst="rect">
+            <a:avLst/>
+          </a:prstGeom>
+          <a:noFill/>
+          <a:ln/>
+        </p:spPr>
+        <p:txBody>
+          <a:bodyPr wrap="none" lIns="0" tIns="0" rIns="0" bIns="0" rtlCol="0" anchor="t"/>
+          <a:lstStyle/>
+          <a:p>
+            <a:pPr algn="ctr" indent="0" marL="0">
+              <a:lnSpc>
+                <a:spcPts val="1656"/>
+              </a:lnSpc>
+              <a:buNone/>
+            </a:pPr>
+            <a:r>
+              <a:rPr lang="en-US" sz="1104" spc="-54" kern="0" dirty="0">
+                <a:solidFill>
+                  <a:srgbClr val="94A3B8"/>
+                </a:solidFill>
+                <a:latin typeface="Malgun Gothic" pitchFamily="34" charset="0"/>
+                <a:ea typeface="Malgun Gothic" pitchFamily="34" charset="-122"/>
+                <a:cs typeface="Malgun Gothic" pitchFamily="34" charset="-120"/>
+              </a:rPr>
+              <a:t>개발자가 비즈니스 핵심 로직에만 집중할 수 있는 오토노머스 환경 구축</a:t>
+            </a:r>
+            <a:endParaRPr lang="en-US" sz="1104" dirty="0"/>
+          </a:p>
+        </p:txBody>
+      </p:sp>
+      <p:sp>
+        <p:nvSpPr>
+          <p:cNvPr id="8" name="Text 6"/>
+          <p:cNvSpPr txBox="1"/>
+          <p:nvPr/>
+        </p:nvSpPr>
+        <p:spPr>
+          <a:xfrm>
+            <a:off x="3621664" y="6230173"/>
+            <a:ext cx="1549085" cy="205740"/>
+          </a:xfrm>
+          <a:prstGeom prst="rect">
+            <a:avLst/>
+          </a:prstGeom>
+          <a:noFill/>
+          <a:ln/>
+        </p:spPr>
+        <p:txBody>
+          <a:bodyPr wrap="none" lIns="0" tIns="0" rIns="0" bIns="0" rtlCol="0" anchor="t"/>
+          <a:lstStyle/>
+          <a:p>
+            <a:pPr algn="ctr" indent="0" marL="0">
+              <a:lnSpc>
+                <a:spcPts val="1620"/>
+              </a:lnSpc>
+              <a:buNone/>
+            </a:pPr>
+            <a:r>
+              <a:rPr lang="en-US" sz="1080" spc="-54" kern="0" dirty="0">
+                <a:solidFill>
+                  <a:srgbClr val="E2E8F0"/>
+                </a:solidFill>
+                <a:latin typeface="Malgun Gothic" pitchFamily="34" charset="0"/>
+                <a:ea typeface="Malgun Gothic" pitchFamily="34" charset="-122"/>
+                <a:cs typeface="Malgun Gothic" pitchFamily="34" charset="-120"/>
+              </a:rPr>
+              <a:t>✓ </a:t>
+            </a:r>
+            <a:pPr algn="ctr" indent="0" marL="0">
+              <a:lnSpc>
+                <a:spcPts val="1620"/>
+              </a:lnSpc>
+              <a:buNone/>
+            </a:pPr>
+            <a:r>
+              <a:rPr lang="en-US" sz="1080" b="1" spc="-54" kern="0" dirty="0">
+                <a:solidFill>
+                  <a:srgbClr val="E2E8F0"/>
+                </a:solidFill>
+                <a:latin typeface="Malgun Gothic" pitchFamily="34" charset="0"/>
+                <a:ea typeface="Malgun Gothic" pitchFamily="34" charset="-122"/>
+                <a:cs typeface="Malgun Gothic" pitchFamily="34" charset="-120"/>
+              </a:rPr>
+              <a:t>코드 작성 속도 10x 가속</a:t>
+            </a:r>
+            <a:endParaRPr lang="en-US" sz="1080" dirty="0"/>
+          </a:p>
+        </p:txBody>
+      </p:sp>
+      <p:sp>
+        <p:nvSpPr>
+          <p:cNvPr id="9" name="Text 7"/>
+          <p:cNvSpPr txBox="1"/>
+          <p:nvPr/>
+        </p:nvSpPr>
+        <p:spPr>
+          <a:xfrm>
+            <a:off x="5261000" y="6230173"/>
+            <a:ext cx="1560881" cy="205740"/>
+          </a:xfrm>
+          <a:prstGeom prst="rect">
+            <a:avLst/>
+          </a:prstGeom>
+          <a:noFill/>
+          <a:ln/>
+        </p:spPr>
+        <p:txBody>
+          <a:bodyPr wrap="none" lIns="0" tIns="0" rIns="0" bIns="0" rtlCol="0" anchor="t"/>
+          <a:lstStyle/>
+          <a:p>
+            <a:pPr algn="ctr" indent="0" marL="0">
+              <a:lnSpc>
+                <a:spcPts val="1620"/>
+              </a:lnSpc>
+              <a:buNone/>
+            </a:pPr>
+            <a:r>
+              <a:rPr lang="en-US" sz="1080" spc="-54" kern="0" dirty="0">
+                <a:solidFill>
+                  <a:srgbClr val="E2E8F0"/>
+                </a:solidFill>
+                <a:latin typeface="Malgun Gothic" pitchFamily="34" charset="0"/>
+                <a:ea typeface="Malgun Gothic" pitchFamily="34" charset="-122"/>
+                <a:cs typeface="Malgun Gothic" pitchFamily="34" charset="-120"/>
+              </a:rPr>
+              <a:t>✓ </a:t>
+            </a:r>
+            <a:pPr algn="ctr" indent="0" marL="0">
+              <a:lnSpc>
+                <a:spcPts val="1620"/>
+              </a:lnSpc>
+              <a:buNone/>
+            </a:pPr>
+            <a:r>
+              <a:rPr lang="en-US" sz="1080" b="1" spc="-54" kern="0" dirty="0">
+                <a:solidFill>
+                  <a:srgbClr val="E2E8F0"/>
+                </a:solidFill>
+                <a:latin typeface="Malgun Gothic" pitchFamily="34" charset="0"/>
+                <a:ea typeface="Malgun Gothic" pitchFamily="34" charset="-122"/>
+                <a:cs typeface="Malgun Gothic" pitchFamily="34" charset="-120"/>
+              </a:rPr>
+              <a:t>PR 리뷰 시간 80% 단축</a:t>
+            </a:r>
+            <a:endParaRPr lang="en-US" sz="1080" dirty="0"/>
+          </a:p>
+        </p:txBody>
+      </p:sp>
+      <p:sp>
+        <p:nvSpPr>
+          <p:cNvPr id="10" name="Text 8"/>
+          <p:cNvSpPr txBox="1"/>
+          <p:nvPr/>
+        </p:nvSpPr>
+        <p:spPr>
+          <a:xfrm>
+            <a:off x="6903537" y="6230173"/>
+            <a:ext cx="1675455" cy="205740"/>
+          </a:xfrm>
+          <a:prstGeom prst="rect">
+            <a:avLst/>
+          </a:prstGeom>
+          <a:noFill/>
+          <a:ln/>
+        </p:spPr>
+        <p:txBody>
+          <a:bodyPr wrap="none" lIns="0" tIns="0" rIns="0" bIns="0" rtlCol="0" anchor="t"/>
+          <a:lstStyle/>
+          <a:p>
+            <a:pPr algn="ctr" indent="0" marL="0">
+              <a:lnSpc>
+                <a:spcPts val="1620"/>
+              </a:lnSpc>
+              <a:buNone/>
+            </a:pPr>
+            <a:r>
+              <a:rPr lang="en-US" sz="1080" spc="-54" kern="0" dirty="0">
+                <a:solidFill>
+                  <a:srgbClr val="E2E8F0"/>
+                </a:solidFill>
+                <a:latin typeface="Malgun Gothic" pitchFamily="34" charset="0"/>
+                <a:ea typeface="Malgun Gothic" pitchFamily="34" charset="-122"/>
+                <a:cs typeface="Malgun Gothic" pitchFamily="34" charset="-120"/>
+              </a:rPr>
+              <a:t>✓ </a:t>
+            </a:r>
+            <a:pPr algn="ctr" indent="0" marL="0">
+              <a:lnSpc>
+                <a:spcPts val="1620"/>
+              </a:lnSpc>
+              <a:buNone/>
+            </a:pPr>
+            <a:r>
+              <a:rPr lang="en-US" sz="1080" b="1" spc="-54" kern="0" dirty="0">
+                <a:solidFill>
+                  <a:srgbClr val="E2E8F0"/>
+                </a:solidFill>
+                <a:latin typeface="Malgun Gothic" pitchFamily="34" charset="0"/>
+                <a:ea typeface="Malgun Gothic" pitchFamily="34" charset="-122"/>
+                <a:cs typeface="Malgun Gothic" pitchFamily="34" charset="-120"/>
+              </a:rPr>
+              <a:t>회귀 버그 발생률 0% 수렴</a:t>
+            </a:r>
+            <a:endParaRPr lang="en-US" sz="1080" dirty="0"/>
+          </a:p>
+        </p:txBody>
+      </p:sp>
     </p:spTree>
   </p:cSld>
   <p:clrMapOvr>
@@ -1463,16 +4735,9 @@
   <p:cSld name="Slide 5">
     <p:bg>
       <p:bgPr>
-        <a:blipFill dpi="0" rotWithShape="1">
-          <a:blip r:embed="rId1">
-            <a:lum/>
-          </a:blip>
-          <a:srcRect/>
-          <a:stretch>
-            <a:fillRect/>
-          </a:stretch>
-        </a:blipFill>
-        <a:effectLst/>
+        <a:solidFill>
+          <a:srgbClr val="FBBF24"/>
+        </a:solidFill>
       </p:bgPr>
     </p:bg>
     <p:spTree>
@@ -1489,6 +4754,648 @@
           <a:chExt cx="0" cy="0"/>
         </a:xfrm>
       </p:grpSpPr>
+      <p:sp>
+        <p:nvSpPr>
+          <p:cNvPr id="2" name="Shape 0"/>
+          <p:cNvSpPr/>
+          <p:nvPr/>
+        </p:nvSpPr>
+        <p:spPr>
+          <a:xfrm>
+            <a:off x="4925964" y="1756471"/>
+            <a:ext cx="2340041" cy="445770"/>
+          </a:xfrm>
+          <a:prstGeom prst="roundRect">
+            <a:avLst>
+              <a:gd name="adj" fmla="val 50010"/>
+            </a:avLst>
+          </a:prstGeom>
+          <a:solidFill>
+            <a:srgbClr val="FBBF24">
+              <a:alpha val="18000"/>
+            </a:srgbClr>
+          </a:solidFill>
+          <a:ln w="9525">
+            <a:solidFill>
+              <a:srgbClr val="FBBF24">
+                <a:alpha val="40000"/>
+              </a:srgbClr>
+            </a:solidFill>
+            <a:prstDash val="solid"/>
+          </a:ln>
+        </p:spPr>
+      </p:sp>
+      <p:sp>
+        <p:nvSpPr>
+          <p:cNvPr id="3" name="Text 1"/>
+          <p:cNvSpPr txBox="1"/>
+          <p:nvPr/>
+        </p:nvSpPr>
+        <p:spPr>
+          <a:xfrm>
+            <a:off x="4926604" y="1809872"/>
+            <a:ext cx="2338761" cy="331470"/>
+          </a:xfrm>
+          <a:prstGeom prst="rect">
+            <a:avLst/>
+          </a:prstGeom>
+          <a:noFill/>
+          <a:ln/>
+        </p:spPr>
+        <p:txBody>
+          <a:bodyPr wrap="none" lIns="0" tIns="0" rIns="0" bIns="0" rtlCol="0" anchor="t"/>
+          <a:lstStyle/>
+          <a:p>
+            <a:pPr algn="ctr" indent="0" marL="0">
+              <a:lnSpc>
+                <a:spcPts val="2610"/>
+              </a:lnSpc>
+              <a:buNone/>
+            </a:pPr>
+            <a:r>
+              <a:rPr lang="en-US" sz="1740" b="1" spc="70" kern="0" dirty="0">
+                <a:solidFill>
+                  <a:srgbClr val="FBBF24"/>
+                </a:solidFill>
+                <a:latin typeface="Malgun Gothic" pitchFamily="34" charset="0"/>
+                <a:ea typeface="Malgun Gothic" pitchFamily="34" charset="-122"/>
+                <a:cs typeface="Malgun Gothic" pitchFamily="34" charset="-120"/>
+              </a:rPr>
+              <a:t>BUSINESS MODEL</a:t>
+            </a:r>
+            <a:endParaRPr lang="en-US" sz="1740" dirty="0"/>
+          </a:p>
+        </p:txBody>
+      </p:sp>
+      <p:sp>
+        <p:nvSpPr>
+          <p:cNvPr id="4" name="Text 2"/>
+          <p:cNvSpPr txBox="1"/>
+          <p:nvPr/>
+        </p:nvSpPr>
+        <p:spPr>
+          <a:xfrm>
+            <a:off x="-334488" y="2272101"/>
+            <a:ext cx="12861036" cy="603321"/>
+          </a:xfrm>
+          <a:prstGeom prst="rect">
+            <a:avLst/>
+          </a:prstGeom>
+          <a:noFill/>
+          <a:ln/>
+        </p:spPr>
+        <p:txBody>
+          <a:bodyPr wrap="none" lIns="0" tIns="0" rIns="0" bIns="0" rtlCol="0" anchor="t"/>
+          <a:lstStyle/>
+          <a:p>
+            <a:pPr algn="ctr" indent="0" marL="0">
+              <a:lnSpc>
+                <a:spcPts val="4750"/>
+              </a:lnSpc>
+              <a:buNone/>
+            </a:pPr>
+            <a:r>
+              <a:rPr lang="en-US" sz="3654" b="1" spc="-91" kern="0" dirty="0">
+                <a:solidFill>
+                  <a:srgbClr val="FFFFFF"/>
+                </a:solidFill>
+                <a:latin typeface="Malgun Gothic" pitchFamily="34" charset="0"/>
+                <a:ea typeface="Malgun Gothic" pitchFamily="34" charset="-122"/>
+                <a:cs typeface="Malgun Gothic" pitchFamily="34" charset="-120"/>
+              </a:rPr>
+              <a:t>하이브리드 과금 체계와 강력한 성장 플라이휠</a:t>
+            </a:r>
+            <a:endParaRPr lang="en-US" sz="3654" dirty="0"/>
+          </a:p>
+        </p:txBody>
+      </p:sp>
+      <p:sp>
+        <p:nvSpPr>
+          <p:cNvPr id="5" name="Text 3"/>
+          <p:cNvSpPr txBox="1"/>
+          <p:nvPr/>
+        </p:nvSpPr>
+        <p:spPr>
+          <a:xfrm>
+            <a:off x="-334488" y="3074944"/>
+            <a:ext cx="12861036" cy="406085"/>
+          </a:xfrm>
+          <a:prstGeom prst="rect">
+            <a:avLst/>
+          </a:prstGeom>
+          <a:noFill/>
+          <a:ln/>
+        </p:spPr>
+        <p:txBody>
+          <a:bodyPr wrap="none" lIns="0" tIns="0" rIns="0" bIns="0" rtlCol="0" anchor="t"/>
+          <a:lstStyle/>
+          <a:p>
+            <a:pPr algn="ctr" indent="0" marL="0">
+              <a:lnSpc>
+                <a:spcPts val="3197"/>
+              </a:lnSpc>
+              <a:buNone/>
+            </a:pPr>
+            <a:r>
+              <a:rPr lang="en-US" sz="2132" spc="-54" kern="0" dirty="0">
+                <a:solidFill>
+                  <a:srgbClr val="94A3B8"/>
+                </a:solidFill>
+                <a:latin typeface="Malgun Gothic" pitchFamily="34" charset="0"/>
+                <a:ea typeface="Malgun Gothic" pitchFamily="34" charset="-122"/>
+                <a:cs typeface="Malgun Gothic" pitchFamily="34" charset="-120"/>
+              </a:rPr>
+              <a:t>개발자 1인당 월간 고정 구독료와 사용량 기반 토큰 모델의 결합으로 NRR 155% 달성</a:t>
+            </a:r>
+            <a:endParaRPr lang="en-US" sz="2132" dirty="0"/>
+          </a:p>
+        </p:txBody>
+      </p:sp>
+      <p:sp>
+        <p:nvSpPr>
+          <p:cNvPr id="6" name="Shape 4"/>
+          <p:cNvSpPr/>
+          <p:nvPr/>
+        </p:nvSpPr>
+        <p:spPr>
+          <a:xfrm>
+            <a:off x="552480" y="3712555"/>
+            <a:ext cx="5457871" cy="1398575"/>
+          </a:xfrm>
+          <a:prstGeom prst="roundRect">
+            <a:avLst>
+              <a:gd name="adj" fmla="val 10899"/>
+            </a:avLst>
+          </a:prstGeom>
+          <a:solidFill>
+            <a:srgbClr val="151826"/>
+          </a:solidFill>
+          <a:ln w="9525">
+            <a:solidFill>
+              <a:srgbClr val="FFFFFF">
+                <a:alpha val="10000"/>
+              </a:srgbClr>
+            </a:solidFill>
+            <a:prstDash val="solid"/>
+          </a:ln>
+        </p:spPr>
+      </p:sp>
+      <p:sp>
+        <p:nvSpPr>
+          <p:cNvPr id="7" name="Text 5"/>
+          <p:cNvSpPr txBox="1"/>
+          <p:nvPr/>
+        </p:nvSpPr>
+        <p:spPr>
+          <a:xfrm>
+            <a:off x="752460" y="3908786"/>
+            <a:ext cx="5440314" cy="217170"/>
+          </a:xfrm>
+          <a:prstGeom prst="rect">
+            <a:avLst/>
+          </a:prstGeom>
+          <a:noFill/>
+          <a:ln/>
+        </p:spPr>
+        <p:txBody>
+          <a:bodyPr wrap="none" lIns="0" tIns="0" rIns="0" bIns="0" rtlCol="0" anchor="t"/>
+          <a:lstStyle/>
+          <a:p>
+            <a:pPr algn="l" indent="0" marL="0">
+              <a:lnSpc>
+                <a:spcPts val="1710"/>
+              </a:lnSpc>
+              <a:buNone/>
+            </a:pPr>
+            <a:r>
+              <a:rPr lang="en-US" sz="1140" b="1" spc="-54" kern="0" dirty="0">
+                <a:solidFill>
+                  <a:srgbClr val="FBBF24"/>
+                </a:solidFill>
+                <a:latin typeface="Malgun Gothic" pitchFamily="34" charset="0"/>
+                <a:ea typeface="Malgun Gothic" pitchFamily="34" charset="-122"/>
+                <a:cs typeface="Malgun Gothic" pitchFamily="34" charset="-120"/>
+              </a:rPr>
+              <a:t>✓ B2B 엔터프라이즈 구독 (SaaS)</a:t>
+            </a:r>
+            <a:endParaRPr lang="en-US" sz="1140" dirty="0"/>
+          </a:p>
+        </p:txBody>
+      </p:sp>
+      <p:sp>
+        <p:nvSpPr>
+          <p:cNvPr id="8" name="Text 6"/>
+          <p:cNvSpPr txBox="1"/>
+          <p:nvPr/>
+        </p:nvSpPr>
+        <p:spPr>
+          <a:xfrm>
+            <a:off x="904890" y="4242359"/>
+            <a:ext cx="5275722" cy="184252"/>
+          </a:xfrm>
+          <a:prstGeom prst="rect">
+            <a:avLst/>
+          </a:prstGeom>
+          <a:noFill/>
+          <a:ln/>
+        </p:spPr>
+        <p:txBody>
+          <a:bodyPr wrap="none" lIns="0" tIns="0" rIns="0" bIns="0" rtlCol="0" anchor="t"/>
+          <a:lstStyle/>
+          <a:p>
+            <a:pPr algn="l" marL="342900" indent="-342900">
+              <a:lnSpc>
+                <a:spcPts val="1451"/>
+              </a:lnSpc>
+              <a:buSzPct val="100000"/>
+              <a:buChar char="•"/>
+            </a:pPr>
+            <a:r>
+              <a:rPr lang="en-US" sz="936" spc="-54" kern="0" dirty="0">
+                <a:solidFill>
+                  <a:srgbClr val="E2E8F0"/>
+                </a:solidFill>
+                <a:latin typeface="Malgun Gothic" pitchFamily="34" charset="0"/>
+                <a:ea typeface="Malgun Gothic" pitchFamily="34" charset="-122"/>
+                <a:cs typeface="Malgun Gothic" pitchFamily="34" charset="-120"/>
+              </a:rPr>
+              <a:t>시트당 월간 구독료: </a:t>
+            </a:r>
+            <a:pPr algn="l" indent="0" marL="0">
+              <a:lnSpc>
+                <a:spcPts val="1451"/>
+              </a:lnSpc>
+              <a:buNone/>
+            </a:pPr>
+            <a:r>
+              <a:rPr lang="en-US" sz="936" b="1" spc="-54" kern="0" dirty="0">
+                <a:solidFill>
+                  <a:srgbClr val="E2E8F0"/>
+                </a:solidFill>
+                <a:latin typeface="Malgun Gothic" pitchFamily="34" charset="0"/>
+                <a:ea typeface="Malgun Gothic" pitchFamily="34" charset="-122"/>
+                <a:cs typeface="Malgun Gothic" pitchFamily="34" charset="-120"/>
+              </a:rPr>
+              <a:t>$49/월 (연간 계약 기준)</a:t>
+            </a:r>
+            <a:endParaRPr lang="en-US" sz="936" dirty="0"/>
+          </a:p>
+        </p:txBody>
+      </p:sp>
+      <p:sp>
+        <p:nvSpPr>
+          <p:cNvPr id="9" name="Text 7"/>
+          <p:cNvSpPr txBox="1"/>
+          <p:nvPr/>
+        </p:nvSpPr>
+        <p:spPr>
+          <a:xfrm>
+            <a:off x="904890" y="4464649"/>
+            <a:ext cx="5275722" cy="184252"/>
+          </a:xfrm>
+          <a:prstGeom prst="rect">
+            <a:avLst/>
+          </a:prstGeom>
+          <a:noFill/>
+          <a:ln/>
+        </p:spPr>
+        <p:txBody>
+          <a:bodyPr wrap="none" lIns="0" tIns="0" rIns="0" bIns="0" rtlCol="0" anchor="t"/>
+          <a:lstStyle/>
+          <a:p>
+            <a:pPr algn="l" marL="342900" indent="-342900">
+              <a:lnSpc>
+                <a:spcPts val="1451"/>
+              </a:lnSpc>
+              <a:buSzPct val="100000"/>
+              <a:buChar char="•"/>
+            </a:pPr>
+            <a:r>
+              <a:rPr lang="en-US" sz="936" spc="-54" kern="0" dirty="0">
+                <a:solidFill>
+                  <a:srgbClr val="E2E8F0"/>
+                </a:solidFill>
+                <a:latin typeface="Malgun Gothic" pitchFamily="34" charset="0"/>
+                <a:ea typeface="Malgun Gothic" pitchFamily="34" charset="-122"/>
+                <a:cs typeface="Malgun Gothic" pitchFamily="34" charset="-120"/>
+              </a:rPr>
+              <a:t>온프레미스 격리 에디션: </a:t>
+            </a:r>
+            <a:pPr algn="l" indent="0" marL="0">
+              <a:lnSpc>
+                <a:spcPts val="1451"/>
+              </a:lnSpc>
+              <a:buNone/>
+            </a:pPr>
+            <a:r>
+              <a:rPr lang="en-US" sz="936" b="1" spc="-54" kern="0" dirty="0">
+                <a:solidFill>
+                  <a:srgbClr val="E2E8F0"/>
+                </a:solidFill>
+                <a:latin typeface="Malgun Gothic" pitchFamily="34" charset="0"/>
+                <a:ea typeface="Malgun Gothic" pitchFamily="34" charset="-122"/>
+                <a:cs typeface="Malgun Gothic" pitchFamily="34" charset="-120"/>
+              </a:rPr>
+              <a:t>계정당 연 $120K</a:t>
+            </a:r>
+            <a:endParaRPr lang="en-US" sz="936" dirty="0"/>
+          </a:p>
+        </p:txBody>
+      </p:sp>
+      <p:sp>
+        <p:nvSpPr>
+          <p:cNvPr id="10" name="Text 8"/>
+          <p:cNvSpPr txBox="1"/>
+          <p:nvPr/>
+        </p:nvSpPr>
+        <p:spPr>
+          <a:xfrm>
+            <a:off x="904890" y="4687032"/>
+            <a:ext cx="5275722" cy="184252"/>
+          </a:xfrm>
+          <a:prstGeom prst="rect">
+            <a:avLst/>
+          </a:prstGeom>
+          <a:noFill/>
+          <a:ln/>
+        </p:spPr>
+        <p:txBody>
+          <a:bodyPr wrap="none" lIns="0" tIns="0" rIns="0" bIns="0" rtlCol="0" anchor="t"/>
+          <a:lstStyle/>
+          <a:p>
+            <a:pPr algn="l" marL="342900" indent="-342900">
+              <a:lnSpc>
+                <a:spcPts val="1451"/>
+              </a:lnSpc>
+              <a:buSzPct val="100000"/>
+              <a:buChar char="•"/>
+            </a:pPr>
+            <a:r>
+              <a:rPr lang="en-US" sz="936" spc="-54" kern="0" dirty="0">
+                <a:solidFill>
+                  <a:srgbClr val="E2E8F0"/>
+                </a:solidFill>
+                <a:latin typeface="Malgun Gothic" pitchFamily="34" charset="0"/>
+                <a:ea typeface="Malgun Gothic" pitchFamily="34" charset="-122"/>
+                <a:cs typeface="Malgun Gothic" pitchFamily="34" charset="-120"/>
+              </a:rPr>
+              <a:t>계약 유지율(Gross Retention): </a:t>
+            </a:r>
+            <a:pPr algn="l" indent="0" marL="0">
+              <a:lnSpc>
+                <a:spcPts val="1451"/>
+              </a:lnSpc>
+              <a:buNone/>
+            </a:pPr>
+            <a:r>
+              <a:rPr lang="en-US" sz="936" b="1" spc="-54" kern="0" dirty="0">
+                <a:solidFill>
+                  <a:srgbClr val="E2E8F0"/>
+                </a:solidFill>
+                <a:latin typeface="Malgun Gothic" pitchFamily="34" charset="0"/>
+                <a:ea typeface="Malgun Gothic" pitchFamily="34" charset="-122"/>
+                <a:cs typeface="Malgun Gothic" pitchFamily="34" charset="-120"/>
+              </a:rPr>
+              <a:t>98.5% 달성</a:t>
+            </a:r>
+            <a:endParaRPr lang="en-US" sz="936" dirty="0"/>
+          </a:p>
+        </p:txBody>
+      </p:sp>
+      <p:sp>
+        <p:nvSpPr>
+          <p:cNvPr id="11" name="Shape 9"/>
+          <p:cNvSpPr/>
+          <p:nvPr/>
+        </p:nvSpPr>
+        <p:spPr>
+          <a:xfrm>
+            <a:off x="6181710" y="3712555"/>
+            <a:ext cx="5457871" cy="1398575"/>
+          </a:xfrm>
+          <a:prstGeom prst="roundRect">
+            <a:avLst>
+              <a:gd name="adj" fmla="val 10899"/>
+            </a:avLst>
+          </a:prstGeom>
+          <a:solidFill>
+            <a:srgbClr val="151826"/>
+          </a:solidFill>
+          <a:ln w="9525">
+            <a:solidFill>
+              <a:srgbClr val="FFFFFF">
+                <a:alpha val="10000"/>
+              </a:srgbClr>
+            </a:solidFill>
+            <a:prstDash val="solid"/>
+          </a:ln>
+        </p:spPr>
+      </p:sp>
+      <p:sp>
+        <p:nvSpPr>
+          <p:cNvPr id="12" name="Text 10"/>
+          <p:cNvSpPr txBox="1"/>
+          <p:nvPr/>
+        </p:nvSpPr>
+        <p:spPr>
+          <a:xfrm>
+            <a:off x="6381780" y="3908786"/>
+            <a:ext cx="5440314" cy="217170"/>
+          </a:xfrm>
+          <a:prstGeom prst="rect">
+            <a:avLst/>
+          </a:prstGeom>
+          <a:noFill/>
+          <a:ln/>
+        </p:spPr>
+        <p:txBody>
+          <a:bodyPr wrap="none" lIns="0" tIns="0" rIns="0" bIns="0" rtlCol="0" anchor="t"/>
+          <a:lstStyle/>
+          <a:p>
+            <a:pPr algn="l" indent="0" marL="0">
+              <a:lnSpc>
+                <a:spcPts val="1710"/>
+              </a:lnSpc>
+              <a:buNone/>
+            </a:pPr>
+            <a:r>
+              <a:rPr lang="en-US" sz="1140" b="1" spc="-54" kern="0" dirty="0">
+                <a:solidFill>
+                  <a:srgbClr val="34D399"/>
+                </a:solidFill>
+                <a:latin typeface="Malgun Gothic" pitchFamily="34" charset="0"/>
+                <a:ea typeface="Malgun Gothic" pitchFamily="34" charset="-122"/>
+                <a:cs typeface="Malgun Gothic" pitchFamily="34" charset="-120"/>
+              </a:rPr>
+              <a:t>✓ 사용량 기반 토큰 과금 (Usage-Based)</a:t>
+            </a:r>
+            <a:endParaRPr lang="en-US" sz="1140" dirty="0"/>
+          </a:p>
+        </p:txBody>
+      </p:sp>
+      <p:sp>
+        <p:nvSpPr>
+          <p:cNvPr id="13" name="Text 11"/>
+          <p:cNvSpPr txBox="1"/>
+          <p:nvPr/>
+        </p:nvSpPr>
+        <p:spPr>
+          <a:xfrm>
+            <a:off x="6534120" y="4242359"/>
+            <a:ext cx="5275722" cy="184252"/>
+          </a:xfrm>
+          <a:prstGeom prst="rect">
+            <a:avLst/>
+          </a:prstGeom>
+          <a:noFill/>
+          <a:ln/>
+        </p:spPr>
+        <p:txBody>
+          <a:bodyPr wrap="none" lIns="0" tIns="0" rIns="0" bIns="0" rtlCol="0" anchor="t"/>
+          <a:lstStyle/>
+          <a:p>
+            <a:pPr algn="l" marL="342900" indent="-342900">
+              <a:lnSpc>
+                <a:spcPts val="1451"/>
+              </a:lnSpc>
+              <a:buSzPct val="100000"/>
+              <a:buChar char="•"/>
+            </a:pPr>
+            <a:r>
+              <a:rPr lang="en-US" sz="936" spc="-54" kern="0" dirty="0">
+                <a:solidFill>
+                  <a:srgbClr val="E2E8F0"/>
+                </a:solidFill>
+                <a:latin typeface="Malgun Gothic" pitchFamily="34" charset="0"/>
+                <a:ea typeface="Malgun Gothic" pitchFamily="34" charset="-122"/>
+                <a:cs typeface="Malgun Gothic" pitchFamily="34" charset="-120"/>
+              </a:rPr>
+              <a:t>고난도 리팩토링 및 CI 빌드 토큰 종량제</a:t>
+            </a:r>
+            <a:endParaRPr lang="en-US" sz="936" dirty="0"/>
+          </a:p>
+        </p:txBody>
+      </p:sp>
+      <p:sp>
+        <p:nvSpPr>
+          <p:cNvPr id="14" name="Text 12"/>
+          <p:cNvSpPr txBox="1"/>
+          <p:nvPr/>
+        </p:nvSpPr>
+        <p:spPr>
+          <a:xfrm>
+            <a:off x="6534120" y="4464649"/>
+            <a:ext cx="5275722" cy="184252"/>
+          </a:xfrm>
+          <a:prstGeom prst="rect">
+            <a:avLst/>
+          </a:prstGeom>
+          <a:noFill/>
+          <a:ln/>
+        </p:spPr>
+        <p:txBody>
+          <a:bodyPr wrap="none" lIns="0" tIns="0" rIns="0" bIns="0" rtlCol="0" anchor="t"/>
+          <a:lstStyle/>
+          <a:p>
+            <a:pPr algn="l" marL="342900" indent="-342900">
+              <a:lnSpc>
+                <a:spcPts val="1451"/>
+              </a:lnSpc>
+              <a:buSzPct val="100000"/>
+              <a:buChar char="•"/>
+            </a:pPr>
+            <a:r>
+              <a:rPr lang="en-US" sz="936" spc="-54" kern="0" dirty="0">
+                <a:solidFill>
+                  <a:srgbClr val="E2E8F0"/>
+                </a:solidFill>
+                <a:latin typeface="Malgun Gothic" pitchFamily="34" charset="0"/>
+                <a:ea typeface="Malgun Gothic" pitchFamily="34" charset="-122"/>
+                <a:cs typeface="Malgun Gothic" pitchFamily="34" charset="-120"/>
+              </a:rPr>
+              <a:t>엔터프라이즈 월평균 추가 과금: </a:t>
+            </a:r>
+            <a:pPr algn="l" indent="0" marL="0">
+              <a:lnSpc>
+                <a:spcPts val="1451"/>
+              </a:lnSpc>
+              <a:buNone/>
+            </a:pPr>
+            <a:r>
+              <a:rPr lang="en-US" sz="936" b="1" spc="-54" kern="0" dirty="0">
+                <a:solidFill>
+                  <a:srgbClr val="E2E8F0"/>
+                </a:solidFill>
+                <a:latin typeface="Malgun Gothic" pitchFamily="34" charset="0"/>
+                <a:ea typeface="Malgun Gothic" pitchFamily="34" charset="-122"/>
+                <a:cs typeface="Malgun Gothic" pitchFamily="34" charset="-120"/>
+              </a:rPr>
+              <a:t>기본료의 1.8배</a:t>
+            </a:r>
+            <a:endParaRPr lang="en-US" sz="936" dirty="0"/>
+          </a:p>
+        </p:txBody>
+      </p:sp>
+      <p:sp>
+        <p:nvSpPr>
+          <p:cNvPr id="15" name="Text 13"/>
+          <p:cNvSpPr txBox="1"/>
+          <p:nvPr/>
+        </p:nvSpPr>
+        <p:spPr>
+          <a:xfrm>
+            <a:off x="6534120" y="4687032"/>
+            <a:ext cx="5275722" cy="184252"/>
+          </a:xfrm>
+          <a:prstGeom prst="rect">
+            <a:avLst/>
+          </a:prstGeom>
+          <a:noFill/>
+          <a:ln/>
+        </p:spPr>
+        <p:txBody>
+          <a:bodyPr wrap="none" lIns="0" tIns="0" rIns="0" bIns="0" rtlCol="0" anchor="t"/>
+          <a:lstStyle/>
+          <a:p>
+            <a:pPr algn="l" marL="342900" indent="-342900">
+              <a:lnSpc>
+                <a:spcPts val="1451"/>
+              </a:lnSpc>
+              <a:buSzPct val="100000"/>
+              <a:buChar char="•"/>
+            </a:pPr>
+            <a:r>
+              <a:rPr lang="en-US" sz="936" spc="-54" kern="0" dirty="0">
+                <a:solidFill>
+                  <a:srgbClr val="E2E8F0"/>
+                </a:solidFill>
+                <a:latin typeface="Malgun Gothic" pitchFamily="34" charset="0"/>
+                <a:ea typeface="Malgun Gothic" pitchFamily="34" charset="-122"/>
+                <a:cs typeface="Malgun Gothic" pitchFamily="34" charset="-120"/>
+              </a:rPr>
+              <a:t>순매출 유지율(NRR): </a:t>
+            </a:r>
+            <a:pPr algn="l" indent="0" marL="0">
+              <a:lnSpc>
+                <a:spcPts val="1451"/>
+              </a:lnSpc>
+              <a:buNone/>
+            </a:pPr>
+            <a:r>
+              <a:rPr lang="en-US" sz="936" b="1" spc="-54" kern="0" dirty="0">
+                <a:solidFill>
+                  <a:srgbClr val="E2E8F0"/>
+                </a:solidFill>
+                <a:latin typeface="Malgun Gothic" pitchFamily="34" charset="0"/>
+                <a:ea typeface="Malgun Gothic" pitchFamily="34" charset="-122"/>
+                <a:cs typeface="Malgun Gothic" pitchFamily="34" charset="-120"/>
+              </a:rPr>
+              <a:t>155% (최상위 SaaS 지표)</a:t>
+            </a:r>
+            <a:endParaRPr lang="en-US" sz="936" dirty="0"/>
+          </a:p>
+        </p:txBody>
+      </p:sp>
     </p:spTree>
   </p:cSld>
   <p:clrMapOvr>
@@ -1502,16 +5409,9 @@
   <p:cSld name="Slide 6">
     <p:bg>
       <p:bgPr>
-        <a:blipFill dpi="0" rotWithShape="1">
-          <a:blip r:embed="rId1">
-            <a:lum/>
-          </a:blip>
-          <a:srcRect/>
-          <a:stretch>
-            <a:fillRect/>
-          </a:stretch>
-        </a:blipFill>
-        <a:effectLst/>
+        <a:solidFill>
+          <a:srgbClr val="FBBF24"/>
+        </a:solidFill>
       </p:bgPr>
     </p:bg>
     <p:spTree>
@@ -1528,6 +5428,1084 @@
           <a:chExt cx="0" cy="0"/>
         </a:xfrm>
       </p:grpSpPr>
+      <p:sp>
+        <p:nvSpPr>
+          <p:cNvPr id="2" name="Shape 0"/>
+          <p:cNvSpPr/>
+          <p:nvPr/>
+        </p:nvSpPr>
+        <p:spPr>
+          <a:xfrm>
+            <a:off x="552480" y="773125"/>
+            <a:ext cx="2373874" cy="445770"/>
+          </a:xfrm>
+          <a:prstGeom prst="roundRect">
+            <a:avLst>
+              <a:gd name="adj" fmla="val 50010"/>
+            </a:avLst>
+          </a:prstGeom>
+          <a:solidFill>
+            <a:srgbClr val="FBBF24">
+              <a:alpha val="18000"/>
+            </a:srgbClr>
+          </a:solidFill>
+          <a:ln w="9525">
+            <a:solidFill>
+              <a:srgbClr val="FBBF24">
+                <a:alpha val="40000"/>
+              </a:srgbClr>
+            </a:solidFill>
+            <a:prstDash val="solid"/>
+          </a:ln>
+        </p:spPr>
+      </p:sp>
+      <p:sp>
+        <p:nvSpPr>
+          <p:cNvPr id="3" name="Text 1"/>
+          <p:cNvSpPr txBox="1"/>
+          <p:nvPr/>
+        </p:nvSpPr>
+        <p:spPr>
+          <a:xfrm>
+            <a:off x="695310" y="826526"/>
+            <a:ext cx="2233148" cy="331470"/>
+          </a:xfrm>
+          <a:prstGeom prst="rect">
+            <a:avLst/>
+          </a:prstGeom>
+          <a:noFill/>
+          <a:ln/>
+        </p:spPr>
+        <p:txBody>
+          <a:bodyPr wrap="none" lIns="0" tIns="0" rIns="0" bIns="0" rtlCol="0" anchor="t"/>
+          <a:lstStyle/>
+          <a:p>
+            <a:pPr algn="l" indent="0" marL="0">
+              <a:lnSpc>
+                <a:spcPts val="2610"/>
+              </a:lnSpc>
+              <a:buNone/>
+            </a:pPr>
+            <a:r>
+              <a:rPr lang="en-US" sz="1740" b="1" spc="70" kern="0" dirty="0">
+                <a:solidFill>
+                  <a:srgbClr val="FBBF24"/>
+                </a:solidFill>
+                <a:latin typeface="Malgun Gothic" pitchFamily="34" charset="0"/>
+                <a:ea typeface="Malgun Gothic" pitchFamily="34" charset="-122"/>
+                <a:cs typeface="Malgun Gothic" pitchFamily="34" charset="-120"/>
+              </a:rPr>
+              <a:t>INVESTMENT ASK</a:t>
+            </a:r>
+            <a:endParaRPr lang="en-US" sz="1740" dirty="0"/>
+          </a:p>
+        </p:txBody>
+      </p:sp>
+      <p:sp>
+        <p:nvSpPr>
+          <p:cNvPr id="4" name="Text 2"/>
+          <p:cNvSpPr txBox="1"/>
+          <p:nvPr/>
+        </p:nvSpPr>
+        <p:spPr>
+          <a:xfrm>
+            <a:off x="533370" y="1288755"/>
+            <a:ext cx="11993088" cy="603321"/>
+          </a:xfrm>
+          <a:prstGeom prst="rect">
+            <a:avLst/>
+          </a:prstGeom>
+          <a:noFill/>
+          <a:ln/>
+        </p:spPr>
+        <p:txBody>
+          <a:bodyPr wrap="none" lIns="0" tIns="0" rIns="0" bIns="0" rtlCol="0" anchor="t"/>
+          <a:lstStyle/>
+          <a:p>
+            <a:pPr algn="l" indent="0" marL="0">
+              <a:lnSpc>
+                <a:spcPts val="4750"/>
+              </a:lnSpc>
+              <a:buNone/>
+            </a:pPr>
+            <a:r>
+              <a:rPr lang="en-US" sz="3654" b="1" spc="-91" kern="0" dirty="0">
+                <a:solidFill>
+                  <a:srgbClr val="FFFFFF"/>
+                </a:solidFill>
+                <a:latin typeface="Malgun Gothic" pitchFamily="34" charset="0"/>
+                <a:ea typeface="Malgun Gothic" pitchFamily="34" charset="-122"/>
+                <a:cs typeface="Malgun Gothic" pitchFamily="34" charset="-120"/>
+              </a:rPr>
+              <a:t>투자 제안 및 질의응답 (Q&amp;A)</a:t>
+            </a:r>
+            <a:endParaRPr lang="en-US" sz="3654" dirty="0"/>
+          </a:p>
+        </p:txBody>
+      </p:sp>
+      <p:sp>
+        <p:nvSpPr>
+          <p:cNvPr id="5" name="Text 3"/>
+          <p:cNvSpPr txBox="1"/>
+          <p:nvPr/>
+        </p:nvSpPr>
+        <p:spPr>
+          <a:xfrm>
+            <a:off x="533370" y="2091599"/>
+            <a:ext cx="11993088" cy="406085"/>
+          </a:xfrm>
+          <a:prstGeom prst="rect">
+            <a:avLst/>
+          </a:prstGeom>
+          <a:noFill/>
+          <a:ln/>
+        </p:spPr>
+        <p:txBody>
+          <a:bodyPr wrap="none" lIns="0" tIns="0" rIns="0" bIns="0" rtlCol="0" anchor="t"/>
+          <a:lstStyle/>
+          <a:p>
+            <a:pPr algn="l" indent="0" marL="0">
+              <a:lnSpc>
+                <a:spcPts val="3197"/>
+              </a:lnSpc>
+              <a:buNone/>
+            </a:pPr>
+            <a:r>
+              <a:rPr lang="en-US" sz="2132" spc="-54" kern="0" dirty="0">
+                <a:solidFill>
+                  <a:srgbClr val="94A3B8"/>
+                </a:solidFill>
+                <a:latin typeface="Malgun Gothic" pitchFamily="34" charset="0"/>
+                <a:ea typeface="Malgun Gothic" pitchFamily="34" charset="-122"/>
+                <a:cs typeface="Malgun Gothic" pitchFamily="34" charset="-120"/>
+              </a:rPr>
+              <a:t>Series A $5M 라운드를 통해 글로벌 엔지니어링 시장의 지배적 리더로 도약합니다.</a:t>
+            </a:r>
+            <a:endParaRPr lang="en-US" sz="2132" dirty="0"/>
+          </a:p>
+        </p:txBody>
+      </p:sp>
+      <p:sp>
+        <p:nvSpPr>
+          <p:cNvPr id="6" name="Shape 4"/>
+          <p:cNvSpPr/>
+          <p:nvPr/>
+        </p:nvSpPr>
+        <p:spPr>
+          <a:xfrm>
+            <a:off x="552480" y="2653040"/>
+            <a:ext cx="6029919" cy="669707"/>
+          </a:xfrm>
+          <a:prstGeom prst="roundRect">
+            <a:avLst>
+              <a:gd name="adj" fmla="val 22761"/>
+            </a:avLst>
+          </a:prstGeom>
+          <a:solidFill>
+            <a:srgbClr val="151826"/>
+          </a:solidFill>
+          <a:ln/>
+        </p:spPr>
+      </p:sp>
+      <p:sp>
+        <p:nvSpPr>
+          <p:cNvPr id="7" name="Shape 5"/>
+          <p:cNvSpPr/>
+          <p:nvPr/>
+        </p:nvSpPr>
+        <p:spPr>
+          <a:xfrm>
+            <a:off x="552480" y="2653040"/>
+            <a:ext cx="6029919" cy="9510"/>
+          </a:xfrm>
+          <a:prstGeom prst="rect">
+            <a:avLst/>
+          </a:prstGeom>
+          <a:solidFill>
+            <a:srgbClr val="FFFFFF">
+              <a:alpha val="10000"/>
+            </a:srgbClr>
+          </a:solidFill>
+          <a:ln/>
+        </p:spPr>
+      </p:sp>
+      <p:sp>
+        <p:nvSpPr>
+          <p:cNvPr id="8" name="Shape 6"/>
+          <p:cNvSpPr/>
+          <p:nvPr/>
+        </p:nvSpPr>
+        <p:spPr>
+          <a:xfrm>
+            <a:off x="6572799" y="2653040"/>
+            <a:ext cx="9510" cy="669707"/>
+          </a:xfrm>
+          <a:prstGeom prst="rect">
+            <a:avLst/>
+          </a:prstGeom>
+          <a:solidFill>
+            <a:srgbClr val="FFFFFF">
+              <a:alpha val="10000"/>
+            </a:srgbClr>
+          </a:solidFill>
+          <a:ln/>
+        </p:spPr>
+      </p:sp>
+      <p:sp>
+        <p:nvSpPr>
+          <p:cNvPr id="9" name="Shape 7"/>
+          <p:cNvSpPr/>
+          <p:nvPr/>
+        </p:nvSpPr>
+        <p:spPr>
+          <a:xfrm>
+            <a:off x="552480" y="3313146"/>
+            <a:ext cx="6029919" cy="9510"/>
+          </a:xfrm>
+          <a:prstGeom prst="rect">
+            <a:avLst/>
+          </a:prstGeom>
+          <a:solidFill>
+            <a:srgbClr val="FFFFFF">
+              <a:alpha val="10000"/>
+            </a:srgbClr>
+          </a:solidFill>
+          <a:ln/>
+        </p:spPr>
+      </p:sp>
+      <p:sp>
+        <p:nvSpPr>
+          <p:cNvPr id="10" name="Shape 8"/>
+          <p:cNvSpPr/>
+          <p:nvPr/>
+        </p:nvSpPr>
+        <p:spPr>
+          <a:xfrm>
+            <a:off x="552480" y="2653040"/>
+            <a:ext cx="28621" cy="669707"/>
+          </a:xfrm>
+          <a:prstGeom prst="rect">
+            <a:avLst/>
+          </a:prstGeom>
+          <a:solidFill>
+            <a:srgbClr val="FBBF24"/>
+          </a:solidFill>
+          <a:ln/>
+        </p:spPr>
+      </p:sp>
+      <p:sp>
+        <p:nvSpPr>
+          <p:cNvPr id="11" name="Text 9"/>
+          <p:cNvSpPr txBox="1"/>
+          <p:nvPr/>
+        </p:nvSpPr>
+        <p:spPr>
+          <a:xfrm>
+            <a:off x="714421" y="2776484"/>
+            <a:ext cx="6161044" cy="210312"/>
+          </a:xfrm>
+          <a:prstGeom prst="rect">
+            <a:avLst/>
+          </a:prstGeom>
+          <a:noFill/>
+          <a:ln/>
+        </p:spPr>
+        <p:txBody>
+          <a:bodyPr wrap="none" lIns="0" tIns="0" rIns="0" bIns="0" rtlCol="0" anchor="t"/>
+          <a:lstStyle/>
+          <a:p>
+            <a:pPr algn="l" indent="0" marL="0">
+              <a:lnSpc>
+                <a:spcPts val="1656"/>
+              </a:lnSpc>
+              <a:buNone/>
+            </a:pPr>
+            <a:r>
+              <a:rPr lang="en-US" sz="1104" b="1" spc="-54" kern="0" dirty="0">
+                <a:solidFill>
+                  <a:srgbClr val="FFFFFF"/>
+                </a:solidFill>
+                <a:latin typeface="Malgun Gothic" pitchFamily="34" charset="0"/>
+                <a:ea typeface="Malgun Gothic" pitchFamily="34" charset="-122"/>
+                <a:cs typeface="Malgun Gothic" pitchFamily="34" charset="-120"/>
+              </a:rPr>
+              <a:t>01. Series A $5M 펀딩 목표</a:t>
+            </a:r>
+            <a:endParaRPr lang="en-US" sz="1104" dirty="0"/>
+          </a:p>
+        </p:txBody>
+      </p:sp>
+      <p:sp>
+        <p:nvSpPr>
+          <p:cNvPr id="12" name="Text 10"/>
+          <p:cNvSpPr txBox="1"/>
+          <p:nvPr/>
+        </p:nvSpPr>
+        <p:spPr>
+          <a:xfrm>
+            <a:off x="714421" y="3019349"/>
+            <a:ext cx="6161044" cy="173736"/>
+          </a:xfrm>
+          <a:prstGeom prst="rect">
+            <a:avLst/>
+          </a:prstGeom>
+          <a:noFill/>
+          <a:ln/>
+        </p:spPr>
+        <p:txBody>
+          <a:bodyPr wrap="none" lIns="0" tIns="0" rIns="0" bIns="0" rtlCol="0" anchor="t"/>
+          <a:lstStyle/>
+          <a:p>
+            <a:pPr algn="l" indent="0" marL="0">
+              <a:lnSpc>
+                <a:spcPts val="1368"/>
+              </a:lnSpc>
+              <a:buNone/>
+            </a:pPr>
+            <a:r>
+              <a:rPr lang="en-US" sz="912" spc="-54" kern="0" dirty="0">
+                <a:solidFill>
+                  <a:srgbClr val="94A3B8"/>
+                </a:solidFill>
+                <a:latin typeface="Malgun Gothic" pitchFamily="34" charset="0"/>
+                <a:ea typeface="Malgun Gothic" pitchFamily="34" charset="-122"/>
+                <a:cs typeface="Malgun Gothic" pitchFamily="34" charset="-120"/>
+              </a:rPr>
+              <a:t>R&amp;D AI 연구진 20명 확보 및 북미 세일즈 거점 설립</a:t>
+            </a:r>
+            <a:endParaRPr lang="en-US" sz="912" dirty="0"/>
+          </a:p>
+        </p:txBody>
+      </p:sp>
+      <p:sp>
+        <p:nvSpPr>
+          <p:cNvPr id="13" name="Shape 11"/>
+          <p:cNvSpPr/>
+          <p:nvPr/>
+        </p:nvSpPr>
+        <p:spPr>
+          <a:xfrm>
+            <a:off x="552480" y="3417936"/>
+            <a:ext cx="6029919" cy="669707"/>
+          </a:xfrm>
+          <a:prstGeom prst="roundRect">
+            <a:avLst>
+              <a:gd name="adj" fmla="val 22761"/>
+            </a:avLst>
+          </a:prstGeom>
+          <a:solidFill>
+            <a:srgbClr val="151826"/>
+          </a:solidFill>
+          <a:ln/>
+        </p:spPr>
+      </p:sp>
+      <p:sp>
+        <p:nvSpPr>
+          <p:cNvPr id="14" name="Shape 12"/>
+          <p:cNvSpPr/>
+          <p:nvPr/>
+        </p:nvSpPr>
+        <p:spPr>
+          <a:xfrm>
+            <a:off x="552480" y="3417936"/>
+            <a:ext cx="6029919" cy="9510"/>
+          </a:xfrm>
+          <a:prstGeom prst="rect">
+            <a:avLst/>
+          </a:prstGeom>
+          <a:solidFill>
+            <a:srgbClr val="FFFFFF">
+              <a:alpha val="10000"/>
+            </a:srgbClr>
+          </a:solidFill>
+          <a:ln/>
+        </p:spPr>
+      </p:sp>
+      <p:sp>
+        <p:nvSpPr>
+          <p:cNvPr id="15" name="Shape 13"/>
+          <p:cNvSpPr/>
+          <p:nvPr/>
+        </p:nvSpPr>
+        <p:spPr>
+          <a:xfrm>
+            <a:off x="6572799" y="3417936"/>
+            <a:ext cx="9510" cy="669707"/>
+          </a:xfrm>
+          <a:prstGeom prst="rect">
+            <a:avLst/>
+          </a:prstGeom>
+          <a:solidFill>
+            <a:srgbClr val="FFFFFF">
+              <a:alpha val="10000"/>
+            </a:srgbClr>
+          </a:solidFill>
+          <a:ln/>
+        </p:spPr>
+      </p:sp>
+      <p:sp>
+        <p:nvSpPr>
+          <p:cNvPr id="16" name="Shape 14"/>
+          <p:cNvSpPr/>
+          <p:nvPr/>
+        </p:nvSpPr>
+        <p:spPr>
+          <a:xfrm>
+            <a:off x="552480" y="4078133"/>
+            <a:ext cx="6029919" cy="9510"/>
+          </a:xfrm>
+          <a:prstGeom prst="rect">
+            <a:avLst/>
+          </a:prstGeom>
+          <a:solidFill>
+            <a:srgbClr val="FFFFFF">
+              <a:alpha val="10000"/>
+            </a:srgbClr>
+          </a:solidFill>
+          <a:ln/>
+        </p:spPr>
+      </p:sp>
+      <p:sp>
+        <p:nvSpPr>
+          <p:cNvPr id="17" name="Shape 15"/>
+          <p:cNvSpPr/>
+          <p:nvPr/>
+        </p:nvSpPr>
+        <p:spPr>
+          <a:xfrm>
+            <a:off x="552480" y="3417936"/>
+            <a:ext cx="28621" cy="669707"/>
+          </a:xfrm>
+          <a:prstGeom prst="rect">
+            <a:avLst/>
+          </a:prstGeom>
+          <a:solidFill>
+            <a:srgbClr val="38BDF8"/>
+          </a:solidFill>
+          <a:ln/>
+        </p:spPr>
+      </p:sp>
+      <p:sp>
+        <p:nvSpPr>
+          <p:cNvPr id="18" name="Text 16"/>
+          <p:cNvSpPr txBox="1"/>
+          <p:nvPr/>
+        </p:nvSpPr>
+        <p:spPr>
+          <a:xfrm>
+            <a:off x="714421" y="3541380"/>
+            <a:ext cx="6161044" cy="210312"/>
+          </a:xfrm>
+          <a:prstGeom prst="rect">
+            <a:avLst/>
+          </a:prstGeom>
+          <a:noFill/>
+          <a:ln/>
+        </p:spPr>
+        <p:txBody>
+          <a:bodyPr wrap="none" lIns="0" tIns="0" rIns="0" bIns="0" rtlCol="0" anchor="t"/>
+          <a:lstStyle/>
+          <a:p>
+            <a:pPr algn="l" indent="0" marL="0">
+              <a:lnSpc>
+                <a:spcPts val="1656"/>
+              </a:lnSpc>
+              <a:buNone/>
+            </a:pPr>
+            <a:r>
+              <a:rPr lang="en-US" sz="1104" b="1" spc="-54" kern="0" dirty="0">
+                <a:solidFill>
+                  <a:srgbClr val="FFFFFF"/>
+                </a:solidFill>
+                <a:latin typeface="Malgun Gothic" pitchFamily="34" charset="0"/>
+                <a:ea typeface="Malgun Gothic" pitchFamily="34" charset="-122"/>
+                <a:cs typeface="Malgun Gothic" pitchFamily="34" charset="-120"/>
+              </a:rPr>
+              <a:t>02. 2027년 목표 ARR $20M 달성</a:t>
+            </a:r>
+            <a:endParaRPr lang="en-US" sz="1104" dirty="0"/>
+          </a:p>
+        </p:txBody>
+      </p:sp>
+      <p:sp>
+        <p:nvSpPr>
+          <p:cNvPr id="19" name="Text 17"/>
+          <p:cNvSpPr txBox="1"/>
+          <p:nvPr/>
+        </p:nvSpPr>
+        <p:spPr>
+          <a:xfrm>
+            <a:off x="714421" y="3784244"/>
+            <a:ext cx="6161044" cy="173736"/>
+          </a:xfrm>
+          <a:prstGeom prst="rect">
+            <a:avLst/>
+          </a:prstGeom>
+          <a:noFill/>
+          <a:ln/>
+        </p:spPr>
+        <p:txBody>
+          <a:bodyPr wrap="none" lIns="0" tIns="0" rIns="0" bIns="0" rtlCol="0" anchor="t"/>
+          <a:lstStyle/>
+          <a:p>
+            <a:pPr algn="l" indent="0" marL="0">
+              <a:lnSpc>
+                <a:spcPts val="1368"/>
+              </a:lnSpc>
+              <a:buNone/>
+            </a:pPr>
+            <a:r>
+              <a:rPr lang="en-US" sz="912" spc="-54" kern="0" dirty="0">
+                <a:solidFill>
+                  <a:srgbClr val="94A3B8"/>
+                </a:solidFill>
+                <a:latin typeface="Malgun Gothic" pitchFamily="34" charset="0"/>
+                <a:ea typeface="Malgun Gothic" pitchFamily="34" charset="-122"/>
+                <a:cs typeface="Malgun Gothic" pitchFamily="34" charset="-120"/>
+              </a:rPr>
+              <a:t>포춘 500 기업 15% 침투 및 글로벌 개발자 100만 명 확보</a:t>
+            </a:r>
+            <a:endParaRPr lang="en-US" sz="912" dirty="0"/>
+          </a:p>
+        </p:txBody>
+      </p:sp>
+      <p:sp>
+        <p:nvSpPr>
+          <p:cNvPr id="20" name="Shape 18"/>
+          <p:cNvSpPr/>
+          <p:nvPr/>
+        </p:nvSpPr>
+        <p:spPr>
+          <a:xfrm>
+            <a:off x="552480" y="4183014"/>
+            <a:ext cx="6029919" cy="669707"/>
+          </a:xfrm>
+          <a:prstGeom prst="roundRect">
+            <a:avLst>
+              <a:gd name="adj" fmla="val 22761"/>
+            </a:avLst>
+          </a:prstGeom>
+          <a:solidFill>
+            <a:srgbClr val="151826"/>
+          </a:solidFill>
+          <a:ln/>
+        </p:spPr>
+      </p:sp>
+      <p:sp>
+        <p:nvSpPr>
+          <p:cNvPr id="21" name="Shape 19"/>
+          <p:cNvSpPr/>
+          <p:nvPr/>
+        </p:nvSpPr>
+        <p:spPr>
+          <a:xfrm>
+            <a:off x="552480" y="4183014"/>
+            <a:ext cx="6029919" cy="9510"/>
+          </a:xfrm>
+          <a:prstGeom prst="rect">
+            <a:avLst/>
+          </a:prstGeom>
+          <a:solidFill>
+            <a:srgbClr val="FFFFFF">
+              <a:alpha val="10000"/>
+            </a:srgbClr>
+          </a:solidFill>
+          <a:ln/>
+        </p:spPr>
+      </p:sp>
+      <p:sp>
+        <p:nvSpPr>
+          <p:cNvPr id="22" name="Shape 20"/>
+          <p:cNvSpPr/>
+          <p:nvPr/>
+        </p:nvSpPr>
+        <p:spPr>
+          <a:xfrm>
+            <a:off x="6572799" y="4183014"/>
+            <a:ext cx="9510" cy="669707"/>
+          </a:xfrm>
+          <a:prstGeom prst="rect">
+            <a:avLst/>
+          </a:prstGeom>
+          <a:solidFill>
+            <a:srgbClr val="FFFFFF">
+              <a:alpha val="10000"/>
+            </a:srgbClr>
+          </a:solidFill>
+          <a:ln/>
+        </p:spPr>
+      </p:sp>
+      <p:sp>
+        <p:nvSpPr>
+          <p:cNvPr id="23" name="Shape 21"/>
+          <p:cNvSpPr/>
+          <p:nvPr/>
+        </p:nvSpPr>
+        <p:spPr>
+          <a:xfrm>
+            <a:off x="552480" y="4843211"/>
+            <a:ext cx="6029919" cy="9510"/>
+          </a:xfrm>
+          <a:prstGeom prst="rect">
+            <a:avLst/>
+          </a:prstGeom>
+          <a:solidFill>
+            <a:srgbClr val="FFFFFF">
+              <a:alpha val="10000"/>
+            </a:srgbClr>
+          </a:solidFill>
+          <a:ln/>
+        </p:spPr>
+      </p:sp>
+      <p:sp>
+        <p:nvSpPr>
+          <p:cNvPr id="24" name="Shape 22"/>
+          <p:cNvSpPr/>
+          <p:nvPr/>
+        </p:nvSpPr>
+        <p:spPr>
+          <a:xfrm>
+            <a:off x="552480" y="4183014"/>
+            <a:ext cx="28621" cy="669707"/>
+          </a:xfrm>
+          <a:prstGeom prst="rect">
+            <a:avLst/>
+          </a:prstGeom>
+          <a:solidFill>
+            <a:srgbClr val="34D399"/>
+          </a:solidFill>
+          <a:ln/>
+        </p:spPr>
+      </p:sp>
+      <p:sp>
+        <p:nvSpPr>
+          <p:cNvPr id="25" name="Text 23"/>
+          <p:cNvSpPr txBox="1"/>
+          <p:nvPr/>
+        </p:nvSpPr>
+        <p:spPr>
+          <a:xfrm>
+            <a:off x="714421" y="4306458"/>
+            <a:ext cx="6161044" cy="210312"/>
+          </a:xfrm>
+          <a:prstGeom prst="rect">
+            <a:avLst/>
+          </a:prstGeom>
+          <a:noFill/>
+          <a:ln/>
+        </p:spPr>
+        <p:txBody>
+          <a:bodyPr wrap="none" lIns="0" tIns="0" rIns="0" bIns="0" rtlCol="0" anchor="t"/>
+          <a:lstStyle/>
+          <a:p>
+            <a:pPr algn="l" indent="0" marL="0">
+              <a:lnSpc>
+                <a:spcPts val="1656"/>
+              </a:lnSpc>
+              <a:buNone/>
+            </a:pPr>
+            <a:r>
+              <a:rPr lang="en-US" sz="1104" b="1" spc="-54" kern="0" dirty="0">
+                <a:solidFill>
+                  <a:srgbClr val="FFFFFF"/>
+                </a:solidFill>
+                <a:latin typeface="Malgun Gothic" pitchFamily="34" charset="0"/>
+                <a:ea typeface="Malgun Gothic" pitchFamily="34" charset="-122"/>
+                <a:cs typeface="Malgun Gothic" pitchFamily="34" charset="-120"/>
+              </a:rPr>
+              <a:t>03. 독보적인 기술 해자(Moat) 구축</a:t>
+            </a:r>
+            <a:endParaRPr lang="en-US" sz="1104" dirty="0"/>
+          </a:p>
+        </p:txBody>
+      </p:sp>
+      <p:sp>
+        <p:nvSpPr>
+          <p:cNvPr id="26" name="Text 24"/>
+          <p:cNvSpPr txBox="1"/>
+          <p:nvPr/>
+        </p:nvSpPr>
+        <p:spPr>
+          <a:xfrm>
+            <a:off x="714421" y="4549231"/>
+            <a:ext cx="6161044" cy="173736"/>
+          </a:xfrm>
+          <a:prstGeom prst="rect">
+            <a:avLst/>
+          </a:prstGeom>
+          <a:noFill/>
+          <a:ln/>
+        </p:spPr>
+        <p:txBody>
+          <a:bodyPr wrap="none" lIns="0" tIns="0" rIns="0" bIns="0" rtlCol="0" anchor="t"/>
+          <a:lstStyle/>
+          <a:p>
+            <a:pPr algn="l" indent="0" marL="0">
+              <a:lnSpc>
+                <a:spcPts val="1368"/>
+              </a:lnSpc>
+              <a:buNone/>
+            </a:pPr>
+            <a:r>
+              <a:rPr lang="en-US" sz="912" spc="-54" kern="0" dirty="0">
+                <a:solidFill>
+                  <a:srgbClr val="94A3B8"/>
+                </a:solidFill>
+                <a:latin typeface="Malgun Gothic" pitchFamily="34" charset="0"/>
+                <a:ea typeface="Malgun Gothic" pitchFamily="34" charset="-122"/>
+                <a:cs typeface="Malgun Gothic" pitchFamily="34" charset="-120"/>
+              </a:rPr>
+              <a:t>자체 멀티에이전트 오케스트레이션 특허 8건 출원 완료</a:t>
+            </a:r>
+            <a:endParaRPr lang="en-US" sz="912" dirty="0"/>
+          </a:p>
+        </p:txBody>
+      </p:sp>
+      <p:sp>
+        <p:nvSpPr>
+          <p:cNvPr id="27" name="Shape 25"/>
+          <p:cNvSpPr/>
+          <p:nvPr/>
+        </p:nvSpPr>
+        <p:spPr>
+          <a:xfrm>
+            <a:off x="6772869" y="2653040"/>
+            <a:ext cx="4866711" cy="3441344"/>
+          </a:xfrm>
+          <a:prstGeom prst="roundRect">
+            <a:avLst>
+              <a:gd name="adj" fmla="val 3874"/>
+            </a:avLst>
+          </a:prstGeom>
+          <a:solidFill>
+            <a:srgbClr val="151826"/>
+          </a:solidFill>
+          <a:ln w="9525">
+            <a:solidFill>
+              <a:srgbClr val="FBBF24">
+                <a:alpha val="40000"/>
+              </a:srgbClr>
+            </a:solidFill>
+            <a:prstDash val="solid"/>
+          </a:ln>
+        </p:spPr>
+      </p:sp>
+      <p:sp>
+        <p:nvSpPr>
+          <p:cNvPr id="28" name="Text 26"/>
+          <p:cNvSpPr txBox="1"/>
+          <p:nvPr/>
+        </p:nvSpPr>
+        <p:spPr>
+          <a:xfrm>
+            <a:off x="6953829" y="2832445"/>
+            <a:ext cx="4843028" cy="298369"/>
+          </a:xfrm>
+          <a:prstGeom prst="rect">
+            <a:avLst/>
+          </a:prstGeom>
+          <a:noFill/>
+          <a:ln/>
+        </p:spPr>
+        <p:txBody>
+          <a:bodyPr wrap="none" lIns="0" tIns="0" rIns="0" bIns="0" rtlCol="0" anchor="t"/>
+          <a:lstStyle/>
+          <a:p>
+            <a:pPr algn="l" indent="0" marL="0">
+              <a:lnSpc>
+                <a:spcPts val="2349"/>
+              </a:lnSpc>
+              <a:buNone/>
+            </a:pPr>
+            <a:r>
+              <a:rPr lang="en-US" sz="1566" b="1" spc="125" kern="0" dirty="0">
+                <a:solidFill>
+                  <a:srgbClr val="FBBF24"/>
+                </a:solidFill>
+                <a:latin typeface="Malgun Gothic" pitchFamily="34" charset="0"/>
+                <a:ea typeface="Malgun Gothic" pitchFamily="34" charset="-122"/>
+                <a:cs typeface="Malgun Gothic" pitchFamily="34" charset="-120"/>
+              </a:rPr>
+              <a:t>INVESTOR RELATIONS</a:t>
+            </a:r>
+            <a:endParaRPr lang="en-US" sz="1566" dirty="0"/>
+          </a:p>
+        </p:txBody>
+      </p:sp>
+      <p:sp>
+        <p:nvSpPr>
+          <p:cNvPr id="29" name="Text 27"/>
+          <p:cNvSpPr txBox="1"/>
+          <p:nvPr/>
+        </p:nvSpPr>
+        <p:spPr>
+          <a:xfrm>
+            <a:off x="6953829" y="3149285"/>
+            <a:ext cx="4843028" cy="546903"/>
+          </a:xfrm>
+          <a:prstGeom prst="rect">
+            <a:avLst/>
+          </a:prstGeom>
+          <a:noFill/>
+          <a:ln/>
+        </p:spPr>
+        <p:txBody>
+          <a:bodyPr wrap="none" lIns="0" tIns="0" rIns="0" bIns="0" rtlCol="0" anchor="t"/>
+          <a:lstStyle/>
+          <a:p>
+            <a:pPr algn="l" indent="0" marL="0">
+              <a:lnSpc>
+                <a:spcPts val="4307"/>
+              </a:lnSpc>
+              <a:buNone/>
+            </a:pPr>
+            <a:r>
+              <a:rPr lang="en-US" sz="3915" b="1" spc="-54" kern="0" dirty="0">
+                <a:solidFill>
+                  <a:srgbClr val="FFFFFF"/>
+                </a:solidFill>
+                <a:latin typeface="Malgun Gothic" pitchFamily="34" charset="0"/>
+                <a:ea typeface="Malgun Gothic" pitchFamily="34" charset="-122"/>
+                <a:cs typeface="Malgun Gothic" pitchFamily="34" charset="-120"/>
+              </a:rPr>
+              <a:t>Q &amp; A</a:t>
+            </a:r>
+            <a:endParaRPr lang="en-US" sz="3915" dirty="0"/>
+          </a:p>
+        </p:txBody>
+      </p:sp>
+      <p:sp>
+        <p:nvSpPr>
+          <p:cNvPr id="30" name="Text 28"/>
+          <p:cNvSpPr txBox="1"/>
+          <p:nvPr/>
+        </p:nvSpPr>
+        <p:spPr>
+          <a:xfrm>
+            <a:off x="6953829" y="3752149"/>
+            <a:ext cx="4504792" cy="603321"/>
+          </a:xfrm>
+          <a:prstGeom prst="rect">
+            <a:avLst/>
+          </a:prstGeom>
+          <a:noFill/>
+          <a:ln/>
+        </p:spPr>
+        <p:txBody>
+          <a:bodyPr wrap="square" lIns="0" tIns="0" rIns="0" bIns="0" rtlCol="0" anchor="t"/>
+          <a:lstStyle/>
+          <a:p>
+            <a:pPr algn="l" indent="0" marL="0">
+              <a:lnSpc>
+                <a:spcPts val="2375"/>
+              </a:lnSpc>
+              <a:buNone/>
+            </a:pPr>
+            <a:r>
+              <a:rPr lang="en-US" sz="1697" spc="-54" kern="0" dirty="0">
+                <a:solidFill>
+                  <a:srgbClr val="94A3B8"/>
+                </a:solidFill>
+                <a:latin typeface="Malgun Gothic" pitchFamily="34" charset="0"/>
+                <a:ea typeface="Malgun Gothic" pitchFamily="34" charset="-122"/>
+                <a:cs typeface="Malgun Gothic" pitchFamily="34" charset="-120"/>
+              </a:rPr>
+              <a:t>투자 라운드 및 비즈니스 실적에 관한 논의를 환영합니다.</a:t>
+            </a:r>
+            <a:endParaRPr lang="en-US" sz="1697" dirty="0"/>
+          </a:p>
+        </p:txBody>
+      </p:sp>
+      <p:sp>
+        <p:nvSpPr>
+          <p:cNvPr id="31" name="Shape 29"/>
+          <p:cNvSpPr/>
+          <p:nvPr/>
+        </p:nvSpPr>
+        <p:spPr>
+          <a:xfrm>
+            <a:off x="6972849" y="4453951"/>
+            <a:ext cx="4466661" cy="9510"/>
+          </a:xfrm>
+          <a:prstGeom prst="rect">
+            <a:avLst/>
+          </a:prstGeom>
+          <a:solidFill>
+            <a:srgbClr val="FFFFFF">
+              <a:alpha val="8000"/>
+            </a:srgbClr>
+          </a:solidFill>
+          <a:ln/>
+        </p:spPr>
+      </p:sp>
+      <p:sp>
+        <p:nvSpPr>
+          <p:cNvPr id="32" name="Text 30"/>
+          <p:cNvSpPr txBox="1"/>
+          <p:nvPr/>
+        </p:nvSpPr>
+        <p:spPr>
+          <a:xfrm>
+            <a:off x="6953829" y="4551243"/>
+            <a:ext cx="4843028" cy="281727"/>
+          </a:xfrm>
+          <a:prstGeom prst="rect">
+            <a:avLst/>
+          </a:prstGeom>
+          <a:noFill/>
+          <a:ln/>
+        </p:spPr>
+        <p:txBody>
+          <a:bodyPr wrap="none" lIns="0" tIns="0" rIns="0" bIns="0" rtlCol="0" anchor="t"/>
+          <a:lstStyle/>
+          <a:p>
+            <a:pPr algn="l" indent="0" marL="0">
+              <a:lnSpc>
+                <a:spcPts val="2219"/>
+              </a:lnSpc>
+              <a:buNone/>
+            </a:pPr>
+            <a:r>
+              <a:rPr lang="en-US" sz="1479" spc="-54" kern="0" dirty="0">
+                <a:solidFill>
+                  <a:srgbClr val="94A3B8"/>
+                </a:solidFill>
+                <a:latin typeface="Malgun Gothic" pitchFamily="34" charset="0"/>
+                <a:ea typeface="Malgun Gothic" pitchFamily="34" charset="-122"/>
+                <a:cs typeface="Malgun Gothic" pitchFamily="34" charset="-120"/>
+              </a:rPr>
+              <a:t>INVESTOR DATA ROOM</a:t>
+            </a:r>
+            <a:endParaRPr lang="en-US" sz="1479" dirty="0"/>
+          </a:p>
+        </p:txBody>
+      </p:sp>
+      <p:sp>
+        <p:nvSpPr>
+          <p:cNvPr id="33" name="Text 31"/>
+          <p:cNvSpPr txBox="1"/>
+          <p:nvPr/>
+        </p:nvSpPr>
+        <p:spPr>
+          <a:xfrm>
+            <a:off x="6953829" y="4852264"/>
+            <a:ext cx="4843028" cy="348021"/>
+          </a:xfrm>
+          <a:prstGeom prst="rect">
+            <a:avLst/>
+          </a:prstGeom>
+          <a:noFill/>
+          <a:ln/>
+        </p:spPr>
+        <p:txBody>
+          <a:bodyPr wrap="none" lIns="0" tIns="0" rIns="0" bIns="0" rtlCol="0" anchor="t"/>
+          <a:lstStyle/>
+          <a:p>
+            <a:pPr algn="l" indent="0" marL="0">
+              <a:lnSpc>
+                <a:spcPts val="2741"/>
+              </a:lnSpc>
+              <a:buNone/>
+            </a:pPr>
+            <a:r>
+              <a:rPr lang="en-US" sz="1827" b="1" spc="-54" kern="0" dirty="0">
+                <a:solidFill>
+                  <a:srgbClr val="FBBF24"/>
+                </a:solidFill>
+                <a:latin typeface="Malgun Gothic" pitchFamily="34" charset="0"/>
+                <a:ea typeface="Malgun Gothic" pitchFamily="34" charset="-122"/>
+                <a:cs typeface="Malgun Gothic" pitchFamily="34" charset="-120"/>
+              </a:rPr>
+              <a:t>ir.autonomous-agent.io</a:t>
+            </a:r>
+            <a:endParaRPr lang="en-US" sz="1827" dirty="0"/>
+          </a:p>
+        </p:txBody>
+      </p:sp>
+      <p:sp>
+        <p:nvSpPr>
+          <p:cNvPr id="34" name="Text 32"/>
+          <p:cNvSpPr txBox="1"/>
+          <p:nvPr/>
+        </p:nvSpPr>
+        <p:spPr>
+          <a:xfrm>
+            <a:off x="6953829" y="5257160"/>
+            <a:ext cx="4843028" cy="281727"/>
+          </a:xfrm>
+          <a:prstGeom prst="rect">
+            <a:avLst/>
+          </a:prstGeom>
+          <a:noFill/>
+          <a:ln/>
+        </p:spPr>
+        <p:txBody>
+          <a:bodyPr wrap="none" lIns="0" tIns="0" rIns="0" bIns="0" rtlCol="0" anchor="t"/>
+          <a:lstStyle/>
+          <a:p>
+            <a:pPr algn="l" indent="0" marL="0">
+              <a:lnSpc>
+                <a:spcPts val="2219"/>
+              </a:lnSpc>
+              <a:buNone/>
+            </a:pPr>
+            <a:r>
+              <a:rPr lang="en-US" sz="1479" spc="-54" kern="0" dirty="0">
+                <a:solidFill>
+                  <a:srgbClr val="94A3B8"/>
+                </a:solidFill>
+                <a:latin typeface="Malgun Gothic" pitchFamily="34" charset="0"/>
+                <a:ea typeface="Malgun Gothic" pitchFamily="34" charset="-122"/>
+                <a:cs typeface="Malgun Gothic" pitchFamily="34" charset="-120"/>
+              </a:rPr>
+              <a:t>FOUNDER DIRECT CONTACT</a:t>
+            </a:r>
+            <a:endParaRPr lang="en-US" sz="1479" dirty="0"/>
+          </a:p>
+        </p:txBody>
+      </p:sp>
+      <p:sp>
+        <p:nvSpPr>
+          <p:cNvPr id="35" name="Text 33"/>
+          <p:cNvSpPr txBox="1"/>
+          <p:nvPr/>
+        </p:nvSpPr>
+        <p:spPr>
+          <a:xfrm>
+            <a:off x="6953829" y="5558089"/>
+            <a:ext cx="4843028" cy="348021"/>
+          </a:xfrm>
+          <a:prstGeom prst="rect">
+            <a:avLst/>
+          </a:prstGeom>
+          <a:noFill/>
+          <a:ln/>
+        </p:spPr>
+        <p:txBody>
+          <a:bodyPr wrap="none" lIns="0" tIns="0" rIns="0" bIns="0" rtlCol="0" anchor="t"/>
+          <a:lstStyle/>
+          <a:p>
+            <a:pPr algn="l" indent="0" marL="0">
+              <a:lnSpc>
+                <a:spcPts val="2741"/>
+              </a:lnSpc>
+              <a:buNone/>
+            </a:pPr>
+            <a:r>
+              <a:rPr lang="en-US" sz="1827" spc="-54" kern="0" dirty="0">
+                <a:solidFill>
+                  <a:srgbClr val="E2E8F0"/>
+                </a:solidFill>
+                <a:latin typeface="Malgun Gothic" pitchFamily="34" charset="0"/>
+                <a:ea typeface="Malgun Gothic" pitchFamily="34" charset="-122"/>
+                <a:cs typeface="Malgun Gothic" pitchFamily="34" charset="-120"/>
+              </a:rPr>
+              <a:t>founder@autonomous-agent.io</a:t>
+            </a:r>
+            <a:endParaRPr lang="en-US" sz="1827" dirty="0"/>
+          </a:p>
+        </p:txBody>
+      </p:sp>
     </p:spTree>
   </p:cSld>
   <p:clrMapOvr>
